--- a/docs/public/course-assets/course-pptx/ag-002.pptx
+++ b/docs/public/course-assets/course-pptx/ag-002.pptx
@@ -2,24 +2,24 @@
 <file path=ppt/presentation.xml><?xml version="1.0" encoding="utf-8"?>
 <p:presentation xmlns:p="http://schemas.openxmlformats.org/presentationml/2006/main">
   <p:sldMasterIdLst>
-    <p:sldMasterId xmlns:r="http://schemas.openxmlformats.org/officeDocument/2006/relationships" id="2147483648" r:id="R73173c8f8c654419"/>
+    <p:sldMasterId xmlns:r="http://schemas.openxmlformats.org/officeDocument/2006/relationships" id="2147483648" r:id="R234acfe914744c4d"/>
   </p:sldMasterIdLst>
   <p:notesMasterIdLst>
-    <p:notesMasterId xmlns:r="http://schemas.openxmlformats.org/officeDocument/2006/relationships" r:id="Rcc6138b640cd45fd"/>
+    <p:notesMasterId xmlns:r="http://schemas.openxmlformats.org/officeDocument/2006/relationships" r:id="Rbe8cea7905474f6e"/>
   </p:notesMasterIdLst>
   <p:sldIdLst>
-    <p:sldId xmlns:r="http://schemas.openxmlformats.org/officeDocument/2006/relationships" id="256" r:id="R362ce9f5f00b4ffa"/>
-    <p:sldId xmlns:r="http://schemas.openxmlformats.org/officeDocument/2006/relationships" id="257" r:id="R1d5f3afdc0694a7c"/>
-    <p:sldId xmlns:r="http://schemas.openxmlformats.org/officeDocument/2006/relationships" id="258" r:id="R9969dec8def944d1"/>
-    <p:sldId xmlns:r="http://schemas.openxmlformats.org/officeDocument/2006/relationships" id="259" r:id="Rda53889388ce40d9"/>
-    <p:sldId xmlns:r="http://schemas.openxmlformats.org/officeDocument/2006/relationships" id="260" r:id="R5722395a74c544e6"/>
-    <p:sldId xmlns:r="http://schemas.openxmlformats.org/officeDocument/2006/relationships" id="261" r:id="Ra3623f1a1749480c"/>
-    <p:sldId xmlns:r="http://schemas.openxmlformats.org/officeDocument/2006/relationships" id="262" r:id="R79253707580e4c73"/>
-    <p:sldId xmlns:r="http://schemas.openxmlformats.org/officeDocument/2006/relationships" id="263" r:id="Re3968b5e50ec4f51"/>
-    <p:sldId xmlns:r="http://schemas.openxmlformats.org/officeDocument/2006/relationships" id="264" r:id="R0d826594cf7748f3"/>
-    <p:sldId xmlns:r="http://schemas.openxmlformats.org/officeDocument/2006/relationships" id="265" r:id="R5ebed9ccd82a4911"/>
-    <p:sldId xmlns:r="http://schemas.openxmlformats.org/officeDocument/2006/relationships" id="266" r:id="Rcb3d2692213a415b"/>
-    <p:sldId xmlns:r="http://schemas.openxmlformats.org/officeDocument/2006/relationships" id="267" r:id="Rd9cf480cb92f4d87"/>
+    <p:sldId xmlns:r="http://schemas.openxmlformats.org/officeDocument/2006/relationships" id="256" r:id="Rcb620d788d1048b4"/>
+    <p:sldId xmlns:r="http://schemas.openxmlformats.org/officeDocument/2006/relationships" id="257" r:id="R2a6d1b3e5f6d4603"/>
+    <p:sldId xmlns:r="http://schemas.openxmlformats.org/officeDocument/2006/relationships" id="258" r:id="R4d5dbb9cee4a41bc"/>
+    <p:sldId xmlns:r="http://schemas.openxmlformats.org/officeDocument/2006/relationships" id="259" r:id="Rfaea849e81a74f84"/>
+    <p:sldId xmlns:r="http://schemas.openxmlformats.org/officeDocument/2006/relationships" id="260" r:id="R59d4b9c5861c4978"/>
+    <p:sldId xmlns:r="http://schemas.openxmlformats.org/officeDocument/2006/relationships" id="261" r:id="Rad036fd2b5fe43cc"/>
+    <p:sldId xmlns:r="http://schemas.openxmlformats.org/officeDocument/2006/relationships" id="262" r:id="R0617780e1bea4b84"/>
+    <p:sldId xmlns:r="http://schemas.openxmlformats.org/officeDocument/2006/relationships" id="263" r:id="Rc48a98cbae174a06"/>
+    <p:sldId xmlns:r="http://schemas.openxmlformats.org/officeDocument/2006/relationships" id="264" r:id="R1973445b67e84f1d"/>
+    <p:sldId xmlns:r="http://schemas.openxmlformats.org/officeDocument/2006/relationships" id="265" r:id="R82fe1cd8896340a0"/>
+    <p:sldId xmlns:r="http://schemas.openxmlformats.org/officeDocument/2006/relationships" id="266" r:id="Rf75f04e9409249a9"/>
+    <p:sldId xmlns:r="http://schemas.openxmlformats.org/officeDocument/2006/relationships" id="267" r:id="R66f7fad44143445e"/>
   </p:sldIdLst>
   <p:sldSz cx="12192000" cy="6858000"/>
   <p:notesSz cx="6858000" cy="9144000"/>
@@ -1338,7 +1338,7 @@
   </p:cSld>
   <p:clrMap bg1="lt1" tx1="dk1" bg2="lt2" tx2="dk2" accent1="accent1" accent2="accent2" accent3="accent3" accent4="accent4" accent5="accent5" accent6="accent6" hlink="hlink" folHlink="folHlink"/>
   <p:sldLayoutIdLst>
-    <p:sldLayoutId xmlns:r="http://schemas.openxmlformats.org/officeDocument/2006/relationships" id="2147483649" r:id="Re3845eab861a4886"/>
+    <p:sldLayoutId xmlns:r="http://schemas.openxmlformats.org/officeDocument/2006/relationships" id="2147483649" r:id="Rca091969603e424f"/>
   </p:sldLayoutIdLst>
   <p:txStyles>
     <p:titleStyle>
@@ -1889,7 +1889,7 @@
           <p:cNvPr id="1" name="cover-rule">
             <a:extLst xmlns:a="http://schemas.openxmlformats.org/drawingml/2006/main">
               <a:ext uri="{FF2B5EF4-FFF2-40B4-BE49-F238E27FC236}">
-                <a16:creationId xmlns:a16="http://schemas.microsoft.com/office/drawing/2014/main" id="{A574E555-3931-47E0-AD88-B8B4E70459B7}"/>
+                <a16:creationId xmlns:a16="http://schemas.microsoft.com/office/drawing/2014/main" id="{78397736-B32F-4343-A27C-8E300A187E54}"/>
               </a:ext>
             </a:extLst>
           </p:cNvPr>
@@ -1922,7 +1922,7 @@
           <p:cNvPr id="2" name="cover-ring-1">
             <a:extLst xmlns:a="http://schemas.openxmlformats.org/drawingml/2006/main">
               <a:ext uri="{FF2B5EF4-FFF2-40B4-BE49-F238E27FC236}">
-                <a16:creationId xmlns:a16="http://schemas.microsoft.com/office/drawing/2014/main" id="{D673E69C-1C88-4498-AF2D-9A8E9BC020D9}"/>
+                <a16:creationId xmlns:a16="http://schemas.microsoft.com/office/drawing/2014/main" id="{2864B144-C904-4367-8539-3414865AF082}"/>
               </a:ext>
             </a:extLst>
           </p:cNvPr>
@@ -1953,7 +1953,7 @@
           <p:cNvPr id="3" name="cover-ring-2">
             <a:extLst xmlns:a="http://schemas.openxmlformats.org/drawingml/2006/main">
               <a:ext uri="{FF2B5EF4-FFF2-40B4-BE49-F238E27FC236}">
-                <a16:creationId xmlns:a16="http://schemas.microsoft.com/office/drawing/2014/main" id="{7D7E2E26-95FC-4248-8777-406CCAF3154F}"/>
+                <a16:creationId xmlns:a16="http://schemas.microsoft.com/office/drawing/2014/main" id="{DBBAC4BD-157C-4A7F-BEA8-35EDFEADFEF2}"/>
               </a:ext>
             </a:extLst>
           </p:cNvPr>
@@ -1984,7 +1984,7 @@
           <p:cNvPr id="4" name="cover-core">
             <a:extLst xmlns:a="http://schemas.openxmlformats.org/drawingml/2006/main">
               <a:ext uri="{FF2B5EF4-FFF2-40B4-BE49-F238E27FC236}">
-                <a16:creationId xmlns:a16="http://schemas.microsoft.com/office/drawing/2014/main" id="{361F4C87-DD7C-45D5-979B-552DF09EE582}"/>
+                <a16:creationId xmlns:a16="http://schemas.microsoft.com/office/drawing/2014/main" id="{D317F816-D95E-48E0-A9E0-81EA906B471D}"/>
               </a:ext>
             </a:extLst>
           </p:cNvPr>
@@ -2017,7 +2017,7 @@
           <p:cNvPr id="5" name="cover-line-1">
             <a:extLst xmlns:a="http://schemas.openxmlformats.org/drawingml/2006/main">
               <a:ext uri="{FF2B5EF4-FFF2-40B4-BE49-F238E27FC236}">
-                <a16:creationId xmlns:a16="http://schemas.microsoft.com/office/drawing/2014/main" id="{99B95865-198D-402F-B5DE-7EE654353AFE}"/>
+                <a16:creationId xmlns:a16="http://schemas.microsoft.com/office/drawing/2014/main" id="{398C3A71-C532-4773-BEB8-E87462C77371}"/>
               </a:ext>
             </a:extLst>
           </p:cNvPr>
@@ -2048,7 +2048,7 @@
           <p:cNvPr id="6" name="cover-line-2">
             <a:extLst xmlns:a="http://schemas.openxmlformats.org/drawingml/2006/main">
               <a:ext uri="{FF2B5EF4-FFF2-40B4-BE49-F238E27FC236}">
-                <a16:creationId xmlns:a16="http://schemas.microsoft.com/office/drawing/2014/main" id="{0656CD51-134C-46BE-AFB4-5BD15CF3AFE5}"/>
+                <a16:creationId xmlns:a16="http://schemas.microsoft.com/office/drawing/2014/main" id="{404A17B9-3317-4FC0-9B7A-B379BA2713FE}"/>
               </a:ext>
             </a:extLst>
           </p:cNvPr>
@@ -2079,7 +2079,7 @@
           <p:cNvPr id="7" name="cover-eyebrow">
             <a:extLst xmlns:a="http://schemas.openxmlformats.org/drawingml/2006/main">
               <a:ext uri="{FF2B5EF4-FFF2-40B4-BE49-F238E27FC236}">
-                <a16:creationId xmlns:a16="http://schemas.microsoft.com/office/drawing/2014/main" id="{33451E90-4F60-4384-ADD9-B61762F66E38}"/>
+                <a16:creationId xmlns:a16="http://schemas.microsoft.com/office/drawing/2014/main" id="{5071FD16-548D-4EDB-9D2D-6E57BAF905BC}"/>
               </a:ext>
             </a:extLst>
           </p:cNvPr>
@@ -2137,7 +2137,7 @@
           <p:cNvPr id="8" name="cover-title">
             <a:extLst xmlns:a="http://schemas.openxmlformats.org/drawingml/2006/main">
               <a:ext uri="{FF2B5EF4-FFF2-40B4-BE49-F238E27FC236}">
-                <a16:creationId xmlns:a16="http://schemas.microsoft.com/office/drawing/2014/main" id="{5B97C2A1-2AB9-40B7-849C-629E9BB2B56D}"/>
+                <a16:creationId xmlns:a16="http://schemas.microsoft.com/office/drawing/2014/main" id="{D6649B0C-6988-4894-ADDB-86D0984BCD71}"/>
               </a:ext>
             </a:extLst>
           </p:cNvPr>
@@ -2195,7 +2195,7 @@
           <p:cNvPr id="9" name="cover-subtitle">
             <a:extLst xmlns:a="http://schemas.openxmlformats.org/drawingml/2006/main">
               <a:ext uri="{FF2B5EF4-FFF2-40B4-BE49-F238E27FC236}">
-                <a16:creationId xmlns:a16="http://schemas.microsoft.com/office/drawing/2014/main" id="{270FEA0A-4B29-41B0-B18E-5E4CEDA82165}"/>
+                <a16:creationId xmlns:a16="http://schemas.microsoft.com/office/drawing/2014/main" id="{D740FDD1-92C6-4AFD-AED7-A6E22F3CAA41}"/>
               </a:ext>
             </a:extLst>
           </p:cNvPr>
@@ -2257,7 +2257,7 @@
           <p:cNvPr id="10" name="cover-lead">
             <a:extLst xmlns:a="http://schemas.openxmlformats.org/drawingml/2006/main">
               <a:ext uri="{FF2B5EF4-FFF2-40B4-BE49-F238E27FC236}">
-                <a16:creationId xmlns:a16="http://schemas.microsoft.com/office/drawing/2014/main" id="{77887401-660A-4FBB-9C26-7016223C2626}"/>
+                <a16:creationId xmlns:a16="http://schemas.microsoft.com/office/drawing/2014/main" id="{D34F7343-9270-4ABC-82F3-212FD13C7BAF}"/>
               </a:ext>
             </a:extLst>
           </p:cNvPr>
@@ -2305,7 +2305,7 @@
                 <a:ea typeface="PingFang SC"/>
                 <a:cs typeface="PingFang SC"/>
               </a:rPr>
-              <a:t>语言模型能生成文字，但不能仅凭文字读取最新库存、查询内部资料或修改日程。智能体要进入真实业务，必须通过工具与外部系统交互。工具把“模型建议做什么”转换为“系统实际执行了什么”…</a:t>
+              <a:t>语言模型能生成文字；但不能仅凭文字读取最新库存、查询内部资料或修改日程；智能体要进入真实业务；必须通过工具与外部系统交互；工具把“模型建议做什么”转换为“系统实际执行了什么”</a:t>
             </a:r>
           </a:p>
         </p:txBody>
@@ -2315,7 +2315,7 @@
           <p:cNvPr id="11" name="cover-course">
             <a:extLst xmlns:a="http://schemas.openxmlformats.org/drawingml/2006/main">
               <a:ext uri="{FF2B5EF4-FFF2-40B4-BE49-F238E27FC236}">
-                <a16:creationId xmlns:a16="http://schemas.microsoft.com/office/drawing/2014/main" id="{F3974094-31BB-4C19-B96C-B622594A3B3E}"/>
+                <a16:creationId xmlns:a16="http://schemas.microsoft.com/office/drawing/2014/main" id="{2752497D-86DF-4BF5-8122-F827CF3134A2}"/>
               </a:ext>
             </a:extLst>
           </p:cNvPr>
@@ -2373,7 +2373,7 @@
           <p:cNvPr id="12" name="cover-id">
             <a:extLst xmlns:a="http://schemas.openxmlformats.org/drawingml/2006/main">
               <a:ext uri="{FF2B5EF4-FFF2-40B4-BE49-F238E27FC236}">
-                <a16:creationId xmlns:a16="http://schemas.microsoft.com/office/drawing/2014/main" id="{AD7A5774-5AE5-4A56-B3E1-DF472A709006}"/>
+                <a16:creationId xmlns:a16="http://schemas.microsoft.com/office/drawing/2014/main" id="{96A79012-7A1A-4875-81B0-57F9524F6397}"/>
               </a:ext>
             </a:extLst>
           </p:cNvPr>
@@ -2429,7 +2429,7 @@
     </p:spTree>
     <p:extLst>
       <p:ext uri="{BB962C8B-B14F-4D97-AF65-F5344CB8AC3E}">
-        <p14:creationId xmlns:p14="http://schemas.microsoft.com/office/powerpoint/2010/main" val="759446683"/>
+        <p14:creationId xmlns:p14="http://schemas.microsoft.com/office/powerpoint/2010/main" val="1936057536"/>
       </p:ext>
     </p:extLst>
   </p:cSld>
@@ -2460,7 +2460,7 @@
           <p:cNvPr id="1" name="s10-rule">
             <a:extLst xmlns:a="http://schemas.openxmlformats.org/drawingml/2006/main">
               <a:ext uri="{FF2B5EF4-FFF2-40B4-BE49-F238E27FC236}">
-                <a16:creationId xmlns:a16="http://schemas.microsoft.com/office/drawing/2014/main" id="{71DD4F5B-6283-4426-882E-2D3C7176BC6B}"/>
+                <a16:creationId xmlns:a16="http://schemas.microsoft.com/office/drawing/2014/main" id="{B29CA3E2-B561-433B-B305-8B799839EC0A}"/>
               </a:ext>
             </a:extLst>
           </p:cNvPr>
@@ -2493,7 +2493,7 @@
           <p:cNvPr id="2" name="s10-eyebrow">
             <a:extLst xmlns:a="http://schemas.openxmlformats.org/drawingml/2006/main">
               <a:ext uri="{FF2B5EF4-FFF2-40B4-BE49-F238E27FC236}">
-                <a16:creationId xmlns:a16="http://schemas.microsoft.com/office/drawing/2014/main" id="{E40CED19-8F71-4E40-AA73-7D4935EC1BA6}"/>
+                <a16:creationId xmlns:a16="http://schemas.microsoft.com/office/drawing/2014/main" id="{F485EB94-8AE6-47D1-80C4-27661E38E448}"/>
               </a:ext>
             </a:extLst>
           </p:cNvPr>
@@ -2551,7 +2551,7 @@
           <p:cNvPr id="3" name="s10-title">
             <a:extLst xmlns:a="http://schemas.openxmlformats.org/drawingml/2006/main">
               <a:ext uri="{FF2B5EF4-FFF2-40B4-BE49-F238E27FC236}">
-                <a16:creationId xmlns:a16="http://schemas.microsoft.com/office/drawing/2014/main" id="{69612CC7-D64B-4D0B-8CFF-EFF9D385AD26}"/>
+                <a16:creationId xmlns:a16="http://schemas.microsoft.com/office/drawing/2014/main" id="{7B6188FE-BA74-4C48-ACCE-C7F38662744A}"/>
               </a:ext>
             </a:extLst>
           </p:cNvPr>
@@ -2599,7 +2599,7 @@
                 <a:ea typeface="PingFang SC"/>
                 <a:cs typeface="PingFang SC"/>
               </a:rPr>
-              <a:t>把方法落实为可验证的行动</a:t>
+              <a:t>智能体工具与规划：一次可验收练习</a:t>
             </a:r>
           </a:p>
         </p:txBody>
@@ -2609,7 +2609,7 @@
           <p:cNvPr id="4" name="s10-footer">
             <a:extLst xmlns:a="http://schemas.openxmlformats.org/drawingml/2006/main">
               <a:ext uri="{FF2B5EF4-FFF2-40B4-BE49-F238E27FC236}">
-                <a16:creationId xmlns:a16="http://schemas.microsoft.com/office/drawing/2014/main" id="{73457CB0-5DFF-44FC-9289-809EAF0FD793}"/>
+                <a16:creationId xmlns:a16="http://schemas.microsoft.com/office/drawing/2014/main" id="{666C736A-C6EA-4E40-94F8-B48FFF75D096}"/>
               </a:ext>
             </a:extLst>
           </p:cNvPr>
@@ -2640,7 +2640,7 @@
           <p:cNvPr id="5" name="s10-identity">
             <a:extLst xmlns:a="http://schemas.openxmlformats.org/drawingml/2006/main">
               <a:ext uri="{FF2B5EF4-FFF2-40B4-BE49-F238E27FC236}">
-                <a16:creationId xmlns:a16="http://schemas.microsoft.com/office/drawing/2014/main" id="{8992C922-16DE-41AD-94E3-FC210DCB9EE8}"/>
+                <a16:creationId xmlns:a16="http://schemas.microsoft.com/office/drawing/2014/main" id="{821BA33F-978E-4F10-A84B-14458045299A}"/>
               </a:ext>
             </a:extLst>
           </p:cNvPr>
@@ -2698,7 +2698,7 @@
           <p:cNvPr id="6" name="practice-circle-0">
             <a:extLst xmlns:a="http://schemas.openxmlformats.org/drawingml/2006/main">
               <a:ext uri="{FF2B5EF4-FFF2-40B4-BE49-F238E27FC236}">
-                <a16:creationId xmlns:a16="http://schemas.microsoft.com/office/drawing/2014/main" id="{0DF86719-0424-4809-890B-734FF40E148A}"/>
+                <a16:creationId xmlns:a16="http://schemas.microsoft.com/office/drawing/2014/main" id="{4C5CC7EF-46BC-4BA5-9095-370D415B3B0E}"/>
               </a:ext>
             </a:extLst>
           </p:cNvPr>
@@ -2731,7 +2731,7 @@
           <p:cNvPr id="7" name="practice-number-0">
             <a:extLst xmlns:a="http://schemas.openxmlformats.org/drawingml/2006/main">
               <a:ext uri="{FF2B5EF4-FFF2-40B4-BE49-F238E27FC236}">
-                <a16:creationId xmlns:a16="http://schemas.microsoft.com/office/drawing/2014/main" id="{16BB603D-5A0E-429D-970A-7147D754A2EA}"/>
+                <a16:creationId xmlns:a16="http://schemas.microsoft.com/office/drawing/2014/main" id="{7BDC23C9-02B0-4C86-964D-B5F4F01128E4}"/>
               </a:ext>
             </a:extLst>
           </p:cNvPr>
@@ -2789,7 +2789,7 @@
           <p:cNvPr id="8" name="practice-item-0">
             <a:extLst xmlns:a="http://schemas.openxmlformats.org/drawingml/2006/main">
               <a:ext uri="{FF2B5EF4-FFF2-40B4-BE49-F238E27FC236}">
-                <a16:creationId xmlns:a16="http://schemas.microsoft.com/office/drawing/2014/main" id="{7B4AB5C3-CAB4-4942-93EC-468560AB66BE}"/>
+                <a16:creationId xmlns:a16="http://schemas.microsoft.com/office/drawing/2014/main" id="{941F133E-43C7-4D0A-837B-88581A819179}"/>
               </a:ext>
             </a:extLst>
           </p:cNvPr>
@@ -2820,7 +2820,7 @@
         </p:spPr>
         <p:txBody>
           <a:bodyPr xmlns:a="http://schemas.openxmlformats.org/drawingml/2006/main" lIns="152400" tIns="133350" rIns="152400" bIns="133350" anchor="ctr">
-            <a:normAutofit fontScale="95772"/>
+            <a:normAutofit fontScale="100000"/>
           </a:bodyPr>
           <a:lstStyle xmlns:a="http://schemas.openxmlformats.org/drawingml/2006/main"/>
           <a:p xmlns:a="http://schemas.openxmlformats.org/drawingml/2006/main">
@@ -2843,7 +2843,7 @@
                 <a:ea typeface="PingFang SC"/>
                 <a:cs typeface="PingFang SC"/>
               </a:rPr>
-              <a:t>以“查询图书馆在借图书并生成到期提醒”为例，完成一份系统设计：；分别为“查询在借图书”和“创建提醒”写工具契约，标明读取或写入权限、错误码和重试规则</a:t>
+              <a:t>以“查询图书馆在借图书并生成到期提醒”为例，完成一份系统设计；分别为“查询在借图书”和“创建提醒”写工具契约，标明读取或写入权限、错误码和重试规则</a:t>
             </a:r>
           </a:p>
         </p:txBody>
@@ -2853,7 +2853,7 @@
           <p:cNvPr id="9" name="practice-connector-0">
             <a:extLst xmlns:a="http://schemas.openxmlformats.org/drawingml/2006/main">
               <a:ext uri="{FF2B5EF4-FFF2-40B4-BE49-F238E27FC236}">
-                <a16:creationId xmlns:a16="http://schemas.microsoft.com/office/drawing/2014/main" id="{5A84C952-AF10-484E-8731-58553132D060}"/>
+                <a16:creationId xmlns:a16="http://schemas.microsoft.com/office/drawing/2014/main" id="{1C86A9E5-64BD-4934-A3EC-DDECA47483DE}"/>
               </a:ext>
             </a:extLst>
           </p:cNvPr>
@@ -2873,7 +2873,7 @@
           <a:noFill xmlns:a="http://schemas.openxmlformats.org/drawingml/2006/main"/>
           <a:ln xmlns:a="http://schemas.openxmlformats.org/drawingml/2006/main" w="28575">
             <a:solidFill>
-              <a:srgbClr val="17A6C8"/>
+              <a:srgbClr val="006B80"/>
             </a:solidFill>
             <a:prstDash val="solid"/>
           </a:ln>
@@ -2884,7 +2884,7 @@
           <p:cNvPr id="10" name="practice-circle-1">
             <a:extLst xmlns:a="http://schemas.openxmlformats.org/drawingml/2006/main">
               <a:ext uri="{FF2B5EF4-FFF2-40B4-BE49-F238E27FC236}">
-                <a16:creationId xmlns:a16="http://schemas.microsoft.com/office/drawing/2014/main" id="{A29DD182-817F-4AF3-8E6F-6DF09A35B28D}"/>
+                <a16:creationId xmlns:a16="http://schemas.microsoft.com/office/drawing/2014/main" id="{DB579BD8-73D8-4324-B496-1E96C0C5BE33}"/>
               </a:ext>
             </a:extLst>
           </p:cNvPr>
@@ -2917,7 +2917,7 @@
           <p:cNvPr id="11" name="practice-number-1">
             <a:extLst xmlns:a="http://schemas.openxmlformats.org/drawingml/2006/main">
               <a:ext uri="{FF2B5EF4-FFF2-40B4-BE49-F238E27FC236}">
-                <a16:creationId xmlns:a16="http://schemas.microsoft.com/office/drawing/2014/main" id="{A9B47EE3-47E3-49B2-B142-65F2B1A2D801}"/>
+                <a16:creationId xmlns:a16="http://schemas.microsoft.com/office/drawing/2014/main" id="{FCDA34D1-7638-4ECA-BEF8-C9887FED020A}"/>
               </a:ext>
             </a:extLst>
           </p:cNvPr>
@@ -2975,7 +2975,7 @@
           <p:cNvPr id="12" name="practice-item-1">
             <a:extLst xmlns:a="http://schemas.openxmlformats.org/drawingml/2006/main">
               <a:ext uri="{FF2B5EF4-FFF2-40B4-BE49-F238E27FC236}">
-                <a16:creationId xmlns:a16="http://schemas.microsoft.com/office/drawing/2014/main" id="{D00DD5AC-0EE4-49BE-9801-D4A7EB8F6590}"/>
+                <a16:creationId xmlns:a16="http://schemas.microsoft.com/office/drawing/2014/main" id="{71958622-6A34-476A-9798-8FCF1800EC72}"/>
               </a:ext>
             </a:extLst>
           </p:cNvPr>
@@ -3029,7 +3029,7 @@
                 <a:ea typeface="PingFang SC"/>
                 <a:cs typeface="PingFang SC"/>
               </a:rPr>
-              <a:t>画出 host、两个 client/server 连接以及 tools、resources、prompts 的位置，并写出数据不能越过的边界。；把信息分到当前上下文、短期状态、长期记忆三栏…</a:t>
+              <a:t>画出 host、两个 client/server 连接以及 tools、resources、prompts 的位置；并写出数据不能越过的边界；把信息分到当前上下文、短期状态、长期记忆三栏</a:t>
             </a:r>
           </a:p>
         </p:txBody>
@@ -3039,7 +3039,7 @@
           <p:cNvPr id="13" name="practice-connector-1">
             <a:extLst xmlns:a="http://schemas.openxmlformats.org/drawingml/2006/main">
               <a:ext uri="{FF2B5EF4-FFF2-40B4-BE49-F238E27FC236}">
-                <a16:creationId xmlns:a16="http://schemas.microsoft.com/office/drawing/2014/main" id="{54357C33-834B-47DD-9059-0CF406D775F7}"/>
+                <a16:creationId xmlns:a16="http://schemas.microsoft.com/office/drawing/2014/main" id="{9FCA74E0-9A4B-41BE-9BCE-0C2C9043E9C2}"/>
               </a:ext>
             </a:extLst>
           </p:cNvPr>
@@ -3059,7 +3059,7 @@
           <a:noFill xmlns:a="http://schemas.openxmlformats.org/drawingml/2006/main"/>
           <a:ln xmlns:a="http://schemas.openxmlformats.org/drawingml/2006/main" w="28575">
             <a:solidFill>
-              <a:srgbClr val="17A6C8"/>
+              <a:srgbClr val="006B80"/>
             </a:solidFill>
             <a:prstDash val="solid"/>
           </a:ln>
@@ -3070,7 +3070,7 @@
           <p:cNvPr id="14" name="practice-circle-2">
             <a:extLst xmlns:a="http://schemas.openxmlformats.org/drawingml/2006/main">
               <a:ext uri="{FF2B5EF4-FFF2-40B4-BE49-F238E27FC236}">
-                <a16:creationId xmlns:a16="http://schemas.microsoft.com/office/drawing/2014/main" id="{5DEA4DFA-8A7E-4207-9393-F17C49756D2F}"/>
+                <a16:creationId xmlns:a16="http://schemas.microsoft.com/office/drawing/2014/main" id="{94F4B375-D8A1-486B-9D7E-B6134994E3CF}"/>
               </a:ext>
             </a:extLst>
           </p:cNvPr>
@@ -3088,7 +3088,7 @@
             <a:avLst/>
           </a:prstGeom>
           <a:solidFill xmlns:a="http://schemas.openxmlformats.org/drawingml/2006/main">
-            <a:srgbClr val="17A6C8"/>
+            <a:srgbClr val="006B80"/>
           </a:solidFill>
           <a:ln xmlns:a="http://schemas.openxmlformats.org/drawingml/2006/main" w="28575">
             <a:solidFill>
@@ -3103,7 +3103,7 @@
           <p:cNvPr id="15" name="practice-number-2">
             <a:extLst xmlns:a="http://schemas.openxmlformats.org/drawingml/2006/main">
               <a:ext uri="{FF2B5EF4-FFF2-40B4-BE49-F238E27FC236}">
-                <a16:creationId xmlns:a16="http://schemas.microsoft.com/office/drawing/2014/main" id="{D54B2618-3A05-49D5-91FC-6CDA9CEC8FDF}"/>
+                <a16:creationId xmlns:a16="http://schemas.microsoft.com/office/drawing/2014/main" id="{D0FC7172-3BF4-4C69-A6E9-4642CF75F82C}"/>
               </a:ext>
             </a:extLst>
           </p:cNvPr>
@@ -3161,7 +3161,7 @@
           <p:cNvPr id="16" name="practice-item-2">
             <a:extLst xmlns:a="http://schemas.openxmlformats.org/drawingml/2006/main">
               <a:ext uri="{FF2B5EF4-FFF2-40B4-BE49-F238E27FC236}">
-                <a16:creationId xmlns:a16="http://schemas.microsoft.com/office/drawing/2014/main" id="{D20FB444-BC66-4BA4-8ED6-54954095B26F}"/>
+                <a16:creationId xmlns:a16="http://schemas.microsoft.com/office/drawing/2014/main" id="{319A9E23-359F-4748-924D-524548C7A6B3}"/>
               </a:ext>
             </a:extLst>
           </p:cNvPr>
@@ -3185,7 +3185,7 @@
           </a:solidFill>
           <a:ln xmlns:a="http://schemas.openxmlformats.org/drawingml/2006/main" w="19050">
             <a:solidFill>
-              <a:srgbClr val="17A6C8"/>
+              <a:srgbClr val="006B80"/>
             </a:solidFill>
             <a:prstDash val="solid"/>
           </a:ln>
@@ -3215,7 +3215,7 @@
                 <a:ea typeface="PingFang SC"/>
                 <a:cs typeface="PingFang SC"/>
               </a:rPr>
-              <a:t>设计一个包含至少五步的计划，并加入“查询权限不足”和“创建提醒结果未知”两条失败分支。；验收标准是：任何一次失败都能被明确分类；没有权限时不会继续写入；任务中断后能根据短期状态恢复…</a:t>
+              <a:t>设计一个包含至少五步的计划；并加入“查询权限不足”和“创建提醒结果未知”两条失败分支；验收标准是，任何一次失败都能被明确分类；没有权限时不会继续写入；任务中断后能根据短期状态恢复</a:t>
             </a:r>
           </a:p>
         </p:txBody>
@@ -3223,7 +3223,7 @@
     </p:spTree>
     <p:extLst>
       <p:ext uri="{BB962C8B-B14F-4D97-AF65-F5344CB8AC3E}">
-        <p14:creationId xmlns:p14="http://schemas.microsoft.com/office/powerpoint/2010/main" val="370177160"/>
+        <p14:creationId xmlns:p14="http://schemas.microsoft.com/office/powerpoint/2010/main" val="1048950899"/>
       </p:ext>
     </p:extLst>
   </p:cSld>
@@ -3254,7 +3254,7 @@
           <p:cNvPr id="1" name="s11-rule">
             <a:extLst xmlns:a="http://schemas.openxmlformats.org/drawingml/2006/main">
               <a:ext uri="{FF2B5EF4-FFF2-40B4-BE49-F238E27FC236}">
-                <a16:creationId xmlns:a16="http://schemas.microsoft.com/office/drawing/2014/main" id="{6B1AC7FA-B793-43F1-A39B-C8D114A1FFD9}"/>
+                <a16:creationId xmlns:a16="http://schemas.microsoft.com/office/drawing/2014/main" id="{0FAA06A5-85EB-479E-8EC8-F0C66B477DA6}"/>
               </a:ext>
             </a:extLst>
           </p:cNvPr>
@@ -3287,7 +3287,7 @@
           <p:cNvPr id="2" name="s11-eyebrow">
             <a:extLst xmlns:a="http://schemas.openxmlformats.org/drawingml/2006/main">
               <a:ext uri="{FF2B5EF4-FFF2-40B4-BE49-F238E27FC236}">
-                <a16:creationId xmlns:a16="http://schemas.microsoft.com/office/drawing/2014/main" id="{0C057CDF-32E3-41FF-BFAE-100F31684A2B}"/>
+                <a16:creationId xmlns:a16="http://schemas.microsoft.com/office/drawing/2014/main" id="{D33BD98C-C982-42BD-A03E-3CEAEBE4F921}"/>
               </a:ext>
             </a:extLst>
           </p:cNvPr>
@@ -3345,7 +3345,7 @@
           <p:cNvPr id="3" name="s11-title">
             <a:extLst xmlns:a="http://schemas.openxmlformats.org/drawingml/2006/main">
               <a:ext uri="{FF2B5EF4-FFF2-40B4-BE49-F238E27FC236}">
-                <a16:creationId xmlns:a16="http://schemas.microsoft.com/office/drawing/2014/main" id="{52FECF0C-5DA2-42A4-861B-B6C24E6170C8}"/>
+                <a16:creationId xmlns:a16="http://schemas.microsoft.com/office/drawing/2014/main" id="{C0EDDCF8-670D-4B9F-BFBD-D2DAD7C8E163}"/>
               </a:ext>
             </a:extLst>
           </p:cNvPr>
@@ -3393,7 +3393,7 @@
                 <a:ea typeface="PingFang SC"/>
                 <a:cs typeface="PingFang SC"/>
               </a:rPr>
-              <a:t>带走三条可复用的判断原则</a:t>
+              <a:t>智能体工具与规划：判断时先抓住三点</a:t>
             </a:r>
           </a:p>
         </p:txBody>
@@ -3403,7 +3403,7 @@
           <p:cNvPr id="4" name="s11-footer">
             <a:extLst xmlns:a="http://schemas.openxmlformats.org/drawingml/2006/main">
               <a:ext uri="{FF2B5EF4-FFF2-40B4-BE49-F238E27FC236}">
-                <a16:creationId xmlns:a16="http://schemas.microsoft.com/office/drawing/2014/main" id="{FC1BA3C5-34FC-4BC9-AEEB-ACC8F3E10C86}"/>
+                <a16:creationId xmlns:a16="http://schemas.microsoft.com/office/drawing/2014/main" id="{18444B4F-D5B2-4CCF-8DD1-2BA5ADDBD098}"/>
               </a:ext>
             </a:extLst>
           </p:cNvPr>
@@ -3434,7 +3434,7 @@
           <p:cNvPr id="5" name="s11-identity">
             <a:extLst xmlns:a="http://schemas.openxmlformats.org/drawingml/2006/main">
               <a:ext uri="{FF2B5EF4-FFF2-40B4-BE49-F238E27FC236}">
-                <a16:creationId xmlns:a16="http://schemas.microsoft.com/office/drawing/2014/main" id="{26900F2A-5BBB-4827-A8CE-EA55C0EBDB0C}"/>
+                <a16:creationId xmlns:a16="http://schemas.microsoft.com/office/drawing/2014/main" id="{4F167EBE-4495-4B99-AD5F-5A117324B18C}"/>
               </a:ext>
             </a:extLst>
           </p:cNvPr>
@@ -3492,7 +3492,7 @@
           <p:cNvPr id="6" name="recap-circle-0">
             <a:extLst xmlns:a="http://schemas.openxmlformats.org/drawingml/2006/main">
               <a:ext uri="{FF2B5EF4-FFF2-40B4-BE49-F238E27FC236}">
-                <a16:creationId xmlns:a16="http://schemas.microsoft.com/office/drawing/2014/main" id="{975F12AC-585B-4EE7-80D4-5178E83642A5}"/>
+                <a16:creationId xmlns:a16="http://schemas.microsoft.com/office/drawing/2014/main" id="{4C16A425-F76B-41FC-9C2F-94E5D7E93ACC}"/>
               </a:ext>
             </a:extLst>
           </p:cNvPr>
@@ -3525,7 +3525,7 @@
           <p:cNvPr id="7" name="recap-number-0">
             <a:extLst xmlns:a="http://schemas.openxmlformats.org/drawingml/2006/main">
               <a:ext uri="{FF2B5EF4-FFF2-40B4-BE49-F238E27FC236}">
-                <a16:creationId xmlns:a16="http://schemas.microsoft.com/office/drawing/2014/main" id="{9E24D8B2-57FE-4910-960A-4BDA7378BEC2}"/>
+                <a16:creationId xmlns:a16="http://schemas.microsoft.com/office/drawing/2014/main" id="{97101776-6703-4255-AC5F-58D0C5762ECB}"/>
               </a:ext>
             </a:extLst>
           </p:cNvPr>
@@ -3583,7 +3583,7 @@
           <p:cNvPr id="8" name="recap-item-0">
             <a:extLst xmlns:a="http://schemas.openxmlformats.org/drawingml/2006/main">
               <a:ext uri="{FF2B5EF4-FFF2-40B4-BE49-F238E27FC236}">
-                <a16:creationId xmlns:a16="http://schemas.microsoft.com/office/drawing/2014/main" id="{A82D78C5-13BD-4118-BC6C-6659C3717593}"/>
+                <a16:creationId xmlns:a16="http://schemas.microsoft.com/office/drawing/2014/main" id="{1937F611-5396-41F3-BBDC-C5E6501DDF7B}"/>
               </a:ext>
             </a:extLst>
           </p:cNvPr>
@@ -3647,7 +3647,7 @@
           <p:cNvPr id="9" name="recap-connector-0">
             <a:extLst xmlns:a="http://schemas.openxmlformats.org/drawingml/2006/main">
               <a:ext uri="{FF2B5EF4-FFF2-40B4-BE49-F238E27FC236}">
-                <a16:creationId xmlns:a16="http://schemas.microsoft.com/office/drawing/2014/main" id="{51414A82-FBE3-450A-A30F-1181777AA388}"/>
+                <a16:creationId xmlns:a16="http://schemas.microsoft.com/office/drawing/2014/main" id="{5B420D1A-2DCA-423E-9859-43FEA576EE45}"/>
               </a:ext>
             </a:extLst>
           </p:cNvPr>
@@ -3667,7 +3667,7 @@
           <a:noFill xmlns:a="http://schemas.openxmlformats.org/drawingml/2006/main"/>
           <a:ln xmlns:a="http://schemas.openxmlformats.org/drawingml/2006/main" w="28575">
             <a:solidFill>
-              <a:srgbClr val="17A6C8"/>
+              <a:srgbClr val="006B80"/>
             </a:solidFill>
             <a:prstDash val="solid"/>
           </a:ln>
@@ -3678,7 +3678,7 @@
           <p:cNvPr id="10" name="recap-circle-1">
             <a:extLst xmlns:a="http://schemas.openxmlformats.org/drawingml/2006/main">
               <a:ext uri="{FF2B5EF4-FFF2-40B4-BE49-F238E27FC236}">
-                <a16:creationId xmlns:a16="http://schemas.microsoft.com/office/drawing/2014/main" id="{52D76BB5-6548-49EC-8EE2-4D5F3347B95B}"/>
+                <a16:creationId xmlns:a16="http://schemas.microsoft.com/office/drawing/2014/main" id="{9D527008-CEBE-4213-90AC-48BD199759D8}"/>
               </a:ext>
             </a:extLst>
           </p:cNvPr>
@@ -3711,7 +3711,7 @@
           <p:cNvPr id="11" name="recap-number-1">
             <a:extLst xmlns:a="http://schemas.openxmlformats.org/drawingml/2006/main">
               <a:ext uri="{FF2B5EF4-FFF2-40B4-BE49-F238E27FC236}">
-                <a16:creationId xmlns:a16="http://schemas.microsoft.com/office/drawing/2014/main" id="{27F75C2A-CFDA-4006-A0B0-238800518165}"/>
+                <a16:creationId xmlns:a16="http://schemas.microsoft.com/office/drawing/2014/main" id="{22899F29-4AC3-4B15-8927-851295EB633B}"/>
               </a:ext>
             </a:extLst>
           </p:cNvPr>
@@ -3769,7 +3769,7 @@
           <p:cNvPr id="12" name="recap-item-1">
             <a:extLst xmlns:a="http://schemas.openxmlformats.org/drawingml/2006/main">
               <a:ext uri="{FF2B5EF4-FFF2-40B4-BE49-F238E27FC236}">
-                <a16:creationId xmlns:a16="http://schemas.microsoft.com/office/drawing/2014/main" id="{F1C1F0C8-CE2C-434E-9C17-61DD7E343716}"/>
+                <a16:creationId xmlns:a16="http://schemas.microsoft.com/office/drawing/2014/main" id="{8F76819F-902B-4A1C-8068-60A51FDDC21F}"/>
               </a:ext>
             </a:extLst>
           </p:cNvPr>
@@ -3833,7 +3833,7 @@
           <p:cNvPr id="13" name="recap-connector-1">
             <a:extLst xmlns:a="http://schemas.openxmlformats.org/drawingml/2006/main">
               <a:ext uri="{FF2B5EF4-FFF2-40B4-BE49-F238E27FC236}">
-                <a16:creationId xmlns:a16="http://schemas.microsoft.com/office/drawing/2014/main" id="{69D3828E-AC1C-467F-8D75-A6A123BA929A}"/>
+                <a16:creationId xmlns:a16="http://schemas.microsoft.com/office/drawing/2014/main" id="{8E699F13-D26F-4A98-AC93-F0862F96741C}"/>
               </a:ext>
             </a:extLst>
           </p:cNvPr>
@@ -3853,7 +3853,7 @@
           <a:noFill xmlns:a="http://schemas.openxmlformats.org/drawingml/2006/main"/>
           <a:ln xmlns:a="http://schemas.openxmlformats.org/drawingml/2006/main" w="28575">
             <a:solidFill>
-              <a:srgbClr val="17A6C8"/>
+              <a:srgbClr val="006B80"/>
             </a:solidFill>
             <a:prstDash val="solid"/>
           </a:ln>
@@ -3864,7 +3864,7 @@
           <p:cNvPr id="14" name="recap-circle-2">
             <a:extLst xmlns:a="http://schemas.openxmlformats.org/drawingml/2006/main">
               <a:ext uri="{FF2B5EF4-FFF2-40B4-BE49-F238E27FC236}">
-                <a16:creationId xmlns:a16="http://schemas.microsoft.com/office/drawing/2014/main" id="{98F62C3A-4514-4DC4-8199-6D9586B86D7E}"/>
+                <a16:creationId xmlns:a16="http://schemas.microsoft.com/office/drawing/2014/main" id="{4B6B390E-6A2B-4A3B-8975-F074971AB000}"/>
               </a:ext>
             </a:extLst>
           </p:cNvPr>
@@ -3882,7 +3882,7 @@
             <a:avLst/>
           </a:prstGeom>
           <a:solidFill xmlns:a="http://schemas.openxmlformats.org/drawingml/2006/main">
-            <a:srgbClr val="17A6C8"/>
+            <a:srgbClr val="006B80"/>
           </a:solidFill>
           <a:ln xmlns:a="http://schemas.openxmlformats.org/drawingml/2006/main" w="28575">
             <a:solidFill>
@@ -3897,7 +3897,7 @@
           <p:cNvPr id="15" name="recap-number-2">
             <a:extLst xmlns:a="http://schemas.openxmlformats.org/drawingml/2006/main">
               <a:ext uri="{FF2B5EF4-FFF2-40B4-BE49-F238E27FC236}">
-                <a16:creationId xmlns:a16="http://schemas.microsoft.com/office/drawing/2014/main" id="{E56458CD-F36F-4A1C-98C8-A243DC2373E1}"/>
+                <a16:creationId xmlns:a16="http://schemas.microsoft.com/office/drawing/2014/main" id="{0DFAEA22-A8EF-439A-8213-8F0C8DA642F5}"/>
               </a:ext>
             </a:extLst>
           </p:cNvPr>
@@ -3955,7 +3955,7 @@
           <p:cNvPr id="16" name="recap-item-2">
             <a:extLst xmlns:a="http://schemas.openxmlformats.org/drawingml/2006/main">
               <a:ext uri="{FF2B5EF4-FFF2-40B4-BE49-F238E27FC236}">
-                <a16:creationId xmlns:a16="http://schemas.microsoft.com/office/drawing/2014/main" id="{6C9AE2DA-677D-443B-8354-8A903799EF0F}"/>
+                <a16:creationId xmlns:a16="http://schemas.microsoft.com/office/drawing/2014/main" id="{B8A14185-5483-426D-BE1F-D598F39F776D}"/>
               </a:ext>
             </a:extLst>
           </p:cNvPr>
@@ -3979,7 +3979,7 @@
           </a:solidFill>
           <a:ln xmlns:a="http://schemas.openxmlformats.org/drawingml/2006/main" w="19050">
             <a:solidFill>
-              <a:srgbClr val="17A6C8"/>
+              <a:srgbClr val="006B80"/>
             </a:solidFill>
             <a:prstDash val="solid"/>
           </a:ln>
@@ -4017,7 +4017,7 @@
     </p:spTree>
     <p:extLst>
       <p:ext uri="{BB962C8B-B14F-4D97-AF65-F5344CB8AC3E}">
-        <p14:creationId xmlns:p14="http://schemas.microsoft.com/office/powerpoint/2010/main" val="1699027728"/>
+        <p14:creationId xmlns:p14="http://schemas.microsoft.com/office/powerpoint/2010/main" val="1573367246"/>
       </p:ext>
     </p:extLst>
   </p:cSld>
@@ -4048,7 +4048,7 @@
           <p:cNvPr id="1" name="s12-rule">
             <a:extLst xmlns:a="http://schemas.openxmlformats.org/drawingml/2006/main">
               <a:ext uri="{FF2B5EF4-FFF2-40B4-BE49-F238E27FC236}">
-                <a16:creationId xmlns:a16="http://schemas.microsoft.com/office/drawing/2014/main" id="{B753BF3E-AD8A-4E07-8751-7DB21CA08AD3}"/>
+                <a16:creationId xmlns:a16="http://schemas.microsoft.com/office/drawing/2014/main" id="{11FC09D4-4929-4EAF-BC98-2C6DF914335D}"/>
               </a:ext>
             </a:extLst>
           </p:cNvPr>
@@ -4081,7 +4081,7 @@
           <p:cNvPr id="2" name="s12-eyebrow">
             <a:extLst xmlns:a="http://schemas.openxmlformats.org/drawingml/2006/main">
               <a:ext uri="{FF2B5EF4-FFF2-40B4-BE49-F238E27FC236}">
-                <a16:creationId xmlns:a16="http://schemas.microsoft.com/office/drawing/2014/main" id="{407BC59F-F3D4-4B28-803D-C8CF93835F51}"/>
+                <a16:creationId xmlns:a16="http://schemas.microsoft.com/office/drawing/2014/main" id="{6DC1BBB7-F9C1-4708-9DC2-4C6DA5CE1DDF}"/>
               </a:ext>
             </a:extLst>
           </p:cNvPr>
@@ -4139,7 +4139,7 @@
           <p:cNvPr id="3" name="s12-title">
             <a:extLst xmlns:a="http://schemas.openxmlformats.org/drawingml/2006/main">
               <a:ext uri="{FF2B5EF4-FFF2-40B4-BE49-F238E27FC236}">
-                <a16:creationId xmlns:a16="http://schemas.microsoft.com/office/drawing/2014/main" id="{AF03A302-8CEE-4944-B3B5-54CB7E9BACCB}"/>
+                <a16:creationId xmlns:a16="http://schemas.microsoft.com/office/drawing/2014/main" id="{14584DF0-DB1D-4475-BE0C-BE1A53F88139}"/>
               </a:ext>
             </a:extLst>
           </p:cNvPr>
@@ -4187,7 +4187,7 @@
                 <a:ea typeface="PingFang SC"/>
                 <a:cs typeface="PingFang SC"/>
               </a:rPr>
-              <a:t>从公开重制课件回到可核对的学习资料</a:t>
+              <a:t>智能体工具与规划：依据、边界与延伸</a:t>
             </a:r>
           </a:p>
         </p:txBody>
@@ -4197,7 +4197,7 @@
           <p:cNvPr id="4" name="s12-footer">
             <a:extLst xmlns:a="http://schemas.openxmlformats.org/drawingml/2006/main">
               <a:ext uri="{FF2B5EF4-FFF2-40B4-BE49-F238E27FC236}">
-                <a16:creationId xmlns:a16="http://schemas.microsoft.com/office/drawing/2014/main" id="{1269C2DD-D526-4DBB-BE2E-8272D0FAF2BA}"/>
+                <a16:creationId xmlns:a16="http://schemas.microsoft.com/office/drawing/2014/main" id="{7195317E-6A79-4BDE-A6FE-C187E3122271}"/>
               </a:ext>
             </a:extLst>
           </p:cNvPr>
@@ -4228,7 +4228,7 @@
           <p:cNvPr id="5" name="s12-identity">
             <a:extLst xmlns:a="http://schemas.openxmlformats.org/drawingml/2006/main">
               <a:ext uri="{FF2B5EF4-FFF2-40B4-BE49-F238E27FC236}">
-                <a16:creationId xmlns:a16="http://schemas.microsoft.com/office/drawing/2014/main" id="{E8715324-B6E5-4E0E-B4D0-CC21F332DF72}"/>
+                <a16:creationId xmlns:a16="http://schemas.microsoft.com/office/drawing/2014/main" id="{D76E6FBE-6B78-49E8-95F8-1DDBB294E67C}"/>
               </a:ext>
             </a:extLst>
           </p:cNvPr>
@@ -4286,7 +4286,7 @@
           <p:cNvPr id="6" name="source-0">
             <a:extLst xmlns:a="http://schemas.openxmlformats.org/drawingml/2006/main">
               <a:ext uri="{FF2B5EF4-FFF2-40B4-BE49-F238E27FC236}">
-                <a16:creationId xmlns:a16="http://schemas.microsoft.com/office/drawing/2014/main" id="{BD488429-F293-40A5-AFE1-F27977EDDE02}"/>
+                <a16:creationId xmlns:a16="http://schemas.microsoft.com/office/drawing/2014/main" id="{4A6F384A-335D-462F-9DC6-D0D11F31BAF8}"/>
               </a:ext>
             </a:extLst>
           </p:cNvPr>
@@ -4310,7 +4310,7 @@
           </a:solidFill>
           <a:ln xmlns:a="http://schemas.openxmlformats.org/drawingml/2006/main" w="9525">
             <a:solidFill>
-              <a:srgbClr val="17A6C8"/>
+              <a:srgbClr val="006B80"/>
             </a:solidFill>
             <a:prstDash val="solid"/>
           </a:ln>
@@ -4350,7 +4350,7 @@
           <p:cNvPr id="7" name="source-1">
             <a:extLst xmlns:a="http://schemas.openxmlformats.org/drawingml/2006/main">
               <a:ext uri="{FF2B5EF4-FFF2-40B4-BE49-F238E27FC236}">
-                <a16:creationId xmlns:a16="http://schemas.microsoft.com/office/drawing/2014/main" id="{B0ADF1F5-C2EA-4E6F-8E76-A921B7E6E173}"/>
+                <a16:creationId xmlns:a16="http://schemas.microsoft.com/office/drawing/2014/main" id="{2DC39AEA-52CB-4C80-8298-1732C3014DB7}"/>
               </a:ext>
             </a:extLst>
           </p:cNvPr>
@@ -4414,7 +4414,7 @@
           <p:cNvPr id="8" name="s12-takeaway-rule">
             <a:extLst xmlns:a="http://schemas.openxmlformats.org/drawingml/2006/main">
               <a:ext uri="{FF2B5EF4-FFF2-40B4-BE49-F238E27FC236}">
-                <a16:creationId xmlns:a16="http://schemas.microsoft.com/office/drawing/2014/main" id="{1A925C0B-7D34-44F4-B933-BD3852EA2477}"/>
+                <a16:creationId xmlns:a16="http://schemas.microsoft.com/office/drawing/2014/main" id="{421FF0D4-C77A-4888-81DC-994ABFE69BAC}"/>
               </a:ext>
             </a:extLst>
           </p:cNvPr>
@@ -4447,7 +4447,7 @@
           <p:cNvPr id="9" name="s12-takeaway">
             <a:extLst xmlns:a="http://schemas.openxmlformats.org/drawingml/2006/main">
               <a:ext uri="{FF2B5EF4-FFF2-40B4-BE49-F238E27FC236}">
-                <a16:creationId xmlns:a16="http://schemas.microsoft.com/office/drawing/2014/main" id="{49574D25-C5BD-46E3-80A1-4F9E0767E69D}"/>
+                <a16:creationId xmlns:a16="http://schemas.microsoft.com/office/drawing/2014/main" id="{54941D1D-5714-4FA9-A40B-4D991C1C5993}"/>
               </a:ext>
             </a:extLst>
           </p:cNvPr>
@@ -4503,7 +4503,7 @@
     </p:spTree>
     <p:extLst>
       <p:ext uri="{BB962C8B-B14F-4D97-AF65-F5344CB8AC3E}">
-        <p14:creationId xmlns:p14="http://schemas.microsoft.com/office/powerpoint/2010/main" val="922650542"/>
+        <p14:creationId xmlns:p14="http://schemas.microsoft.com/office/powerpoint/2010/main" val="1631676035"/>
       </p:ext>
     </p:extLst>
   </p:cSld>
@@ -4534,7 +4534,7 @@
           <p:cNvPr id="1" name="s2-rule">
             <a:extLst xmlns:a="http://schemas.openxmlformats.org/drawingml/2006/main">
               <a:ext uri="{FF2B5EF4-FFF2-40B4-BE49-F238E27FC236}">
-                <a16:creationId xmlns:a16="http://schemas.microsoft.com/office/drawing/2014/main" id="{D3425EE9-194D-478D-848C-9682ADACFDE7}"/>
+                <a16:creationId xmlns:a16="http://schemas.microsoft.com/office/drawing/2014/main" id="{FDAF5269-30F5-447C-9E39-CEF178124E5F}"/>
               </a:ext>
             </a:extLst>
           </p:cNvPr>
@@ -4567,7 +4567,7 @@
           <p:cNvPr id="2" name="s2-eyebrow">
             <a:extLst xmlns:a="http://schemas.openxmlformats.org/drawingml/2006/main">
               <a:ext uri="{FF2B5EF4-FFF2-40B4-BE49-F238E27FC236}">
-                <a16:creationId xmlns:a16="http://schemas.microsoft.com/office/drawing/2014/main" id="{03E1ABBF-0558-4266-B55A-672331B00068}"/>
+                <a16:creationId xmlns:a16="http://schemas.microsoft.com/office/drawing/2014/main" id="{3B385619-0076-41B4-96DF-8B859788D3C2}"/>
               </a:ext>
             </a:extLst>
           </p:cNvPr>
@@ -4625,7 +4625,7 @@
           <p:cNvPr id="3" name="s2-title">
             <a:extLst xmlns:a="http://schemas.openxmlformats.org/drawingml/2006/main">
               <a:ext uri="{FF2B5EF4-FFF2-40B4-BE49-F238E27FC236}">
-                <a16:creationId xmlns:a16="http://schemas.microsoft.com/office/drawing/2014/main" id="{135234D4-E2DD-43D0-9BDA-92B7DFC88C73}"/>
+                <a16:creationId xmlns:a16="http://schemas.microsoft.com/office/drawing/2014/main" id="{0087BA1F-8AE3-4461-B7FD-B4CAB90952B3}"/>
               </a:ext>
             </a:extLst>
           </p:cNvPr>
@@ -4673,7 +4673,7 @@
                 <a:ea typeface="PingFang SC"/>
                 <a:cs typeface="PingFang SC"/>
               </a:rPr>
-              <a:t>学完这一节，你能完成这些判断与行动</a:t>
+              <a:t>智能体工具与规划：4项学习结果</a:t>
             </a:r>
           </a:p>
         </p:txBody>
@@ -4683,7 +4683,7 @@
           <p:cNvPr id="4" name="s2-footer">
             <a:extLst xmlns:a="http://schemas.openxmlformats.org/drawingml/2006/main">
               <a:ext uri="{FF2B5EF4-FFF2-40B4-BE49-F238E27FC236}">
-                <a16:creationId xmlns:a16="http://schemas.microsoft.com/office/drawing/2014/main" id="{CE5C825F-B1B6-4A86-9CB0-F90333DBC08E}"/>
+                <a16:creationId xmlns:a16="http://schemas.microsoft.com/office/drawing/2014/main" id="{940AB40C-95A8-4738-BD06-97253F7AC2D9}"/>
               </a:ext>
             </a:extLst>
           </p:cNvPr>
@@ -4714,7 +4714,7 @@
           <p:cNvPr id="5" name="s2-identity">
             <a:extLst xmlns:a="http://schemas.openxmlformats.org/drawingml/2006/main">
               <a:ext uri="{FF2B5EF4-FFF2-40B4-BE49-F238E27FC236}">
-                <a16:creationId xmlns:a16="http://schemas.microsoft.com/office/drawing/2014/main" id="{14017527-0C13-41A6-BEFB-660159E8B96C}"/>
+                <a16:creationId xmlns:a16="http://schemas.microsoft.com/office/drawing/2014/main" id="{10F5EF15-7A44-40BD-8B17-A5D0AA5E5E52}"/>
               </a:ext>
             </a:extLst>
           </p:cNvPr>
@@ -4772,7 +4772,7 @@
           <p:cNvPr id="6" name="objective-1">
             <a:extLst xmlns:a="http://schemas.openxmlformats.org/drawingml/2006/main">
               <a:ext uri="{FF2B5EF4-FFF2-40B4-BE49-F238E27FC236}">
-                <a16:creationId xmlns:a16="http://schemas.microsoft.com/office/drawing/2014/main" id="{3E297215-1487-4BEA-BC92-E460C417DEA0}"/>
+                <a16:creationId xmlns:a16="http://schemas.microsoft.com/office/drawing/2014/main" id="{275822DD-ACD3-4C6B-A5E2-B19C1EBACBD7}"/>
               </a:ext>
             </a:extLst>
           </p:cNvPr>
@@ -4859,7 +4859,7 @@
           <p:cNvPr id="7" name="objective-2">
             <a:extLst xmlns:a="http://schemas.openxmlformats.org/drawingml/2006/main">
               <a:ext uri="{FF2B5EF4-FFF2-40B4-BE49-F238E27FC236}">
-                <a16:creationId xmlns:a16="http://schemas.microsoft.com/office/drawing/2014/main" id="{0406A748-D028-4B60-A5C7-DEB4183353CC}"/>
+                <a16:creationId xmlns:a16="http://schemas.microsoft.com/office/drawing/2014/main" id="{72C5565E-B451-483D-9BD6-50BD1A2A74F2}"/>
               </a:ext>
             </a:extLst>
           </p:cNvPr>
@@ -4946,7 +4946,7 @@
           <p:cNvPr id="8" name="objective-3">
             <a:extLst xmlns:a="http://schemas.openxmlformats.org/drawingml/2006/main">
               <a:ext uri="{FF2B5EF4-FFF2-40B4-BE49-F238E27FC236}">
-                <a16:creationId xmlns:a16="http://schemas.microsoft.com/office/drawing/2014/main" id="{C588A1B7-1332-480A-BACB-273678579440}"/>
+                <a16:creationId xmlns:a16="http://schemas.microsoft.com/office/drawing/2014/main" id="{ABCC703A-B44B-4FD9-9702-A9A22E79A853}"/>
               </a:ext>
             </a:extLst>
           </p:cNvPr>
@@ -5033,7 +5033,7 @@
           <p:cNvPr id="9" name="objective-4">
             <a:extLst xmlns:a="http://schemas.openxmlformats.org/drawingml/2006/main">
               <a:ext uri="{FF2B5EF4-FFF2-40B4-BE49-F238E27FC236}">
-                <a16:creationId xmlns:a16="http://schemas.microsoft.com/office/drawing/2014/main" id="{15703E8E-613B-4F89-9AAC-0EB261646877}"/>
+                <a16:creationId xmlns:a16="http://schemas.microsoft.com/office/drawing/2014/main" id="{2FF8DBAE-496F-489A-A7C5-DF9B08AC0A9A}"/>
               </a:ext>
             </a:extLst>
           </p:cNvPr>
@@ -5057,7 +5057,7 @@
           </a:solidFill>
           <a:ln xmlns:a="http://schemas.openxmlformats.org/drawingml/2006/main" w="19050">
             <a:solidFill>
-              <a:srgbClr val="17A6C8"/>
+              <a:srgbClr val="006B80"/>
             </a:solidFill>
             <a:prstDash val="solid"/>
           </a:ln>
@@ -5118,7 +5118,7 @@
     </p:spTree>
     <p:extLst>
       <p:ext uri="{BB962C8B-B14F-4D97-AF65-F5344CB8AC3E}">
-        <p14:creationId xmlns:p14="http://schemas.microsoft.com/office/powerpoint/2010/main" val="605791863"/>
+        <p14:creationId xmlns:p14="http://schemas.microsoft.com/office/powerpoint/2010/main" val="1197043710"/>
       </p:ext>
     </p:extLst>
   </p:cSld>
@@ -5149,7 +5149,7 @@
           <p:cNvPr id="1" name="s3-rule">
             <a:extLst xmlns:a="http://schemas.openxmlformats.org/drawingml/2006/main">
               <a:ext uri="{FF2B5EF4-FFF2-40B4-BE49-F238E27FC236}">
-                <a16:creationId xmlns:a16="http://schemas.microsoft.com/office/drawing/2014/main" id="{00BAE30A-9063-41BC-9DCF-56EA545DB8F1}"/>
+                <a16:creationId xmlns:a16="http://schemas.microsoft.com/office/drawing/2014/main" id="{216C824B-8A99-463C-9830-EB054C439F52}"/>
               </a:ext>
             </a:extLst>
           </p:cNvPr>
@@ -5182,7 +5182,7 @@
           <p:cNvPr id="2" name="s3-eyebrow">
             <a:extLst xmlns:a="http://schemas.openxmlformats.org/drawingml/2006/main">
               <a:ext uri="{FF2B5EF4-FFF2-40B4-BE49-F238E27FC236}">
-                <a16:creationId xmlns:a16="http://schemas.microsoft.com/office/drawing/2014/main" id="{5412FF38-8D6A-4E4B-AE01-6376390AE9ED}"/>
+                <a16:creationId xmlns:a16="http://schemas.microsoft.com/office/drawing/2014/main" id="{80B6CF28-FE55-45A9-9C8B-76B31E6CF101}"/>
               </a:ext>
             </a:extLst>
           </p:cNvPr>
@@ -5240,7 +5240,7 @@
           <p:cNvPr id="3" name="s3-title">
             <a:extLst xmlns:a="http://schemas.openxmlformats.org/drawingml/2006/main">
               <a:ext uri="{FF2B5EF4-FFF2-40B4-BE49-F238E27FC236}">
-                <a16:creationId xmlns:a16="http://schemas.microsoft.com/office/drawing/2014/main" id="{D3A3B2B5-0CE5-4EDB-96F2-5939D959FCDB}"/>
+                <a16:creationId xmlns:a16="http://schemas.microsoft.com/office/drawing/2014/main" id="{7A5728A0-1BC5-4699-AD4C-2432B804F4EC}"/>
               </a:ext>
             </a:extLst>
           </p:cNvPr>
@@ -5298,7 +5298,7 @@
           <p:cNvPr id="4" name="s3-footer">
             <a:extLst xmlns:a="http://schemas.openxmlformats.org/drawingml/2006/main">
               <a:ext uri="{FF2B5EF4-FFF2-40B4-BE49-F238E27FC236}">
-                <a16:creationId xmlns:a16="http://schemas.microsoft.com/office/drawing/2014/main" id="{7828C548-62A3-4226-9DDF-C86D1408A27D}"/>
+                <a16:creationId xmlns:a16="http://schemas.microsoft.com/office/drawing/2014/main" id="{1F151CBE-7D4A-4C4F-B8A7-75F4DFDACE66}"/>
               </a:ext>
             </a:extLst>
           </p:cNvPr>
@@ -5329,7 +5329,7 @@
           <p:cNvPr id="5" name="s3-identity">
             <a:extLst xmlns:a="http://schemas.openxmlformats.org/drawingml/2006/main">
               <a:ext uri="{FF2B5EF4-FFF2-40B4-BE49-F238E27FC236}">
-                <a16:creationId xmlns:a16="http://schemas.microsoft.com/office/drawing/2014/main" id="{D97FE103-5BE7-4737-906D-D9F4CB0921CE}"/>
+                <a16:creationId xmlns:a16="http://schemas.microsoft.com/office/drawing/2014/main" id="{C30249C9-4D96-4986-87C7-C978F7692B39}"/>
               </a:ext>
             </a:extLst>
           </p:cNvPr>
@@ -5387,7 +5387,7 @@
           <p:cNvPr id="6" name="core-no-0">
             <a:extLst xmlns:a="http://schemas.openxmlformats.org/drawingml/2006/main">
               <a:ext uri="{FF2B5EF4-FFF2-40B4-BE49-F238E27FC236}">
-                <a16:creationId xmlns:a16="http://schemas.microsoft.com/office/drawing/2014/main" id="{D688F9D5-E71C-4FB3-98B3-DB66935A7794}"/>
+                <a16:creationId xmlns:a16="http://schemas.microsoft.com/office/drawing/2014/main" id="{D702D238-EF77-42A8-B680-1BF514415752}"/>
               </a:ext>
             </a:extLst>
           </p:cNvPr>
@@ -5419,7 +5419,7 @@
             <a:pPr algn="l">
               <a:defRPr sz="2250" b="1">
                 <a:solidFill>
-                  <a:srgbClr val="17A6C8"/>
+                  <a:srgbClr val="006B80"/>
                 </a:solidFill>
                 <a:latin typeface="PingFang SC"/>
                 <a:ea typeface="PingFang SC"/>
@@ -5429,7 +5429,7 @@
             <a:r>
               <a:rPr sz="2250" b="1">
                 <a:solidFill>
-                  <a:srgbClr val="17A6C8"/>
+                  <a:srgbClr val="006B80"/>
                 </a:solidFill>
                 <a:latin typeface="PingFang SC"/>
                 <a:ea typeface="PingFang SC"/>
@@ -5445,7 +5445,7 @@
           <p:cNvPr id="7" name="core-label-0">
             <a:extLst xmlns:a="http://schemas.openxmlformats.org/drawingml/2006/main">
               <a:ext uri="{FF2B5EF4-FFF2-40B4-BE49-F238E27FC236}">
-                <a16:creationId xmlns:a16="http://schemas.microsoft.com/office/drawing/2014/main" id="{BAD05A23-038B-490D-B965-FF88307FB1FD}"/>
+                <a16:creationId xmlns:a16="http://schemas.microsoft.com/office/drawing/2014/main" id="{B143BD16-9433-4190-A186-C0809513A61B}"/>
               </a:ext>
             </a:extLst>
           </p:cNvPr>
@@ -5503,7 +5503,7 @@
           <p:cNvPr id="8" name="core-body-0">
             <a:extLst xmlns:a="http://schemas.openxmlformats.org/drawingml/2006/main">
               <a:ext uri="{FF2B5EF4-FFF2-40B4-BE49-F238E27FC236}">
-                <a16:creationId xmlns:a16="http://schemas.microsoft.com/office/drawing/2014/main" id="{A5CB1931-2F69-4283-9C0E-EAC5DCF0BA4E}"/>
+                <a16:creationId xmlns:a16="http://schemas.microsoft.com/office/drawing/2014/main" id="{2DCEE029-9767-4921-9FF3-9947749E0CCB}"/>
               </a:ext>
             </a:extLst>
           </p:cNvPr>
@@ -5527,7 +5527,7 @@
           </a:solidFill>
           <a:ln xmlns:a="http://schemas.openxmlformats.org/drawingml/2006/main" w="19050">
             <a:solidFill>
-              <a:srgbClr val="17A6C8"/>
+              <a:srgbClr val="006B80"/>
             </a:solidFill>
             <a:prstDash val="solid"/>
           </a:ln>
@@ -5567,7 +5567,7 @@
           <p:cNvPr id="9" name="core-no-1">
             <a:extLst xmlns:a="http://schemas.openxmlformats.org/drawingml/2006/main">
               <a:ext uri="{FF2B5EF4-FFF2-40B4-BE49-F238E27FC236}">
-                <a16:creationId xmlns:a16="http://schemas.microsoft.com/office/drawing/2014/main" id="{47A4DFCD-DCA4-458C-8C59-80A3A48A0C7B}"/>
+                <a16:creationId xmlns:a16="http://schemas.microsoft.com/office/drawing/2014/main" id="{77E38045-888B-4EF3-A298-CA4E3706EB0C}"/>
               </a:ext>
             </a:extLst>
           </p:cNvPr>
@@ -5599,7 +5599,7 @@
             <a:pPr algn="l">
               <a:defRPr sz="2250" b="1">
                 <a:solidFill>
-                  <a:srgbClr val="17A6C8"/>
+                  <a:srgbClr val="006B80"/>
                 </a:solidFill>
                 <a:latin typeface="PingFang SC"/>
                 <a:ea typeface="PingFang SC"/>
@@ -5609,7 +5609,7 @@
             <a:r>
               <a:rPr sz="2250" b="1">
                 <a:solidFill>
-                  <a:srgbClr val="17A6C8"/>
+                  <a:srgbClr val="006B80"/>
                 </a:solidFill>
                 <a:latin typeface="PingFang SC"/>
                 <a:ea typeface="PingFang SC"/>
@@ -5625,7 +5625,7 @@
           <p:cNvPr id="10" name="core-body-1">
             <a:extLst xmlns:a="http://schemas.openxmlformats.org/drawingml/2006/main">
               <a:ext uri="{FF2B5EF4-FFF2-40B4-BE49-F238E27FC236}">
-                <a16:creationId xmlns:a16="http://schemas.microsoft.com/office/drawing/2014/main" id="{D491C069-8898-4FF8-A76F-B47ECA1C794B}"/>
+                <a16:creationId xmlns:a16="http://schemas.microsoft.com/office/drawing/2014/main" id="{0F0A8256-D76B-498F-AE6C-7A1879E3EE63}"/>
               </a:ext>
             </a:extLst>
           </p:cNvPr>
@@ -5679,7 +5679,7 @@
                 <a:ea typeface="PingFang SC"/>
                 <a:cs typeface="PingFang SC"/>
               </a:rPr>
-              <a:t>描述越含糊，模型越容易选错工具或补造参数。对于写入型工具，还要提供“预览”或“草稿”能力，让智能体先展示将要发生的变化，再进入真正执行。删除、外发、付款…</a:t>
+              <a:t>描述越含糊，模型越容易选错工具或补造参数；对于写入型工具，还要提供“预览”或“草稿”能力；让智能体先展示将要发生的变化</a:t>
             </a:r>
           </a:p>
         </p:txBody>
@@ -5689,7 +5689,7 @@
           <p:cNvPr id="11" name="s3-takeaway-rule">
             <a:extLst xmlns:a="http://schemas.openxmlformats.org/drawingml/2006/main">
               <a:ext uri="{FF2B5EF4-FFF2-40B4-BE49-F238E27FC236}">
-                <a16:creationId xmlns:a16="http://schemas.microsoft.com/office/drawing/2014/main" id="{F3B3F9B4-2BE5-4744-8B4F-13EF2C6BD93D}"/>
+                <a16:creationId xmlns:a16="http://schemas.microsoft.com/office/drawing/2014/main" id="{C69C5BF8-9520-4FE9-AE7C-587B6D05FE78}"/>
               </a:ext>
             </a:extLst>
           </p:cNvPr>
@@ -5722,7 +5722,7 @@
           <p:cNvPr id="12" name="s3-takeaway">
             <a:extLst xmlns:a="http://schemas.openxmlformats.org/drawingml/2006/main">
               <a:ext uri="{FF2B5EF4-FFF2-40B4-BE49-F238E27FC236}">
-                <a16:creationId xmlns:a16="http://schemas.microsoft.com/office/drawing/2014/main" id="{330454BE-DC77-4EB0-993D-CD5F77C85238}"/>
+                <a16:creationId xmlns:a16="http://schemas.microsoft.com/office/drawing/2014/main" id="{85D83F1F-A78A-4A70-9C82-8A0F8C1B1F97}"/>
               </a:ext>
             </a:extLst>
           </p:cNvPr>
@@ -5778,7 +5778,7 @@
     </p:spTree>
     <p:extLst>
       <p:ext uri="{BB962C8B-B14F-4D97-AF65-F5344CB8AC3E}">
-        <p14:creationId xmlns:p14="http://schemas.microsoft.com/office/powerpoint/2010/main" val="1407642037"/>
+        <p14:creationId xmlns:p14="http://schemas.microsoft.com/office/powerpoint/2010/main" val="277541609"/>
       </p:ext>
     </p:extLst>
   </p:cSld>
@@ -5809,7 +5809,7 @@
           <p:cNvPr id="1" name="s4-rule">
             <a:extLst xmlns:a="http://schemas.openxmlformats.org/drawingml/2006/main">
               <a:ext uri="{FF2B5EF4-FFF2-40B4-BE49-F238E27FC236}">
-                <a16:creationId xmlns:a16="http://schemas.microsoft.com/office/drawing/2014/main" id="{6A420BB7-852D-413A-9E0C-EFF481DB10E4}"/>
+                <a16:creationId xmlns:a16="http://schemas.microsoft.com/office/drawing/2014/main" id="{1AA728AF-C5B4-4828-970C-31D1FD78581B}"/>
               </a:ext>
             </a:extLst>
           </p:cNvPr>
@@ -5842,7 +5842,7 @@
           <p:cNvPr id="2" name="s4-eyebrow">
             <a:extLst xmlns:a="http://schemas.openxmlformats.org/drawingml/2006/main">
               <a:ext uri="{FF2B5EF4-FFF2-40B4-BE49-F238E27FC236}">
-                <a16:creationId xmlns:a16="http://schemas.microsoft.com/office/drawing/2014/main" id="{0B5A3DE4-E74F-429D-9380-362E6AA09E6B}"/>
+                <a16:creationId xmlns:a16="http://schemas.microsoft.com/office/drawing/2014/main" id="{18D897F7-ECC5-4FA5-A4B6-78F56B36312F}"/>
               </a:ext>
             </a:extLst>
           </p:cNvPr>
@@ -5900,7 +5900,7 @@
           <p:cNvPr id="3" name="s4-title">
             <a:extLst xmlns:a="http://schemas.openxmlformats.org/drawingml/2006/main">
               <a:ext uri="{FF2B5EF4-FFF2-40B4-BE49-F238E27FC236}">
-                <a16:creationId xmlns:a16="http://schemas.microsoft.com/office/drawing/2014/main" id="{9CDCDDC6-CFD6-49A7-9C81-895B36B45D13}"/>
+                <a16:creationId xmlns:a16="http://schemas.microsoft.com/office/drawing/2014/main" id="{F914A2DE-BEB6-4440-AA5B-92D919486234}"/>
               </a:ext>
             </a:extLst>
           </p:cNvPr>
@@ -5925,7 +5925,7 @@
         </p:spPr>
         <p:txBody>
           <a:bodyPr xmlns:a="http://schemas.openxmlformats.org/drawingml/2006/main" lIns="0" tIns="0" rIns="0" bIns="0" anchor="ctr">
-            <a:normAutofit fontScale="76449"/>
+            <a:normAutofit fontScale="100000"/>
           </a:bodyPr>
           <a:lstStyle xmlns:a="http://schemas.openxmlformats.org/drawingml/2006/main"/>
           <a:p xmlns:a="http://schemas.openxmlformats.org/drawingml/2006/main">
@@ -5948,7 +5948,7 @@
                 <a:ea typeface="PingFang SC"/>
                 <a:cs typeface="PingFang SC"/>
               </a:rPr>
-              <a:t>工具调用可能出现四类结果：成功、部分成功、可重试失败和不可重试失败</a:t>
+              <a:t>工具结果必须区分成功、部分成功与失败</a:t>
             </a:r>
           </a:p>
         </p:txBody>
@@ -5958,7 +5958,7 @@
           <p:cNvPr id="4" name="s4-footer">
             <a:extLst xmlns:a="http://schemas.openxmlformats.org/drawingml/2006/main">
               <a:ext uri="{FF2B5EF4-FFF2-40B4-BE49-F238E27FC236}">
-                <a16:creationId xmlns:a16="http://schemas.microsoft.com/office/drawing/2014/main" id="{3C22840F-0D1A-440E-8B66-BAD2276C56B3}"/>
+                <a16:creationId xmlns:a16="http://schemas.microsoft.com/office/drawing/2014/main" id="{F1685800-A2AF-4624-BC06-899C705AE929}"/>
               </a:ext>
             </a:extLst>
           </p:cNvPr>
@@ -5989,7 +5989,7 @@
           <p:cNvPr id="5" name="s4-identity">
             <a:extLst xmlns:a="http://schemas.openxmlformats.org/drawingml/2006/main">
               <a:ext uri="{FF2B5EF4-FFF2-40B4-BE49-F238E27FC236}">
-                <a16:creationId xmlns:a16="http://schemas.microsoft.com/office/drawing/2014/main" id="{F600097D-BB96-4EBA-95B1-CC5856D9A25D}"/>
+                <a16:creationId xmlns:a16="http://schemas.microsoft.com/office/drawing/2014/main" id="{FC8160BA-4556-4A5D-9121-9FF1A6AB830C}"/>
               </a:ext>
             </a:extLst>
           </p:cNvPr>
@@ -6047,7 +6047,7 @@
           <p:cNvPr id="6" name="core-no-0">
             <a:extLst xmlns:a="http://schemas.openxmlformats.org/drawingml/2006/main">
               <a:ext uri="{FF2B5EF4-FFF2-40B4-BE49-F238E27FC236}">
-                <a16:creationId xmlns:a16="http://schemas.microsoft.com/office/drawing/2014/main" id="{C5B44DDB-5FC0-4F5B-B528-C7CCF56760BE}"/>
+                <a16:creationId xmlns:a16="http://schemas.microsoft.com/office/drawing/2014/main" id="{9BEBBAE5-3CC4-431B-A40A-82EE98C64B74}"/>
               </a:ext>
             </a:extLst>
           </p:cNvPr>
@@ -6079,7 +6079,7 @@
             <a:pPr algn="l">
               <a:defRPr sz="2250" b="1">
                 <a:solidFill>
-                  <a:srgbClr val="17A6C8"/>
+                  <a:srgbClr val="006B80"/>
                 </a:solidFill>
                 <a:latin typeface="PingFang SC"/>
                 <a:ea typeface="PingFang SC"/>
@@ -6089,7 +6089,7 @@
             <a:r>
               <a:rPr sz="2250" b="1">
                 <a:solidFill>
-                  <a:srgbClr val="17A6C8"/>
+                  <a:srgbClr val="006B80"/>
                 </a:solidFill>
                 <a:latin typeface="PingFang SC"/>
                 <a:ea typeface="PingFang SC"/>
@@ -6105,7 +6105,7 @@
           <p:cNvPr id="7" name="core-label-0">
             <a:extLst xmlns:a="http://schemas.openxmlformats.org/drawingml/2006/main">
               <a:ext uri="{FF2B5EF4-FFF2-40B4-BE49-F238E27FC236}">
-                <a16:creationId xmlns:a16="http://schemas.microsoft.com/office/drawing/2014/main" id="{19397F28-2A9D-447F-B3D4-77CB499F5B6E}"/>
+                <a16:creationId xmlns:a16="http://schemas.microsoft.com/office/drawing/2014/main" id="{6E285935-D65D-4E94-B87F-BD52CBE7FF30}"/>
               </a:ext>
             </a:extLst>
           </p:cNvPr>
@@ -6163,7 +6163,7 @@
           <p:cNvPr id="8" name="core-body-0">
             <a:extLst xmlns:a="http://schemas.openxmlformats.org/drawingml/2006/main">
               <a:ext uri="{FF2B5EF4-FFF2-40B4-BE49-F238E27FC236}">
-                <a16:creationId xmlns:a16="http://schemas.microsoft.com/office/drawing/2014/main" id="{E3C3EDC1-5568-4F62-8710-49DD8A194D91}"/>
+                <a16:creationId xmlns:a16="http://schemas.microsoft.com/office/drawing/2014/main" id="{B702004A-CBAB-4D09-B39B-AF825567F59C}"/>
               </a:ext>
             </a:extLst>
           </p:cNvPr>
@@ -6187,7 +6187,7 @@
           </a:solidFill>
           <a:ln xmlns:a="http://schemas.openxmlformats.org/drawingml/2006/main" w="19050">
             <a:solidFill>
-              <a:srgbClr val="17A6C8"/>
+              <a:srgbClr val="006B80"/>
             </a:solidFill>
             <a:prstDash val="solid"/>
           </a:ln>
@@ -6217,7 +6217,7 @@
                 <a:ea typeface="PingFang SC"/>
                 <a:cs typeface="PingFang SC"/>
               </a:rPr>
-              <a:t>工具调用可能出现四类结果：成功、部分成功、可重试失败和不可重试失败。超时或网络中断通常只能说明“结果未知”，不能直接再次写入，否则可能重复创建记录。参数错误应先修正输入…</a:t>
+              <a:t>工具调用可能出现四类结果；成功、部分成功、可重试失败和不可重试失败；超时或网络中断通常只能说明“结果未知”；不能直接再次写入，否则可能重复创建记录；参数错误应先修正输入</a:t>
             </a:r>
           </a:p>
         </p:txBody>
@@ -6227,7 +6227,7 @@
           <p:cNvPr id="9" name="core-no-1">
             <a:extLst xmlns:a="http://schemas.openxmlformats.org/drawingml/2006/main">
               <a:ext uri="{FF2B5EF4-FFF2-40B4-BE49-F238E27FC236}">
-                <a16:creationId xmlns:a16="http://schemas.microsoft.com/office/drawing/2014/main" id="{9447E136-4733-4D64-BBAE-63F6DE8AA6F4}"/>
+                <a16:creationId xmlns:a16="http://schemas.microsoft.com/office/drawing/2014/main" id="{98EDD144-9DDB-4E7C-82A5-D81B18E9EF41}"/>
               </a:ext>
             </a:extLst>
           </p:cNvPr>
@@ -6259,7 +6259,7 @@
             <a:pPr algn="l">
               <a:defRPr sz="2250" b="1">
                 <a:solidFill>
-                  <a:srgbClr val="17A6C8"/>
+                  <a:srgbClr val="006B80"/>
                 </a:solidFill>
                 <a:latin typeface="PingFang SC"/>
                 <a:ea typeface="PingFang SC"/>
@@ -6269,7 +6269,7 @@
             <a:r>
               <a:rPr sz="2250" b="1">
                 <a:solidFill>
-                  <a:srgbClr val="17A6C8"/>
+                  <a:srgbClr val="006B80"/>
                 </a:solidFill>
                 <a:latin typeface="PingFang SC"/>
                 <a:ea typeface="PingFang SC"/>
@@ -6285,7 +6285,7 @@
           <p:cNvPr id="10" name="core-body-1">
             <a:extLst xmlns:a="http://schemas.openxmlformats.org/drawingml/2006/main">
               <a:ext uri="{FF2B5EF4-FFF2-40B4-BE49-F238E27FC236}">
-                <a16:creationId xmlns:a16="http://schemas.microsoft.com/office/drawing/2014/main" id="{97500FD3-5BB6-4289-A374-2A371B8155D0}"/>
+                <a16:creationId xmlns:a16="http://schemas.microsoft.com/office/drawing/2014/main" id="{961B2986-E187-4250-8D14-D77010D9DB55}"/>
               </a:ext>
             </a:extLst>
           </p:cNvPr>
@@ -6349,7 +6349,7 @@
           <p:cNvPr id="11" name="s4-takeaway-rule">
             <a:extLst xmlns:a="http://schemas.openxmlformats.org/drawingml/2006/main">
               <a:ext uri="{FF2B5EF4-FFF2-40B4-BE49-F238E27FC236}">
-                <a16:creationId xmlns:a16="http://schemas.microsoft.com/office/drawing/2014/main" id="{F433F17F-815A-4716-9C68-C90CD3932D4F}"/>
+                <a16:creationId xmlns:a16="http://schemas.microsoft.com/office/drawing/2014/main" id="{5B37B5D8-04F1-4797-B125-60E7643A60D9}"/>
               </a:ext>
             </a:extLst>
           </p:cNvPr>
@@ -6382,7 +6382,7 @@
           <p:cNvPr id="12" name="s4-takeaway">
             <a:extLst xmlns:a="http://schemas.openxmlformats.org/drawingml/2006/main">
               <a:ext uri="{FF2B5EF4-FFF2-40B4-BE49-F238E27FC236}">
-                <a16:creationId xmlns:a16="http://schemas.microsoft.com/office/drawing/2014/main" id="{EAD790CB-123A-4BFB-9EF1-3274F1F4EC18}"/>
+                <a16:creationId xmlns:a16="http://schemas.microsoft.com/office/drawing/2014/main" id="{9BAE82A6-EFF4-48C0-900B-A6E7A6F152CC}"/>
               </a:ext>
             </a:extLst>
           </p:cNvPr>
@@ -6430,7 +6430,7 @@
                 <a:ea typeface="PingFang SC"/>
                 <a:cs typeface="PingFang SC"/>
               </a:rPr>
-              <a:t>工具调用可能出现四类结果：成功、部分成功、可重试失败和不可重试失败</a:t>
+              <a:t>工具结果必须区分成功、部分成功与失败</a:t>
             </a:r>
           </a:p>
         </p:txBody>
@@ -6438,7 +6438,7 @@
     </p:spTree>
     <p:extLst>
       <p:ext uri="{BB962C8B-B14F-4D97-AF65-F5344CB8AC3E}">
-        <p14:creationId xmlns:p14="http://schemas.microsoft.com/office/powerpoint/2010/main" val="1438352147"/>
+        <p14:creationId xmlns:p14="http://schemas.microsoft.com/office/powerpoint/2010/main" val="644333383"/>
       </p:ext>
     </p:extLst>
   </p:cSld>
@@ -6469,7 +6469,7 @@
           <p:cNvPr id="1" name="s5-rule">
             <a:extLst xmlns:a="http://schemas.openxmlformats.org/drawingml/2006/main">
               <a:ext uri="{FF2B5EF4-FFF2-40B4-BE49-F238E27FC236}">
-                <a16:creationId xmlns:a16="http://schemas.microsoft.com/office/drawing/2014/main" id="{CA01AFB8-4B81-4781-82FD-F0078FD59E21}"/>
+                <a16:creationId xmlns:a16="http://schemas.microsoft.com/office/drawing/2014/main" id="{E56585E1-97DD-47D7-BCA1-0749F2179C18}"/>
               </a:ext>
             </a:extLst>
           </p:cNvPr>
@@ -6502,7 +6502,7 @@
           <p:cNvPr id="2" name="s5-eyebrow">
             <a:extLst xmlns:a="http://schemas.openxmlformats.org/drawingml/2006/main">
               <a:ext uri="{FF2B5EF4-FFF2-40B4-BE49-F238E27FC236}">
-                <a16:creationId xmlns:a16="http://schemas.microsoft.com/office/drawing/2014/main" id="{083E0B6E-370F-4CE4-A1D6-6D82A7D5AD68}"/>
+                <a16:creationId xmlns:a16="http://schemas.microsoft.com/office/drawing/2014/main" id="{44188879-9364-42C7-A628-36B336C5DE34}"/>
               </a:ext>
             </a:extLst>
           </p:cNvPr>
@@ -6560,7 +6560,7 @@
           <p:cNvPr id="3" name="s5-title">
             <a:extLst xmlns:a="http://schemas.openxmlformats.org/drawingml/2006/main">
               <a:ext uri="{FF2B5EF4-FFF2-40B4-BE49-F238E27FC236}">
-                <a16:creationId xmlns:a16="http://schemas.microsoft.com/office/drawing/2014/main" id="{3A0DF2F4-48BB-4CEA-A893-67C254BED7EC}"/>
+                <a16:creationId xmlns:a16="http://schemas.microsoft.com/office/drawing/2014/main" id="{C81B8B2C-5B6F-4A2A-9297-7FE9B6621C49}"/>
               </a:ext>
             </a:extLst>
           </p:cNvPr>
@@ -6618,7 +6618,7 @@
           <p:cNvPr id="4" name="s5-footer">
             <a:extLst xmlns:a="http://schemas.openxmlformats.org/drawingml/2006/main">
               <a:ext uri="{FF2B5EF4-FFF2-40B4-BE49-F238E27FC236}">
-                <a16:creationId xmlns:a16="http://schemas.microsoft.com/office/drawing/2014/main" id="{208DFA6B-C5CB-44C4-B92B-B2FC6E397ED0}"/>
+                <a16:creationId xmlns:a16="http://schemas.microsoft.com/office/drawing/2014/main" id="{CB157B66-E218-4A71-9CFD-C4A9491513D7}"/>
               </a:ext>
             </a:extLst>
           </p:cNvPr>
@@ -6649,7 +6649,7 @@
           <p:cNvPr id="5" name="s5-identity">
             <a:extLst xmlns:a="http://schemas.openxmlformats.org/drawingml/2006/main">
               <a:ext uri="{FF2B5EF4-FFF2-40B4-BE49-F238E27FC236}">
-                <a16:creationId xmlns:a16="http://schemas.microsoft.com/office/drawing/2014/main" id="{A466DC6F-FFC9-4737-9AFA-D6FB6B39A2A6}"/>
+                <a16:creationId xmlns:a16="http://schemas.microsoft.com/office/drawing/2014/main" id="{D0FB59CF-F671-40BD-B639-CF5165942AC2}"/>
               </a:ext>
             </a:extLst>
           </p:cNvPr>
@@ -6707,7 +6707,7 @@
           <p:cNvPr id="6" name="core-no-0">
             <a:extLst xmlns:a="http://schemas.openxmlformats.org/drawingml/2006/main">
               <a:ext uri="{FF2B5EF4-FFF2-40B4-BE49-F238E27FC236}">
-                <a16:creationId xmlns:a16="http://schemas.microsoft.com/office/drawing/2014/main" id="{70FB14CE-C63C-4A0B-829C-74554F4453BA}"/>
+                <a16:creationId xmlns:a16="http://schemas.microsoft.com/office/drawing/2014/main" id="{3FB0DE94-E7AE-40A4-A440-102D986C1069}"/>
               </a:ext>
             </a:extLst>
           </p:cNvPr>
@@ -6739,7 +6739,7 @@
             <a:pPr algn="l">
               <a:defRPr sz="2250" b="1">
                 <a:solidFill>
-                  <a:srgbClr val="17A6C8"/>
+                  <a:srgbClr val="006B80"/>
                 </a:solidFill>
                 <a:latin typeface="PingFang SC"/>
                 <a:ea typeface="PingFang SC"/>
@@ -6749,7 +6749,7 @@
             <a:r>
               <a:rPr sz="2250" b="1">
                 <a:solidFill>
-                  <a:srgbClr val="17A6C8"/>
+                  <a:srgbClr val="006B80"/>
                 </a:solidFill>
                 <a:latin typeface="PingFang SC"/>
                 <a:ea typeface="PingFang SC"/>
@@ -6765,7 +6765,7 @@
           <p:cNvPr id="7" name="core-label-0">
             <a:extLst xmlns:a="http://schemas.openxmlformats.org/drawingml/2006/main">
               <a:ext uri="{FF2B5EF4-FFF2-40B4-BE49-F238E27FC236}">
-                <a16:creationId xmlns:a16="http://schemas.microsoft.com/office/drawing/2014/main" id="{9AFBB3D6-68BF-42D6-865A-682C28ECDAF9}"/>
+                <a16:creationId xmlns:a16="http://schemas.microsoft.com/office/drawing/2014/main" id="{797E681C-8419-4D73-9935-0A8E54BD06D2}"/>
               </a:ext>
             </a:extLst>
           </p:cNvPr>
@@ -6823,7 +6823,7 @@
           <p:cNvPr id="8" name="core-body-0">
             <a:extLst xmlns:a="http://schemas.openxmlformats.org/drawingml/2006/main">
               <a:ext uri="{FF2B5EF4-FFF2-40B4-BE49-F238E27FC236}">
-                <a16:creationId xmlns:a16="http://schemas.microsoft.com/office/drawing/2014/main" id="{F0233F0A-210E-4DC8-ABBD-13485C1367DD}"/>
+                <a16:creationId xmlns:a16="http://schemas.microsoft.com/office/drawing/2014/main" id="{AE5A690E-014A-4AE6-B908-71D0ABA32CD3}"/>
               </a:ext>
             </a:extLst>
           </p:cNvPr>
@@ -6847,7 +6847,7 @@
           </a:solidFill>
           <a:ln xmlns:a="http://schemas.openxmlformats.org/drawingml/2006/main" w="19050">
             <a:solidFill>
-              <a:srgbClr val="17A6C8"/>
+              <a:srgbClr val="006B80"/>
             </a:solidFill>
             <a:prstDash val="solid"/>
           </a:ln>
@@ -6887,7 +6887,7 @@
           <p:cNvPr id="9" name="core-no-1">
             <a:extLst xmlns:a="http://schemas.openxmlformats.org/drawingml/2006/main">
               <a:ext uri="{FF2B5EF4-FFF2-40B4-BE49-F238E27FC236}">
-                <a16:creationId xmlns:a16="http://schemas.microsoft.com/office/drawing/2014/main" id="{119955F9-E944-441E-8FF2-7A9E53BAE7C6}"/>
+                <a16:creationId xmlns:a16="http://schemas.microsoft.com/office/drawing/2014/main" id="{F466FD7E-8C6E-4E1A-A1FB-0FB6C8568107}"/>
               </a:ext>
             </a:extLst>
           </p:cNvPr>
@@ -6919,7 +6919,7 @@
             <a:pPr algn="l">
               <a:defRPr sz="2250" b="1">
                 <a:solidFill>
-                  <a:srgbClr val="17A6C8"/>
+                  <a:srgbClr val="006B80"/>
                 </a:solidFill>
                 <a:latin typeface="PingFang SC"/>
                 <a:ea typeface="PingFang SC"/>
@@ -6929,7 +6929,7 @@
             <a:r>
               <a:rPr sz="2250" b="1">
                 <a:solidFill>
-                  <a:srgbClr val="17A6C8"/>
+                  <a:srgbClr val="006B80"/>
                 </a:solidFill>
                 <a:latin typeface="PingFang SC"/>
                 <a:ea typeface="PingFang SC"/>
@@ -6945,7 +6945,7 @@
           <p:cNvPr id="10" name="core-body-1">
             <a:extLst xmlns:a="http://schemas.openxmlformats.org/drawingml/2006/main">
               <a:ext uri="{FF2B5EF4-FFF2-40B4-BE49-F238E27FC236}">
-                <a16:creationId xmlns:a16="http://schemas.microsoft.com/office/drawing/2014/main" id="{27DA50FF-4527-408D-9AE3-3FDC3B5399F5}"/>
+                <a16:creationId xmlns:a16="http://schemas.microsoft.com/office/drawing/2014/main" id="{62831648-B97D-4DA2-8812-4ED153F8FE86}"/>
               </a:ext>
             </a:extLst>
           </p:cNvPr>
@@ -7009,7 +7009,7 @@
           <p:cNvPr id="11" name="core-no-2">
             <a:extLst xmlns:a="http://schemas.openxmlformats.org/drawingml/2006/main">
               <a:ext uri="{FF2B5EF4-FFF2-40B4-BE49-F238E27FC236}">
-                <a16:creationId xmlns:a16="http://schemas.microsoft.com/office/drawing/2014/main" id="{BFE90CCD-2F16-4F5A-8BC7-2D688B893F60}"/>
+                <a16:creationId xmlns:a16="http://schemas.microsoft.com/office/drawing/2014/main" id="{80BF173D-83E5-4984-8003-85396132D8B8}"/>
               </a:ext>
             </a:extLst>
           </p:cNvPr>
@@ -7041,7 +7041,7 @@
             <a:pPr algn="l">
               <a:defRPr sz="2250" b="1">
                 <a:solidFill>
-                  <a:srgbClr val="17A6C8"/>
+                  <a:srgbClr val="006B80"/>
                 </a:solidFill>
                 <a:latin typeface="PingFang SC"/>
                 <a:ea typeface="PingFang SC"/>
@@ -7051,7 +7051,7 @@
             <a:r>
               <a:rPr sz="2250" b="1">
                 <a:solidFill>
-                  <a:srgbClr val="17A6C8"/>
+                  <a:srgbClr val="006B80"/>
                 </a:solidFill>
                 <a:latin typeface="PingFang SC"/>
                 <a:ea typeface="PingFang SC"/>
@@ -7067,7 +7067,7 @@
           <p:cNvPr id="12" name="core-body-2">
             <a:extLst xmlns:a="http://schemas.openxmlformats.org/drawingml/2006/main">
               <a:ext uri="{FF2B5EF4-FFF2-40B4-BE49-F238E27FC236}">
-                <a16:creationId xmlns:a16="http://schemas.microsoft.com/office/drawing/2014/main" id="{D64AEBC6-32BC-4197-AAED-8A0149C130BC}"/>
+                <a16:creationId xmlns:a16="http://schemas.microsoft.com/office/drawing/2014/main" id="{9545345F-1F9C-4019-9CB1-082BE5B1D976}"/>
               </a:ext>
             </a:extLst>
           </p:cNvPr>
@@ -7131,7 +7131,7 @@
           <p:cNvPr id="13" name="s5-takeaway-rule">
             <a:extLst xmlns:a="http://schemas.openxmlformats.org/drawingml/2006/main">
               <a:ext uri="{FF2B5EF4-FFF2-40B4-BE49-F238E27FC236}">
-                <a16:creationId xmlns:a16="http://schemas.microsoft.com/office/drawing/2014/main" id="{6922E78E-F3C6-4FEC-AB94-378B6B796338}"/>
+                <a16:creationId xmlns:a16="http://schemas.microsoft.com/office/drawing/2014/main" id="{7BE310A3-E935-4A25-B695-6D62B8CC03A1}"/>
               </a:ext>
             </a:extLst>
           </p:cNvPr>
@@ -7164,7 +7164,7 @@
           <p:cNvPr id="14" name="s5-takeaway">
             <a:extLst xmlns:a="http://schemas.openxmlformats.org/drawingml/2006/main">
               <a:ext uri="{FF2B5EF4-FFF2-40B4-BE49-F238E27FC236}">
-                <a16:creationId xmlns:a16="http://schemas.microsoft.com/office/drawing/2014/main" id="{BA054F95-DB21-4616-AF7B-BAC3F39B672B}"/>
+                <a16:creationId xmlns:a16="http://schemas.microsoft.com/office/drawing/2014/main" id="{2EE0F38E-0205-47DA-8AB4-B5EE00728755}"/>
               </a:ext>
             </a:extLst>
           </p:cNvPr>
@@ -7220,7 +7220,7 @@
     </p:spTree>
     <p:extLst>
       <p:ext uri="{BB962C8B-B14F-4D97-AF65-F5344CB8AC3E}">
-        <p14:creationId xmlns:p14="http://schemas.microsoft.com/office/powerpoint/2010/main" val="92179414"/>
+        <p14:creationId xmlns:p14="http://schemas.microsoft.com/office/powerpoint/2010/main" val="1666099798"/>
       </p:ext>
     </p:extLst>
   </p:cSld>
@@ -7251,7 +7251,7 @@
           <p:cNvPr id="1" name="s6-rule">
             <a:extLst xmlns:a="http://schemas.openxmlformats.org/drawingml/2006/main">
               <a:ext uri="{FF2B5EF4-FFF2-40B4-BE49-F238E27FC236}">
-                <a16:creationId xmlns:a16="http://schemas.microsoft.com/office/drawing/2014/main" id="{33586DFB-F2B8-4219-938F-1AC73ACBB23C}"/>
+                <a16:creationId xmlns:a16="http://schemas.microsoft.com/office/drawing/2014/main" id="{C4B8EDD7-7F42-4170-9248-CF64F545109B}"/>
               </a:ext>
             </a:extLst>
           </p:cNvPr>
@@ -7284,7 +7284,7 @@
           <p:cNvPr id="2" name="s6-eyebrow">
             <a:extLst xmlns:a="http://schemas.openxmlformats.org/drawingml/2006/main">
               <a:ext uri="{FF2B5EF4-FFF2-40B4-BE49-F238E27FC236}">
-                <a16:creationId xmlns:a16="http://schemas.microsoft.com/office/drawing/2014/main" id="{E0E0547B-65FD-430C-9C0B-1597F50560F6}"/>
+                <a16:creationId xmlns:a16="http://schemas.microsoft.com/office/drawing/2014/main" id="{BCF6993C-BE1D-4997-9BE4-16014129ACBF}"/>
               </a:ext>
             </a:extLst>
           </p:cNvPr>
@@ -7342,7 +7342,7 @@
           <p:cNvPr id="3" name="s6-title">
             <a:extLst xmlns:a="http://schemas.openxmlformats.org/drawingml/2006/main">
               <a:ext uri="{FF2B5EF4-FFF2-40B4-BE49-F238E27FC236}">
-                <a16:creationId xmlns:a16="http://schemas.microsoft.com/office/drawing/2014/main" id="{05743317-8426-488F-A17B-4FE97ABCC8C1}"/>
+                <a16:creationId xmlns:a16="http://schemas.microsoft.com/office/drawing/2014/main" id="{4105850B-DB5F-4988-97BF-BE0C52A3FB8C}"/>
               </a:ext>
             </a:extLst>
           </p:cNvPr>
@@ -7400,7 +7400,7 @@
           <p:cNvPr id="4" name="s6-footer">
             <a:extLst xmlns:a="http://schemas.openxmlformats.org/drawingml/2006/main">
               <a:ext uri="{FF2B5EF4-FFF2-40B4-BE49-F238E27FC236}">
-                <a16:creationId xmlns:a16="http://schemas.microsoft.com/office/drawing/2014/main" id="{F8F54361-8AF2-4322-A2E4-E68454FCBE32}"/>
+                <a16:creationId xmlns:a16="http://schemas.microsoft.com/office/drawing/2014/main" id="{8B1409ED-5341-439A-88AD-0CCA464697FD}"/>
               </a:ext>
             </a:extLst>
           </p:cNvPr>
@@ -7431,7 +7431,7 @@
           <p:cNvPr id="5" name="s6-identity">
             <a:extLst xmlns:a="http://schemas.openxmlformats.org/drawingml/2006/main">
               <a:ext uri="{FF2B5EF4-FFF2-40B4-BE49-F238E27FC236}">
-                <a16:creationId xmlns:a16="http://schemas.microsoft.com/office/drawing/2014/main" id="{F81BFCD0-ADF6-49B2-A199-E7B1B8B7DCBF}"/>
+                <a16:creationId xmlns:a16="http://schemas.microsoft.com/office/drawing/2014/main" id="{F1778D59-5E7A-4153-9940-8147A32B4137}"/>
               </a:ext>
             </a:extLst>
           </p:cNvPr>
@@ -7489,7 +7489,7 @@
           <p:cNvPr id="6" name="core-no-0">
             <a:extLst xmlns:a="http://schemas.openxmlformats.org/drawingml/2006/main">
               <a:ext uri="{FF2B5EF4-FFF2-40B4-BE49-F238E27FC236}">
-                <a16:creationId xmlns:a16="http://schemas.microsoft.com/office/drawing/2014/main" id="{7CD0F9B6-B077-45FA-B29D-6AA8E4C13376}"/>
+                <a16:creationId xmlns:a16="http://schemas.microsoft.com/office/drawing/2014/main" id="{6063486A-F88D-4462-9A0C-6F922BDAF2E0}"/>
               </a:ext>
             </a:extLst>
           </p:cNvPr>
@@ -7521,7 +7521,7 @@
             <a:pPr algn="l">
               <a:defRPr sz="2250" b="1">
                 <a:solidFill>
-                  <a:srgbClr val="17A6C8"/>
+                  <a:srgbClr val="006B80"/>
                 </a:solidFill>
                 <a:latin typeface="PingFang SC"/>
                 <a:ea typeface="PingFang SC"/>
@@ -7531,7 +7531,7 @@
             <a:r>
               <a:rPr sz="2250" b="1">
                 <a:solidFill>
-                  <a:srgbClr val="17A6C8"/>
+                  <a:srgbClr val="006B80"/>
                 </a:solidFill>
                 <a:latin typeface="PingFang SC"/>
                 <a:ea typeface="PingFang SC"/>
@@ -7547,7 +7547,7 @@
           <p:cNvPr id="7" name="core-label-0">
             <a:extLst xmlns:a="http://schemas.openxmlformats.org/drawingml/2006/main">
               <a:ext uri="{FF2B5EF4-FFF2-40B4-BE49-F238E27FC236}">
-                <a16:creationId xmlns:a16="http://schemas.microsoft.com/office/drawing/2014/main" id="{FBF79F0B-DFAC-44E8-BD58-AAD592423962}"/>
+                <a16:creationId xmlns:a16="http://schemas.microsoft.com/office/drawing/2014/main" id="{58830A81-1344-485F-AD0F-E0F4A629E8F4}"/>
               </a:ext>
             </a:extLst>
           </p:cNvPr>
@@ -7605,7 +7605,7 @@
           <p:cNvPr id="8" name="core-body-0">
             <a:extLst xmlns:a="http://schemas.openxmlformats.org/drawingml/2006/main">
               <a:ext uri="{FF2B5EF4-FFF2-40B4-BE49-F238E27FC236}">
-                <a16:creationId xmlns:a16="http://schemas.microsoft.com/office/drawing/2014/main" id="{DCEC9D59-B053-4201-81E7-863DB343709C}"/>
+                <a16:creationId xmlns:a16="http://schemas.microsoft.com/office/drawing/2014/main" id="{932FB828-A827-4E16-9651-3B7382015B01}"/>
               </a:ext>
             </a:extLst>
           </p:cNvPr>
@@ -7629,7 +7629,7 @@
           </a:solidFill>
           <a:ln xmlns:a="http://schemas.openxmlformats.org/drawingml/2006/main" w="19050">
             <a:solidFill>
-              <a:srgbClr val="17A6C8"/>
+              <a:srgbClr val="006B80"/>
             </a:solidFill>
             <a:prstDash val="solid"/>
           </a:ln>
@@ -7669,7 +7669,7 @@
           <p:cNvPr id="9" name="core-no-1">
             <a:extLst xmlns:a="http://schemas.openxmlformats.org/drawingml/2006/main">
               <a:ext uri="{FF2B5EF4-FFF2-40B4-BE49-F238E27FC236}">
-                <a16:creationId xmlns:a16="http://schemas.microsoft.com/office/drawing/2014/main" id="{994876B5-78EC-4108-83B1-30D2636E2FCE}"/>
+                <a16:creationId xmlns:a16="http://schemas.microsoft.com/office/drawing/2014/main" id="{EEBAB64B-BD37-4A43-BF81-3EB9B061BE98}"/>
               </a:ext>
             </a:extLst>
           </p:cNvPr>
@@ -7701,7 +7701,7 @@
             <a:pPr algn="l">
               <a:defRPr sz="2250" b="1">
                 <a:solidFill>
-                  <a:srgbClr val="17A6C8"/>
+                  <a:srgbClr val="006B80"/>
                 </a:solidFill>
                 <a:latin typeface="PingFang SC"/>
                 <a:ea typeface="PingFang SC"/>
@@ -7711,7 +7711,7 @@
             <a:r>
               <a:rPr sz="2250" b="1">
                 <a:solidFill>
-                  <a:srgbClr val="17A6C8"/>
+                  <a:srgbClr val="006B80"/>
                 </a:solidFill>
                 <a:latin typeface="PingFang SC"/>
                 <a:ea typeface="PingFang SC"/>
@@ -7727,7 +7727,7 @@
           <p:cNvPr id="10" name="core-body-1">
             <a:extLst xmlns:a="http://schemas.openxmlformats.org/drawingml/2006/main">
               <a:ext uri="{FF2B5EF4-FFF2-40B4-BE49-F238E27FC236}">
-                <a16:creationId xmlns:a16="http://schemas.microsoft.com/office/drawing/2014/main" id="{F5F50938-344F-47CB-9CA2-8BE03C7CB259}"/>
+                <a16:creationId xmlns:a16="http://schemas.microsoft.com/office/drawing/2014/main" id="{D6B5CA28-85EA-441B-BD12-7B5E5BD91DFA}"/>
               </a:ext>
             </a:extLst>
           </p:cNvPr>
@@ -7791,7 +7791,7 @@
           <p:cNvPr id="11" name="core-no-2">
             <a:extLst xmlns:a="http://schemas.openxmlformats.org/drawingml/2006/main">
               <a:ext uri="{FF2B5EF4-FFF2-40B4-BE49-F238E27FC236}">
-                <a16:creationId xmlns:a16="http://schemas.microsoft.com/office/drawing/2014/main" id="{FCF84D65-8C61-4385-8BE0-A8FE11DA86F8}"/>
+                <a16:creationId xmlns:a16="http://schemas.microsoft.com/office/drawing/2014/main" id="{9952CC66-B801-4CA8-B3F2-97F4F3DB0233}"/>
               </a:ext>
             </a:extLst>
           </p:cNvPr>
@@ -7823,7 +7823,7 @@
             <a:pPr algn="l">
               <a:defRPr sz="2250" b="1">
                 <a:solidFill>
-                  <a:srgbClr val="17A6C8"/>
+                  <a:srgbClr val="006B80"/>
                 </a:solidFill>
                 <a:latin typeface="PingFang SC"/>
                 <a:ea typeface="PingFang SC"/>
@@ -7833,7 +7833,7 @@
             <a:r>
               <a:rPr sz="2250" b="1">
                 <a:solidFill>
-                  <a:srgbClr val="17A6C8"/>
+                  <a:srgbClr val="006B80"/>
                 </a:solidFill>
                 <a:latin typeface="PingFang SC"/>
                 <a:ea typeface="PingFang SC"/>
@@ -7849,7 +7849,7 @@
           <p:cNvPr id="12" name="core-body-2">
             <a:extLst xmlns:a="http://schemas.openxmlformats.org/drawingml/2006/main">
               <a:ext uri="{FF2B5EF4-FFF2-40B4-BE49-F238E27FC236}">
-                <a16:creationId xmlns:a16="http://schemas.microsoft.com/office/drawing/2014/main" id="{7039F636-C55A-4960-97D6-CAF9C7E32B00}"/>
+                <a16:creationId xmlns:a16="http://schemas.microsoft.com/office/drawing/2014/main" id="{7ACCFC07-19E7-4FFC-9203-FF98D64F686A}"/>
               </a:ext>
             </a:extLst>
           </p:cNvPr>
@@ -7913,7 +7913,7 @@
           <p:cNvPr id="13" name="s6-takeaway-rule">
             <a:extLst xmlns:a="http://schemas.openxmlformats.org/drawingml/2006/main">
               <a:ext uri="{FF2B5EF4-FFF2-40B4-BE49-F238E27FC236}">
-                <a16:creationId xmlns:a16="http://schemas.microsoft.com/office/drawing/2014/main" id="{15FDEF89-87CB-498F-8958-A6CE5AE42689}"/>
+                <a16:creationId xmlns:a16="http://schemas.microsoft.com/office/drawing/2014/main" id="{3AFD9250-F80A-4B8B-A44E-27AEC1D60865}"/>
               </a:ext>
             </a:extLst>
           </p:cNvPr>
@@ -7946,7 +7946,7 @@
           <p:cNvPr id="14" name="s6-takeaway">
             <a:extLst xmlns:a="http://schemas.openxmlformats.org/drawingml/2006/main">
               <a:ext uri="{FF2B5EF4-FFF2-40B4-BE49-F238E27FC236}">
-                <a16:creationId xmlns:a16="http://schemas.microsoft.com/office/drawing/2014/main" id="{CB06ABDD-0F7C-4DC1-90D4-7E9845EBFBA8}"/>
+                <a16:creationId xmlns:a16="http://schemas.microsoft.com/office/drawing/2014/main" id="{8D229CCA-E5EE-48DD-9CF3-1465553D693C}"/>
               </a:ext>
             </a:extLst>
           </p:cNvPr>
@@ -8002,7 +8002,7 @@
     </p:spTree>
     <p:extLst>
       <p:ext uri="{BB962C8B-B14F-4D97-AF65-F5344CB8AC3E}">
-        <p14:creationId xmlns:p14="http://schemas.microsoft.com/office/powerpoint/2010/main" val="1227801004"/>
+        <p14:creationId xmlns:p14="http://schemas.microsoft.com/office/powerpoint/2010/main" val="1869065252"/>
       </p:ext>
     </p:extLst>
   </p:cSld>
@@ -8033,7 +8033,7 @@
           <p:cNvPr id="1" name="s7-rule">
             <a:extLst xmlns:a="http://schemas.openxmlformats.org/drawingml/2006/main">
               <a:ext uri="{FF2B5EF4-FFF2-40B4-BE49-F238E27FC236}">
-                <a16:creationId xmlns:a16="http://schemas.microsoft.com/office/drawing/2014/main" id="{76E76F33-456B-4629-AD74-F16413EB9DC7}"/>
+                <a16:creationId xmlns:a16="http://schemas.microsoft.com/office/drawing/2014/main" id="{279F7CAE-5A78-479C-9B74-DACF6DED4158}"/>
               </a:ext>
             </a:extLst>
           </p:cNvPr>
@@ -8066,7 +8066,7 @@
           <p:cNvPr id="2" name="s7-eyebrow">
             <a:extLst xmlns:a="http://schemas.openxmlformats.org/drawingml/2006/main">
               <a:ext uri="{FF2B5EF4-FFF2-40B4-BE49-F238E27FC236}">
-                <a16:creationId xmlns:a16="http://schemas.microsoft.com/office/drawing/2014/main" id="{16B7BA3E-9AD6-4A4F-B5A7-DBC7C514D3B3}"/>
+                <a16:creationId xmlns:a16="http://schemas.microsoft.com/office/drawing/2014/main" id="{A5338F3D-388E-4BF0-A41A-3F0D0B5DD4A4}"/>
               </a:ext>
             </a:extLst>
           </p:cNvPr>
@@ -8124,7 +8124,7 @@
           <p:cNvPr id="3" name="s7-title">
             <a:extLst xmlns:a="http://schemas.openxmlformats.org/drawingml/2006/main">
               <a:ext uri="{FF2B5EF4-FFF2-40B4-BE49-F238E27FC236}">
-                <a16:creationId xmlns:a16="http://schemas.microsoft.com/office/drawing/2014/main" id="{607EA79A-DB6B-4C1B-9C4A-845E1FC2708C}"/>
+                <a16:creationId xmlns:a16="http://schemas.microsoft.com/office/drawing/2014/main" id="{68B9923E-0AE9-43E4-83FA-0A7DFE357B60}"/>
               </a:ext>
             </a:extLst>
           </p:cNvPr>
@@ -8182,7 +8182,7 @@
           <p:cNvPr id="4" name="s7-footer">
             <a:extLst xmlns:a="http://schemas.openxmlformats.org/drawingml/2006/main">
               <a:ext uri="{FF2B5EF4-FFF2-40B4-BE49-F238E27FC236}">
-                <a16:creationId xmlns:a16="http://schemas.microsoft.com/office/drawing/2014/main" id="{02DE202C-5E00-4BC3-AE32-4825E9ADB071}"/>
+                <a16:creationId xmlns:a16="http://schemas.microsoft.com/office/drawing/2014/main" id="{45E94199-F1B9-4B18-A870-D8EAB43CFA0F}"/>
               </a:ext>
             </a:extLst>
           </p:cNvPr>
@@ -8213,7 +8213,7 @@
           <p:cNvPr id="5" name="s7-identity">
             <a:extLst xmlns:a="http://schemas.openxmlformats.org/drawingml/2006/main">
               <a:ext uri="{FF2B5EF4-FFF2-40B4-BE49-F238E27FC236}">
-                <a16:creationId xmlns:a16="http://schemas.microsoft.com/office/drawing/2014/main" id="{5E3ADB0C-30AC-40DB-854A-7C2305D21C67}"/>
+                <a16:creationId xmlns:a16="http://schemas.microsoft.com/office/drawing/2014/main" id="{80D40431-16AA-4CC2-8C0E-DC47AF0E749F}"/>
               </a:ext>
             </a:extLst>
           </p:cNvPr>
@@ -8271,7 +8271,7 @@
           <p:cNvPr id="6" name="core-no-0">
             <a:extLst xmlns:a="http://schemas.openxmlformats.org/drawingml/2006/main">
               <a:ext uri="{FF2B5EF4-FFF2-40B4-BE49-F238E27FC236}">
-                <a16:creationId xmlns:a16="http://schemas.microsoft.com/office/drawing/2014/main" id="{CFD59FE9-82CF-4173-A0C3-AAE3C4B675FE}"/>
+                <a16:creationId xmlns:a16="http://schemas.microsoft.com/office/drawing/2014/main" id="{2A846867-207D-46D7-BF7D-E46F820AAE94}"/>
               </a:ext>
             </a:extLst>
           </p:cNvPr>
@@ -8303,7 +8303,7 @@
             <a:pPr algn="l">
               <a:defRPr sz="2250" b="1">
                 <a:solidFill>
-                  <a:srgbClr val="17A6C8"/>
+                  <a:srgbClr val="006B80"/>
                 </a:solidFill>
                 <a:latin typeface="PingFang SC"/>
                 <a:ea typeface="PingFang SC"/>
@@ -8313,7 +8313,7 @@
             <a:r>
               <a:rPr sz="2250" b="1">
                 <a:solidFill>
-                  <a:srgbClr val="17A6C8"/>
+                  <a:srgbClr val="006B80"/>
                 </a:solidFill>
                 <a:latin typeface="PingFang SC"/>
                 <a:ea typeface="PingFang SC"/>
@@ -8329,7 +8329,7 @@
           <p:cNvPr id="7" name="core-label-0">
             <a:extLst xmlns:a="http://schemas.openxmlformats.org/drawingml/2006/main">
               <a:ext uri="{FF2B5EF4-FFF2-40B4-BE49-F238E27FC236}">
-                <a16:creationId xmlns:a16="http://schemas.microsoft.com/office/drawing/2014/main" id="{2A26F167-AF8E-4C9A-B86B-C62588EA38C8}"/>
+                <a16:creationId xmlns:a16="http://schemas.microsoft.com/office/drawing/2014/main" id="{B5813240-291C-43E0-8E66-F8D59698C83F}"/>
               </a:ext>
             </a:extLst>
           </p:cNvPr>
@@ -8387,7 +8387,7 @@
           <p:cNvPr id="8" name="core-body-0">
             <a:extLst xmlns:a="http://schemas.openxmlformats.org/drawingml/2006/main">
               <a:ext uri="{FF2B5EF4-FFF2-40B4-BE49-F238E27FC236}">
-                <a16:creationId xmlns:a16="http://schemas.microsoft.com/office/drawing/2014/main" id="{8C92298C-BF66-4B50-912F-1B0A8AEAABD0}"/>
+                <a16:creationId xmlns:a16="http://schemas.microsoft.com/office/drawing/2014/main" id="{E5DB356F-25F3-4D73-86EE-5507DFA8B5BE}"/>
               </a:ext>
             </a:extLst>
           </p:cNvPr>
@@ -8411,7 +8411,7 @@
           </a:solidFill>
           <a:ln xmlns:a="http://schemas.openxmlformats.org/drawingml/2006/main" w="19050">
             <a:solidFill>
-              <a:srgbClr val="17A6C8"/>
+              <a:srgbClr val="006B80"/>
             </a:solidFill>
             <a:prstDash val="solid"/>
           </a:ln>
@@ -8441,7 +8441,7 @@
                 <a:ea typeface="PingFang SC"/>
                 <a:cs typeface="PingFang SC"/>
               </a:rPr>
-              <a:t>规划的作用是把目标转成可执行且可验收的步骤。每一步应写清输入、动作、产出、依赖和通过条件。存在依赖时，计划更像任务图而不是线性清单：数据未取得，分析步骤就不能开始；审批未通过…</a:t>
+              <a:t>规划的作用是把目标转成可执行且可验收的步骤；每一步应写清输入、动作、产出、依赖和通过条件；存在依赖时，计划更像任务图而不是线性清单；数据未取得，分析步骤就不能开始</a:t>
             </a:r>
           </a:p>
         </p:txBody>
@@ -8451,7 +8451,7 @@
           <p:cNvPr id="9" name="core-no-1">
             <a:extLst xmlns:a="http://schemas.openxmlformats.org/drawingml/2006/main">
               <a:ext uri="{FF2B5EF4-FFF2-40B4-BE49-F238E27FC236}">
-                <a16:creationId xmlns:a16="http://schemas.microsoft.com/office/drawing/2014/main" id="{D988C896-57E4-4A87-97F2-FDF699667D1C}"/>
+                <a16:creationId xmlns:a16="http://schemas.microsoft.com/office/drawing/2014/main" id="{255CD40B-E02F-47C5-9495-AADD1C1F313C}"/>
               </a:ext>
             </a:extLst>
           </p:cNvPr>
@@ -8483,7 +8483,7 @@
             <a:pPr algn="l">
               <a:defRPr sz="2250" b="1">
                 <a:solidFill>
-                  <a:srgbClr val="17A6C8"/>
+                  <a:srgbClr val="006B80"/>
                 </a:solidFill>
                 <a:latin typeface="PingFang SC"/>
                 <a:ea typeface="PingFang SC"/>
@@ -8493,7 +8493,7 @@
             <a:r>
               <a:rPr sz="2250" b="1">
                 <a:solidFill>
-                  <a:srgbClr val="17A6C8"/>
+                  <a:srgbClr val="006B80"/>
                 </a:solidFill>
                 <a:latin typeface="PingFang SC"/>
                 <a:ea typeface="PingFang SC"/>
@@ -8509,7 +8509,7 @@
           <p:cNvPr id="10" name="core-body-1">
             <a:extLst xmlns:a="http://schemas.openxmlformats.org/drawingml/2006/main">
               <a:ext uri="{FF2B5EF4-FFF2-40B4-BE49-F238E27FC236}">
-                <a16:creationId xmlns:a16="http://schemas.microsoft.com/office/drawing/2014/main" id="{72E4DA2F-A690-4AA3-AB19-D2C2EB6BA4D8}"/>
+                <a16:creationId xmlns:a16="http://schemas.microsoft.com/office/drawing/2014/main" id="{CCC46543-FBE6-42F4-B946-6DA51076DC7E}"/>
               </a:ext>
             </a:extLst>
           </p:cNvPr>
@@ -8563,7 +8563,7 @@
                 <a:ea typeface="PingFang SC"/>
                 <a:cs typeface="PingFang SC"/>
               </a:rPr>
-              <a:t>计划要随着观察更新，但变更必须有理由。如果工具返回的真实结构与预期不同，应修订后续步骤；如果只是执行困难，不能悄悄降低验收标准。对长任务，建议在每个阶段形成恢复点：保存已验证产物…</a:t>
+              <a:t>计划要随着观察更新；但变更必须有理由，如果工具返回的真实结构与预期不同；应修订后续步骤，如果只是执行困难；不能悄悄降低验收标准；对长任务，建议在每个阶段形成恢复点</a:t>
             </a:r>
           </a:p>
         </p:txBody>
@@ -8573,7 +8573,7 @@
           <p:cNvPr id="11" name="s7-takeaway-rule">
             <a:extLst xmlns:a="http://schemas.openxmlformats.org/drawingml/2006/main">
               <a:ext uri="{FF2B5EF4-FFF2-40B4-BE49-F238E27FC236}">
-                <a16:creationId xmlns:a16="http://schemas.microsoft.com/office/drawing/2014/main" id="{044487C5-C0D6-4B85-83E3-7FD273BB1FD5}"/>
+                <a16:creationId xmlns:a16="http://schemas.microsoft.com/office/drawing/2014/main" id="{78AD6945-DA71-40BC-A35A-0BE4006BD784}"/>
               </a:ext>
             </a:extLst>
           </p:cNvPr>
@@ -8606,7 +8606,7 @@
           <p:cNvPr id="12" name="s7-takeaway">
             <a:extLst xmlns:a="http://schemas.openxmlformats.org/drawingml/2006/main">
               <a:ext uri="{FF2B5EF4-FFF2-40B4-BE49-F238E27FC236}">
-                <a16:creationId xmlns:a16="http://schemas.microsoft.com/office/drawing/2014/main" id="{74D4D033-6E70-4C0E-92F0-F82EB0CDB169}"/>
+                <a16:creationId xmlns:a16="http://schemas.microsoft.com/office/drawing/2014/main" id="{CD3CCAA0-5BAE-49CB-9F9C-FA3784BAA6DA}"/>
               </a:ext>
             </a:extLst>
           </p:cNvPr>
@@ -8662,7 +8662,7 @@
     </p:spTree>
     <p:extLst>
       <p:ext uri="{BB962C8B-B14F-4D97-AF65-F5344CB8AC3E}">
-        <p14:creationId xmlns:p14="http://schemas.microsoft.com/office/powerpoint/2010/main" val="1561557164"/>
+        <p14:creationId xmlns:p14="http://schemas.microsoft.com/office/powerpoint/2010/main" val="1654715820"/>
       </p:ext>
     </p:extLst>
   </p:cSld>
@@ -8693,7 +8693,7 @@
           <p:cNvPr id="1" name="s8-rule">
             <a:extLst xmlns:a="http://schemas.openxmlformats.org/drawingml/2006/main">
               <a:ext uri="{FF2B5EF4-FFF2-40B4-BE49-F238E27FC236}">
-                <a16:creationId xmlns:a16="http://schemas.microsoft.com/office/drawing/2014/main" id="{3E5BC9D6-D6A1-46AA-81FF-A043A89AEADE}"/>
+                <a16:creationId xmlns:a16="http://schemas.microsoft.com/office/drawing/2014/main" id="{D4434573-04F6-436C-BD56-8531BCEA32BD}"/>
               </a:ext>
             </a:extLst>
           </p:cNvPr>
@@ -8726,7 +8726,7 @@
           <p:cNvPr id="2" name="s8-eyebrow">
             <a:extLst xmlns:a="http://schemas.openxmlformats.org/drawingml/2006/main">
               <a:ext uri="{FF2B5EF4-FFF2-40B4-BE49-F238E27FC236}">
-                <a16:creationId xmlns:a16="http://schemas.microsoft.com/office/drawing/2014/main" id="{B17AE679-8E02-4EF8-93AC-B8E65ED559C7}"/>
+                <a16:creationId xmlns:a16="http://schemas.microsoft.com/office/drawing/2014/main" id="{486B0196-F3A1-41E5-96DD-DEDBE0841958}"/>
               </a:ext>
             </a:extLst>
           </p:cNvPr>
@@ -8784,7 +8784,7 @@
           <p:cNvPr id="3" name="s8-title">
             <a:extLst xmlns:a="http://schemas.openxmlformats.org/drawingml/2006/main">
               <a:ext uri="{FF2B5EF4-FFF2-40B4-BE49-F238E27FC236}">
-                <a16:creationId xmlns:a16="http://schemas.microsoft.com/office/drawing/2014/main" id="{D8BCC29A-40C9-4AA2-9BFB-2171CB323B53}"/>
+                <a16:creationId xmlns:a16="http://schemas.microsoft.com/office/drawing/2014/main" id="{D79EB869-8B6A-4F84-9E15-4A12BDAFB4F7}"/>
               </a:ext>
             </a:extLst>
           </p:cNvPr>
@@ -8842,7 +8842,7 @@
           <p:cNvPr id="4" name="s8-footer">
             <a:extLst xmlns:a="http://schemas.openxmlformats.org/drawingml/2006/main">
               <a:ext uri="{FF2B5EF4-FFF2-40B4-BE49-F238E27FC236}">
-                <a16:creationId xmlns:a16="http://schemas.microsoft.com/office/drawing/2014/main" id="{A5294425-C645-4CDE-A156-22317F1D20B0}"/>
+                <a16:creationId xmlns:a16="http://schemas.microsoft.com/office/drawing/2014/main" id="{94FA2561-2BF7-473E-825E-C13789711BF6}"/>
               </a:ext>
             </a:extLst>
           </p:cNvPr>
@@ -8873,7 +8873,7 @@
           <p:cNvPr id="5" name="s8-identity">
             <a:extLst xmlns:a="http://schemas.openxmlformats.org/drawingml/2006/main">
               <a:ext uri="{FF2B5EF4-FFF2-40B4-BE49-F238E27FC236}">
-                <a16:creationId xmlns:a16="http://schemas.microsoft.com/office/drawing/2014/main" id="{09A1298A-838A-4FF7-A98D-F8950DD12775}"/>
+                <a16:creationId xmlns:a16="http://schemas.microsoft.com/office/drawing/2014/main" id="{FA6C9F23-187C-41AA-B3E3-A0760CDDCF35}"/>
               </a:ext>
             </a:extLst>
           </p:cNvPr>
@@ -8931,7 +8931,7 @@
           <p:cNvPr id="6" name="core-no-0">
             <a:extLst xmlns:a="http://schemas.openxmlformats.org/drawingml/2006/main">
               <a:ext uri="{FF2B5EF4-FFF2-40B4-BE49-F238E27FC236}">
-                <a16:creationId xmlns:a16="http://schemas.microsoft.com/office/drawing/2014/main" id="{8DD04B3A-47FC-4887-A952-497ED139DEE4}"/>
+                <a16:creationId xmlns:a16="http://schemas.microsoft.com/office/drawing/2014/main" id="{1418F759-C4E6-4492-BD12-386507A61797}"/>
               </a:ext>
             </a:extLst>
           </p:cNvPr>
@@ -8963,7 +8963,7 @@
             <a:pPr algn="l">
               <a:defRPr sz="2250" b="1">
                 <a:solidFill>
-                  <a:srgbClr val="17A6C8"/>
+                  <a:srgbClr val="006B80"/>
                 </a:solidFill>
                 <a:latin typeface="PingFang SC"/>
                 <a:ea typeface="PingFang SC"/>
@@ -8973,7 +8973,7 @@
             <a:r>
               <a:rPr sz="2250" b="1">
                 <a:solidFill>
-                  <a:srgbClr val="17A6C8"/>
+                  <a:srgbClr val="006B80"/>
                 </a:solidFill>
                 <a:latin typeface="PingFang SC"/>
                 <a:ea typeface="PingFang SC"/>
@@ -8989,7 +8989,7 @@
           <p:cNvPr id="7" name="core-label-0">
             <a:extLst xmlns:a="http://schemas.openxmlformats.org/drawingml/2006/main">
               <a:ext uri="{FF2B5EF4-FFF2-40B4-BE49-F238E27FC236}">
-                <a16:creationId xmlns:a16="http://schemas.microsoft.com/office/drawing/2014/main" id="{C5D354C9-C553-4E2D-8A0A-B5A6FA83C586}"/>
+                <a16:creationId xmlns:a16="http://schemas.microsoft.com/office/drawing/2014/main" id="{2984B8E1-3660-4C75-AA5E-13482811F7D0}"/>
               </a:ext>
             </a:extLst>
           </p:cNvPr>
@@ -9047,7 +9047,7 @@
           <p:cNvPr id="8" name="core-body-0">
             <a:extLst xmlns:a="http://schemas.openxmlformats.org/drawingml/2006/main">
               <a:ext uri="{FF2B5EF4-FFF2-40B4-BE49-F238E27FC236}">
-                <a16:creationId xmlns:a16="http://schemas.microsoft.com/office/drawing/2014/main" id="{38BAE971-3498-4B90-9527-473291DFDCA2}"/>
+                <a16:creationId xmlns:a16="http://schemas.microsoft.com/office/drawing/2014/main" id="{628AFE6E-89EC-48D1-A9B3-9211BE1EA256}"/>
               </a:ext>
             </a:extLst>
           </p:cNvPr>
@@ -9071,14 +9071,14 @@
           </a:solidFill>
           <a:ln xmlns:a="http://schemas.openxmlformats.org/drawingml/2006/main" w="19050">
             <a:solidFill>
-              <a:srgbClr val="17A6C8"/>
+              <a:srgbClr val="006B80"/>
             </a:solidFill>
             <a:prstDash val="solid"/>
           </a:ln>
         </p:spPr>
         <p:txBody>
           <a:bodyPr xmlns:a="http://schemas.openxmlformats.org/drawingml/2006/main" lIns="152400" tIns="133350" rIns="152400" bIns="133350" anchor="ctr">
-            <a:normAutofit fontScale="98233"/>
+            <a:normAutofit fontScale="100000"/>
           </a:bodyPr>
           <a:lstStyle xmlns:a="http://schemas.openxmlformats.org/drawingml/2006/main"/>
           <a:p xmlns:a="http://schemas.openxmlformats.org/drawingml/2006/main">
@@ -9101,7 +9101,7 @@
                 <a:ea typeface="PingFang SC"/>
                 <a:cs typeface="PingFang SC"/>
               </a:rPr>
-              <a:t>权限失败是系统边界，而不是提示词问题。正确处理顺序是：确认调用身份与目标资源；判断所需权限是否属于当前任务；记录被拒绝的动作和原因；寻找权限内的只读或草稿替代；如果仍无法完成…</a:t>
+              <a:t>权限失败是系统边界；而不是提示词问题，正确处理顺序是；确认调用身份与目标资源；判断所需权限是否属于当前任务；记录被拒绝的动作和原因；寻找权限内的只读或草稿替代</a:t>
             </a:r>
           </a:p>
         </p:txBody>
@@ -9111,7 +9111,7 @@
           <p:cNvPr id="9" name="core-no-1">
             <a:extLst xmlns:a="http://schemas.openxmlformats.org/drawingml/2006/main">
               <a:ext uri="{FF2B5EF4-FFF2-40B4-BE49-F238E27FC236}">
-                <a16:creationId xmlns:a16="http://schemas.microsoft.com/office/drawing/2014/main" id="{22D968EF-16ED-4193-9B35-B5AF5A911F17}"/>
+                <a16:creationId xmlns:a16="http://schemas.microsoft.com/office/drawing/2014/main" id="{4E4FA179-5269-4E61-B57C-287800237B1A}"/>
               </a:ext>
             </a:extLst>
           </p:cNvPr>
@@ -9143,7 +9143,7 @@
             <a:pPr algn="l">
               <a:defRPr sz="2250" b="1">
                 <a:solidFill>
-                  <a:srgbClr val="17A6C8"/>
+                  <a:srgbClr val="006B80"/>
                 </a:solidFill>
                 <a:latin typeface="PingFang SC"/>
                 <a:ea typeface="PingFang SC"/>
@@ -9153,7 +9153,7 @@
             <a:r>
               <a:rPr sz="2250" b="1">
                 <a:solidFill>
-                  <a:srgbClr val="17A6C8"/>
+                  <a:srgbClr val="006B80"/>
                 </a:solidFill>
                 <a:latin typeface="PingFang SC"/>
                 <a:ea typeface="PingFang SC"/>
@@ -9169,7 +9169,7 @@
           <p:cNvPr id="10" name="core-body-1">
             <a:extLst xmlns:a="http://schemas.openxmlformats.org/drawingml/2006/main">
               <a:ext uri="{FF2B5EF4-FFF2-40B4-BE49-F238E27FC236}">
-                <a16:creationId xmlns:a16="http://schemas.microsoft.com/office/drawing/2014/main" id="{4C6ECD3C-DB1B-40AE-8678-EB7AE92FF352}"/>
+                <a16:creationId xmlns:a16="http://schemas.microsoft.com/office/drawing/2014/main" id="{E58DE542-DE87-4A29-8B3A-A787F0F59A41}"/>
               </a:ext>
             </a:extLst>
           </p:cNvPr>
@@ -9233,7 +9233,7 @@
           <p:cNvPr id="11" name="s8-takeaway-rule">
             <a:extLst xmlns:a="http://schemas.openxmlformats.org/drawingml/2006/main">
               <a:ext uri="{FF2B5EF4-FFF2-40B4-BE49-F238E27FC236}">
-                <a16:creationId xmlns:a16="http://schemas.microsoft.com/office/drawing/2014/main" id="{3FA50997-2A6C-4268-9100-58814DC467AB}"/>
+                <a16:creationId xmlns:a16="http://schemas.microsoft.com/office/drawing/2014/main" id="{80916242-9148-43BD-8193-AB2E5C179EBA}"/>
               </a:ext>
             </a:extLst>
           </p:cNvPr>
@@ -9266,7 +9266,7 @@
           <p:cNvPr id="12" name="s8-takeaway">
             <a:extLst xmlns:a="http://schemas.openxmlformats.org/drawingml/2006/main">
               <a:ext uri="{FF2B5EF4-FFF2-40B4-BE49-F238E27FC236}">
-                <a16:creationId xmlns:a16="http://schemas.microsoft.com/office/drawing/2014/main" id="{A447DB16-1F2B-4264-8990-F23D014E1D95}"/>
+                <a16:creationId xmlns:a16="http://schemas.microsoft.com/office/drawing/2014/main" id="{BA8B3D70-B602-4C50-BACB-AF5E606E4C54}"/>
               </a:ext>
             </a:extLst>
           </p:cNvPr>
@@ -9322,7 +9322,7 @@
     </p:spTree>
     <p:extLst>
       <p:ext uri="{BB962C8B-B14F-4D97-AF65-F5344CB8AC3E}">
-        <p14:creationId xmlns:p14="http://schemas.microsoft.com/office/powerpoint/2010/main" val="1568371036"/>
+        <p14:creationId xmlns:p14="http://schemas.microsoft.com/office/powerpoint/2010/main" val="1881825285"/>
       </p:ext>
     </p:extLst>
   </p:cSld>
@@ -9353,7 +9353,7 @@
           <p:cNvPr id="1" name="s9-rule">
             <a:extLst xmlns:a="http://schemas.openxmlformats.org/drawingml/2006/main">
               <a:ext uri="{FF2B5EF4-FFF2-40B4-BE49-F238E27FC236}">
-                <a16:creationId xmlns:a16="http://schemas.microsoft.com/office/drawing/2014/main" id="{A6D41767-7178-4DEF-B290-24840AAE095A}"/>
+                <a16:creationId xmlns:a16="http://schemas.microsoft.com/office/drawing/2014/main" id="{EBC72B43-ACD5-471D-83A7-90244ED79375}"/>
               </a:ext>
             </a:extLst>
           </p:cNvPr>
@@ -9386,7 +9386,7 @@
           <p:cNvPr id="2" name="s9-eyebrow">
             <a:extLst xmlns:a="http://schemas.openxmlformats.org/drawingml/2006/main">
               <a:ext uri="{FF2B5EF4-FFF2-40B4-BE49-F238E27FC236}">
-                <a16:creationId xmlns:a16="http://schemas.microsoft.com/office/drawing/2014/main" id="{E5CED485-520C-4DE6-A388-D774623E471A}"/>
+                <a16:creationId xmlns:a16="http://schemas.microsoft.com/office/drawing/2014/main" id="{FC9CA1A1-FFAD-484D-A389-77334359FBE8}"/>
               </a:ext>
             </a:extLst>
           </p:cNvPr>
@@ -9444,7 +9444,7 @@
           <p:cNvPr id="3" name="s9-title">
             <a:extLst xmlns:a="http://schemas.openxmlformats.org/drawingml/2006/main">
               <a:ext uri="{FF2B5EF4-FFF2-40B4-BE49-F238E27FC236}">
-                <a16:creationId xmlns:a16="http://schemas.microsoft.com/office/drawing/2014/main" id="{0F819B42-9431-4734-B99B-15C2FD8A3060}"/>
+                <a16:creationId xmlns:a16="http://schemas.microsoft.com/office/drawing/2014/main" id="{6637DDB3-A08B-4E6E-BCE3-BFC1CC17FAD4}"/>
               </a:ext>
             </a:extLst>
           </p:cNvPr>
@@ -9502,7 +9502,7 @@
           <p:cNvPr id="4" name="s9-footer">
             <a:extLst xmlns:a="http://schemas.openxmlformats.org/drawingml/2006/main">
               <a:ext uri="{FF2B5EF4-FFF2-40B4-BE49-F238E27FC236}">
-                <a16:creationId xmlns:a16="http://schemas.microsoft.com/office/drawing/2014/main" id="{35571090-7168-4524-B539-D1C66584FF62}"/>
+                <a16:creationId xmlns:a16="http://schemas.microsoft.com/office/drawing/2014/main" id="{91064FBB-1AF6-427A-A7D2-1918A20BA647}"/>
               </a:ext>
             </a:extLst>
           </p:cNvPr>
@@ -9533,7 +9533,7 @@
           <p:cNvPr id="5" name="s9-identity">
             <a:extLst xmlns:a="http://schemas.openxmlformats.org/drawingml/2006/main">
               <a:ext uri="{FF2B5EF4-FFF2-40B4-BE49-F238E27FC236}">
-                <a16:creationId xmlns:a16="http://schemas.microsoft.com/office/drawing/2014/main" id="{52CBE58E-69EB-4DFA-A5FA-B0F7CAA9F641}"/>
+                <a16:creationId xmlns:a16="http://schemas.microsoft.com/office/drawing/2014/main" id="{6152270C-C114-4488-8CB7-BCA2FA1DF79F}"/>
               </a:ext>
             </a:extLst>
           </p:cNvPr>
@@ -9591,7 +9591,7 @@
           <p:cNvPr id="6" name="case-title">
             <a:extLst xmlns:a="http://schemas.openxmlformats.org/drawingml/2006/main">
               <a:ext uri="{FF2B5EF4-FFF2-40B4-BE49-F238E27FC236}">
-                <a16:creationId xmlns:a16="http://schemas.microsoft.com/office/drawing/2014/main" id="{56A7ACBB-EA7F-42CA-ADC2-79CCC37F6E88}"/>
+                <a16:creationId xmlns:a16="http://schemas.microsoft.com/office/drawing/2014/main" id="{BC375DDC-1FC4-4253-8F32-7921445E5293}"/>
               </a:ext>
             </a:extLst>
           </p:cNvPr>
@@ -9655,7 +9655,7 @@
           <p:cNvPr id="7" name="case-row-0">
             <a:extLst xmlns:a="http://schemas.openxmlformats.org/drawingml/2006/main">
               <a:ext uri="{FF2B5EF4-FFF2-40B4-BE49-F238E27FC236}">
-                <a16:creationId xmlns:a16="http://schemas.microsoft.com/office/drawing/2014/main" id="{755ADB71-4AFC-41AB-8233-D62DAA3AA0AC}"/>
+                <a16:creationId xmlns:a16="http://schemas.microsoft.com/office/drawing/2014/main" id="{092FCBF9-ED5E-4390-A6AC-09DC1A415BC5}"/>
               </a:ext>
             </a:extLst>
           </p:cNvPr>
@@ -9686,7 +9686,7 @@
         </p:spPr>
         <p:txBody>
           <a:bodyPr xmlns:a="http://schemas.openxmlformats.org/drawingml/2006/main" lIns="152400" tIns="133350" rIns="152400" bIns="133350" anchor="ctr">
-            <a:normAutofit fontScale="51226"/>
+            <a:normAutofit fontScale="72956"/>
           </a:bodyPr>
           <a:lstStyle xmlns:a="http://schemas.openxmlformats.org/drawingml/2006/main"/>
           <a:p xmlns:a="http://schemas.openxmlformats.org/drawingml/2006/main">
@@ -9709,7 +9709,7 @@
                 <a:ea typeface="PingFang SC"/>
                 <a:cs typeface="PingFang SC"/>
               </a:rPr>
-              <a:t>场景｜某智能体接到“汇总最新差旅政策并列出报销上限”的任务。它的长期记忆里存有去年的规则，于是直接生成答案。正确设计应当是</a:t>
+              <a:t>场景｜某智能体接到“汇总最新差旅政策并列出报销上限”的任务</a:t>
             </a:r>
           </a:p>
         </p:txBody>
@@ -9719,7 +9719,7 @@
           <p:cNvPr id="8" name="case-row-1">
             <a:extLst xmlns:a="http://schemas.openxmlformats.org/drawingml/2006/main">
               <a:ext uri="{FF2B5EF4-FFF2-40B4-BE49-F238E27FC236}">
-                <a16:creationId xmlns:a16="http://schemas.microsoft.com/office/drawing/2014/main" id="{99830592-C6A6-48E5-8DBB-211E0A0AF0C3}"/>
+                <a16:creationId xmlns:a16="http://schemas.microsoft.com/office/drawing/2014/main" id="{CA70CA80-8EDE-4723-ACC1-29C47D62C0F5}"/>
               </a:ext>
             </a:extLst>
           </p:cNvPr>
@@ -9773,7 +9773,7 @@
                 <a:ea typeface="PingFang SC"/>
                 <a:cs typeface="PingFang SC"/>
               </a:rPr>
-              <a:t>机制｜计划先查询政策目录，再读取标记为“当前生效”的文件</a:t>
+              <a:t>机制｜它的长期记忆里存有去年的规则，于是直接生成答案</a:t>
             </a:r>
           </a:p>
         </p:txBody>
@@ -9783,7 +9783,7 @@
           <p:cNvPr id="9" name="case-row-2">
             <a:extLst xmlns:a="http://schemas.openxmlformats.org/drawingml/2006/main">
               <a:ext uri="{FF2B5EF4-FFF2-40B4-BE49-F238E27FC236}">
-                <a16:creationId xmlns:a16="http://schemas.microsoft.com/office/drawing/2014/main" id="{1B72978B-2FAB-41C9-8098-EAAF7C224A2A}"/>
+                <a16:creationId xmlns:a16="http://schemas.microsoft.com/office/drawing/2014/main" id="{E347CB39-9A79-4CFA-B881-A084316D548B}"/>
               </a:ext>
             </a:extLst>
           </p:cNvPr>
@@ -9837,7 +9837,7 @@
                 <a:ea typeface="PingFang SC"/>
                 <a:cs typeface="PingFang SC"/>
               </a:rPr>
-              <a:t>结果｜通过 resource 获取原文，记录文件版本、生效日期和来源</a:t>
+              <a:t>机制｜正确设计应当是</a:t>
             </a:r>
           </a:p>
         </p:txBody>
@@ -9847,7 +9847,7 @@
           <p:cNvPr id="10" name="case-row-3">
             <a:extLst xmlns:a="http://schemas.openxmlformats.org/drawingml/2006/main">
               <a:ext uri="{FF2B5EF4-FFF2-40B4-BE49-F238E27FC236}">
-                <a16:creationId xmlns:a16="http://schemas.microsoft.com/office/drawing/2014/main" id="{67F0C893-B47B-40DD-9D3D-FAAD16EC0BC2}"/>
+                <a16:creationId xmlns:a16="http://schemas.microsoft.com/office/drawing/2014/main" id="{9F2EA910-87E1-4369-85B8-0F8732993280}"/>
               </a:ext>
             </a:extLst>
           </p:cNvPr>
@@ -9859,6 +9859,70 @@
         <p:spPr>
           <a:xfrm xmlns:a="http://schemas.openxmlformats.org/drawingml/2006/main">
             <a:off x="4286250" y="3924300"/>
+            <a:ext cx="6534150" cy="514350"/>
+          </a:xfrm>
+          <a:prstGeom xmlns:a="http://schemas.openxmlformats.org/drawingml/2006/main" prst="roundRect">
+            <a:avLst>
+              <a:gd name="adj" fmla="val 24074"/>
+            </a:avLst>
+          </a:prstGeom>
+          <a:solidFill xmlns:a="http://schemas.openxmlformats.org/drawingml/2006/main">
+            <a:srgbClr val="FFFFFF"/>
+          </a:solidFill>
+          <a:ln xmlns:a="http://schemas.openxmlformats.org/drawingml/2006/main" w="9525">
+            <a:solidFill>
+              <a:srgbClr val="D8E0E8"/>
+            </a:solidFill>
+            <a:prstDash val="solid"/>
+          </a:ln>
+        </p:spPr>
+        <p:txBody>
+          <a:bodyPr xmlns:a="http://schemas.openxmlformats.org/drawingml/2006/main" lIns="152400" tIns="133350" rIns="152400" bIns="133350" anchor="ctr">
+            <a:normAutofit fontScale="72956"/>
+          </a:bodyPr>
+          <a:lstStyle xmlns:a="http://schemas.openxmlformats.org/drawingml/2006/main"/>
+          <a:p xmlns:a="http://schemas.openxmlformats.org/drawingml/2006/main">
+            <a:pPr algn="l">
+              <a:defRPr sz="1575" b="0">
+                <a:solidFill>
+                  <a:srgbClr val="10233F"/>
+                </a:solidFill>
+                <a:latin typeface="PingFang SC"/>
+                <a:ea typeface="PingFang SC"/>
+                <a:cs typeface="PingFang SC"/>
+              </a:defRPr>
+            </a:pPr>
+            <a:r>
+              <a:rPr sz="1575" b="0">
+                <a:solidFill>
+                  <a:srgbClr val="10233F"/>
+                </a:solidFill>
+                <a:latin typeface="PingFang SC"/>
+                <a:ea typeface="PingFang SC"/>
+                <a:cs typeface="PingFang SC"/>
+              </a:rPr>
+              <a:t>方法｜计划先查询政策目录，再读取标记为“当前生效”的文件</a:t>
+            </a:r>
+          </a:p>
+        </p:txBody>
+      </p:sp>
+      <p:sp>
+        <p:nvSpPr>
+          <p:cNvPr id="11" name="case-row-4">
+            <a:extLst xmlns:a="http://schemas.openxmlformats.org/drawingml/2006/main">
+              <a:ext uri="{FF2B5EF4-FFF2-40B4-BE49-F238E27FC236}">
+                <a16:creationId xmlns:a16="http://schemas.microsoft.com/office/drawing/2014/main" id="{092A313E-A7D9-40F4-9891-326BA281B84C}"/>
+              </a:ext>
+            </a:extLst>
+          </p:cNvPr>
+          <p:cNvSpPr>
+            <a:spLocks xmlns:a="http://schemas.openxmlformats.org/drawingml/2006/main" noGrp="1"/>
+          </p:cNvSpPr>
+          <p:nvPr/>
+        </p:nvSpPr>
+        <p:spPr>
+          <a:xfrm xmlns:a="http://schemas.openxmlformats.org/drawingml/2006/main">
+            <a:off x="4286250" y="4552950"/>
             <a:ext cx="6534150" cy="514350"/>
           </a:xfrm>
           <a:prstGeom xmlns:a="http://schemas.openxmlformats.org/drawingml/2006/main" prst="roundRect">
@@ -9871,7 +9935,7 @@
           </a:solidFill>
           <a:ln xmlns:a="http://schemas.openxmlformats.org/drawingml/2006/main" w="9525">
             <a:solidFill>
-              <a:srgbClr val="17A6C8"/>
+              <a:srgbClr val="006B80"/>
             </a:solidFill>
             <a:prstDash val="solid"/>
           </a:ln>
@@ -9901,17 +9965,17 @@
                 <a:ea typeface="PingFang SC"/>
                 <a:cs typeface="PingFang SC"/>
               </a:rPr>
-              <a:t>边界｜如需查询个人可报额度，再调用只读 tool，并显式传入授权范围内的人员标识</a:t>
-            </a:r>
-          </a:p>
-        </p:txBody>
-      </p:sp>
-      <p:sp>
-        <p:nvSpPr>
-          <p:cNvPr id="11" name="s9-takeaway-rule">
-            <a:extLst xmlns:a="http://schemas.openxmlformats.org/drawingml/2006/main">
-              <a:ext uri="{FF2B5EF4-FFF2-40B4-BE49-F238E27FC236}">
-                <a16:creationId xmlns:a16="http://schemas.microsoft.com/office/drawing/2014/main" id="{4388E610-08FB-461B-8A8E-754F0449EDA9}"/>
+              <a:t>方法｜通过 resource 获取原文，记录文件版本、生效日期和来源</a:t>
+            </a:r>
+          </a:p>
+        </p:txBody>
+      </p:sp>
+      <p:sp>
+        <p:nvSpPr>
+          <p:cNvPr id="12" name="s9-takeaway-rule">
+            <a:extLst xmlns:a="http://schemas.openxmlformats.org/drawingml/2006/main">
+              <a:ext uri="{FF2B5EF4-FFF2-40B4-BE49-F238E27FC236}">
+                <a16:creationId xmlns:a16="http://schemas.microsoft.com/office/drawing/2014/main" id="{4FE5296A-C544-45BC-ACEE-5F2A68565C60}"/>
               </a:ext>
             </a:extLst>
           </p:cNvPr>
@@ -9941,10 +10005,10 @@
       </p:sp>
       <p:sp>
         <p:nvSpPr>
-          <p:cNvPr id="12" name="s9-takeaway">
-            <a:extLst xmlns:a="http://schemas.openxmlformats.org/drawingml/2006/main">
-              <a:ext uri="{FF2B5EF4-FFF2-40B4-BE49-F238E27FC236}">
-                <a16:creationId xmlns:a16="http://schemas.microsoft.com/office/drawing/2014/main" id="{E5E436FF-7F0B-4AAB-B804-4A22814E59FA}"/>
+          <p:cNvPr id="13" name="s9-takeaway">
+            <a:extLst xmlns:a="http://schemas.openxmlformats.org/drawingml/2006/main">
+              <a:ext uri="{FF2B5EF4-FFF2-40B4-BE49-F238E27FC236}">
+                <a16:creationId xmlns:a16="http://schemas.microsoft.com/office/drawing/2014/main" id="{E8109D47-2FFD-4AC5-992F-14B4D2CCEA07}"/>
               </a:ext>
             </a:extLst>
           </p:cNvPr>
@@ -10000,7 +10064,7 @@
     </p:spTree>
     <p:extLst>
       <p:ext uri="{BB962C8B-B14F-4D97-AF65-F5344CB8AC3E}">
-        <p14:creationId xmlns:p14="http://schemas.microsoft.com/office/powerpoint/2010/main" val="1209492858"/>
+        <p14:creationId xmlns:p14="http://schemas.microsoft.com/office/powerpoint/2010/main" val="1754219337"/>
       </p:ext>
     </p:extLst>
   </p:cSld>

--- a/docs/public/course-assets/course-pptx/ag-002.pptx
+++ b/docs/public/course-assets/course-pptx/ag-002.pptx
@@ -2,24 +2,24 @@
 <file path=ppt/presentation.xml><?xml version="1.0" encoding="utf-8"?>
 <p:presentation xmlns:p="http://schemas.openxmlformats.org/presentationml/2006/main">
   <p:sldMasterIdLst>
-    <p:sldMasterId xmlns:r="http://schemas.openxmlformats.org/officeDocument/2006/relationships" id="2147483648" r:id="R234acfe914744c4d"/>
+    <p:sldMasterId xmlns:r="http://schemas.openxmlformats.org/officeDocument/2006/relationships" id="2147483648" r:id="R3074be43fe454dd3"/>
   </p:sldMasterIdLst>
   <p:notesMasterIdLst>
-    <p:notesMasterId xmlns:r="http://schemas.openxmlformats.org/officeDocument/2006/relationships" r:id="Rbe8cea7905474f6e"/>
+    <p:notesMasterId xmlns:r="http://schemas.openxmlformats.org/officeDocument/2006/relationships" r:id="R61f40d78b4a84eb8"/>
   </p:notesMasterIdLst>
   <p:sldIdLst>
-    <p:sldId xmlns:r="http://schemas.openxmlformats.org/officeDocument/2006/relationships" id="256" r:id="Rcb620d788d1048b4"/>
-    <p:sldId xmlns:r="http://schemas.openxmlformats.org/officeDocument/2006/relationships" id="257" r:id="R2a6d1b3e5f6d4603"/>
-    <p:sldId xmlns:r="http://schemas.openxmlformats.org/officeDocument/2006/relationships" id="258" r:id="R4d5dbb9cee4a41bc"/>
-    <p:sldId xmlns:r="http://schemas.openxmlformats.org/officeDocument/2006/relationships" id="259" r:id="Rfaea849e81a74f84"/>
-    <p:sldId xmlns:r="http://schemas.openxmlformats.org/officeDocument/2006/relationships" id="260" r:id="R59d4b9c5861c4978"/>
-    <p:sldId xmlns:r="http://schemas.openxmlformats.org/officeDocument/2006/relationships" id="261" r:id="Rad036fd2b5fe43cc"/>
-    <p:sldId xmlns:r="http://schemas.openxmlformats.org/officeDocument/2006/relationships" id="262" r:id="R0617780e1bea4b84"/>
-    <p:sldId xmlns:r="http://schemas.openxmlformats.org/officeDocument/2006/relationships" id="263" r:id="Rc48a98cbae174a06"/>
-    <p:sldId xmlns:r="http://schemas.openxmlformats.org/officeDocument/2006/relationships" id="264" r:id="R1973445b67e84f1d"/>
-    <p:sldId xmlns:r="http://schemas.openxmlformats.org/officeDocument/2006/relationships" id="265" r:id="R82fe1cd8896340a0"/>
-    <p:sldId xmlns:r="http://schemas.openxmlformats.org/officeDocument/2006/relationships" id="266" r:id="Rf75f04e9409249a9"/>
-    <p:sldId xmlns:r="http://schemas.openxmlformats.org/officeDocument/2006/relationships" id="267" r:id="R66f7fad44143445e"/>
+    <p:sldId xmlns:r="http://schemas.openxmlformats.org/officeDocument/2006/relationships" id="256" r:id="R4dc5f76317f54604"/>
+    <p:sldId xmlns:r="http://schemas.openxmlformats.org/officeDocument/2006/relationships" id="257" r:id="R1bbf093d5da34689"/>
+    <p:sldId xmlns:r="http://schemas.openxmlformats.org/officeDocument/2006/relationships" id="258" r:id="R5008d5f3c4c04049"/>
+    <p:sldId xmlns:r="http://schemas.openxmlformats.org/officeDocument/2006/relationships" id="259" r:id="Re48a970f309b4be0"/>
+    <p:sldId xmlns:r="http://schemas.openxmlformats.org/officeDocument/2006/relationships" id="260" r:id="R7a86bd0d1bf54a61"/>
+    <p:sldId xmlns:r="http://schemas.openxmlformats.org/officeDocument/2006/relationships" id="261" r:id="R649f7c695d164d97"/>
+    <p:sldId xmlns:r="http://schemas.openxmlformats.org/officeDocument/2006/relationships" id="262" r:id="R787b56c3e0424308"/>
+    <p:sldId xmlns:r="http://schemas.openxmlformats.org/officeDocument/2006/relationships" id="263" r:id="R225f3b28b3444dac"/>
+    <p:sldId xmlns:r="http://schemas.openxmlformats.org/officeDocument/2006/relationships" id="264" r:id="Rb1f75c4149e14f09"/>
+    <p:sldId xmlns:r="http://schemas.openxmlformats.org/officeDocument/2006/relationships" id="265" r:id="Rb8300787931b4d57"/>
+    <p:sldId xmlns:r="http://schemas.openxmlformats.org/officeDocument/2006/relationships" id="266" r:id="R51a48e82d1724851"/>
+    <p:sldId xmlns:r="http://schemas.openxmlformats.org/officeDocument/2006/relationships" id="267" r:id="R7f33727777f14b1e"/>
   </p:sldIdLst>
   <p:sldSz cx="12192000" cy="6858000"/>
   <p:notesSz cx="6858000" cy="9144000"/>
@@ -1338,7 +1338,7 @@
   </p:cSld>
   <p:clrMap bg1="lt1" tx1="dk1" bg2="lt2" tx2="dk2" accent1="accent1" accent2="accent2" accent3="accent3" accent4="accent4" accent5="accent5" accent6="accent6" hlink="hlink" folHlink="folHlink"/>
   <p:sldLayoutIdLst>
-    <p:sldLayoutId xmlns:r="http://schemas.openxmlformats.org/officeDocument/2006/relationships" id="2147483649" r:id="Rca091969603e424f"/>
+    <p:sldLayoutId xmlns:r="http://schemas.openxmlformats.org/officeDocument/2006/relationships" id="2147483649" r:id="Rcd6b06484f53408f"/>
   </p:sldLayoutIdLst>
   <p:txStyles>
     <p:titleStyle>
@@ -1889,7 +1889,7 @@
           <p:cNvPr id="1" name="cover-rule">
             <a:extLst xmlns:a="http://schemas.openxmlformats.org/drawingml/2006/main">
               <a:ext uri="{FF2B5EF4-FFF2-40B4-BE49-F238E27FC236}">
-                <a16:creationId xmlns:a16="http://schemas.microsoft.com/office/drawing/2014/main" id="{78397736-B32F-4343-A27C-8E300A187E54}"/>
+                <a16:creationId xmlns:a16="http://schemas.microsoft.com/office/drawing/2014/main" id="{41D8AB22-277D-4016-B513-685BFA9742D1}"/>
               </a:ext>
             </a:extLst>
           </p:cNvPr>
@@ -1922,7 +1922,7 @@
           <p:cNvPr id="2" name="cover-ring-1">
             <a:extLst xmlns:a="http://schemas.openxmlformats.org/drawingml/2006/main">
               <a:ext uri="{FF2B5EF4-FFF2-40B4-BE49-F238E27FC236}">
-                <a16:creationId xmlns:a16="http://schemas.microsoft.com/office/drawing/2014/main" id="{2864B144-C904-4367-8539-3414865AF082}"/>
+                <a16:creationId xmlns:a16="http://schemas.microsoft.com/office/drawing/2014/main" id="{E62574FC-D294-4540-9459-C93D9640044E}"/>
               </a:ext>
             </a:extLst>
           </p:cNvPr>
@@ -1953,7 +1953,7 @@
           <p:cNvPr id="3" name="cover-ring-2">
             <a:extLst xmlns:a="http://schemas.openxmlformats.org/drawingml/2006/main">
               <a:ext uri="{FF2B5EF4-FFF2-40B4-BE49-F238E27FC236}">
-                <a16:creationId xmlns:a16="http://schemas.microsoft.com/office/drawing/2014/main" id="{DBBAC4BD-157C-4A7F-BEA8-35EDFEADFEF2}"/>
+                <a16:creationId xmlns:a16="http://schemas.microsoft.com/office/drawing/2014/main" id="{0666D9DD-2E0B-490F-9822-9E6842E20BD8}"/>
               </a:ext>
             </a:extLst>
           </p:cNvPr>
@@ -1984,7 +1984,7 @@
           <p:cNvPr id="4" name="cover-core">
             <a:extLst xmlns:a="http://schemas.openxmlformats.org/drawingml/2006/main">
               <a:ext uri="{FF2B5EF4-FFF2-40B4-BE49-F238E27FC236}">
-                <a16:creationId xmlns:a16="http://schemas.microsoft.com/office/drawing/2014/main" id="{D317F816-D95E-48E0-A9E0-81EA906B471D}"/>
+                <a16:creationId xmlns:a16="http://schemas.microsoft.com/office/drawing/2014/main" id="{EEA654F5-A9E3-40DB-B2CD-903666A64B18}"/>
               </a:ext>
             </a:extLst>
           </p:cNvPr>
@@ -2017,7 +2017,7 @@
           <p:cNvPr id="5" name="cover-line-1">
             <a:extLst xmlns:a="http://schemas.openxmlformats.org/drawingml/2006/main">
               <a:ext uri="{FF2B5EF4-FFF2-40B4-BE49-F238E27FC236}">
-                <a16:creationId xmlns:a16="http://schemas.microsoft.com/office/drawing/2014/main" id="{398C3A71-C532-4773-BEB8-E87462C77371}"/>
+                <a16:creationId xmlns:a16="http://schemas.microsoft.com/office/drawing/2014/main" id="{E5F81F48-077A-4126-AB06-2D222B5D9967}"/>
               </a:ext>
             </a:extLst>
           </p:cNvPr>
@@ -2048,7 +2048,7 @@
           <p:cNvPr id="6" name="cover-line-2">
             <a:extLst xmlns:a="http://schemas.openxmlformats.org/drawingml/2006/main">
               <a:ext uri="{FF2B5EF4-FFF2-40B4-BE49-F238E27FC236}">
-                <a16:creationId xmlns:a16="http://schemas.microsoft.com/office/drawing/2014/main" id="{404A17B9-3317-4FC0-9B7A-B379BA2713FE}"/>
+                <a16:creationId xmlns:a16="http://schemas.microsoft.com/office/drawing/2014/main" id="{6387E982-4236-46F7-984B-8AA753C18769}"/>
               </a:ext>
             </a:extLst>
           </p:cNvPr>
@@ -2079,7 +2079,7 @@
           <p:cNvPr id="7" name="cover-eyebrow">
             <a:extLst xmlns:a="http://schemas.openxmlformats.org/drawingml/2006/main">
               <a:ext uri="{FF2B5EF4-FFF2-40B4-BE49-F238E27FC236}">
-                <a16:creationId xmlns:a16="http://schemas.microsoft.com/office/drawing/2014/main" id="{5071FD16-548D-4EDB-9D2D-6E57BAF905BC}"/>
+                <a16:creationId xmlns:a16="http://schemas.microsoft.com/office/drawing/2014/main" id="{636D8A37-144B-4797-B74C-E5791487CCF7}"/>
               </a:ext>
             </a:extLst>
           </p:cNvPr>
@@ -2137,7 +2137,7 @@
           <p:cNvPr id="8" name="cover-title">
             <a:extLst xmlns:a="http://schemas.openxmlformats.org/drawingml/2006/main">
               <a:ext uri="{FF2B5EF4-FFF2-40B4-BE49-F238E27FC236}">
-                <a16:creationId xmlns:a16="http://schemas.microsoft.com/office/drawing/2014/main" id="{D6649B0C-6988-4894-ADDB-86D0984BCD71}"/>
+                <a16:creationId xmlns:a16="http://schemas.microsoft.com/office/drawing/2014/main" id="{7A46444F-A622-4D3C-93D7-773612B1859D}"/>
               </a:ext>
             </a:extLst>
           </p:cNvPr>
@@ -2195,7 +2195,7 @@
           <p:cNvPr id="9" name="cover-subtitle">
             <a:extLst xmlns:a="http://schemas.openxmlformats.org/drawingml/2006/main">
               <a:ext uri="{FF2B5EF4-FFF2-40B4-BE49-F238E27FC236}">
-                <a16:creationId xmlns:a16="http://schemas.microsoft.com/office/drawing/2014/main" id="{D740FDD1-92C6-4AFD-AED7-A6E22F3CAA41}"/>
+                <a16:creationId xmlns:a16="http://schemas.microsoft.com/office/drawing/2014/main" id="{3E3DEA6E-CB18-4BFF-AE67-F7E027B4AC07}"/>
               </a:ext>
             </a:extLst>
           </p:cNvPr>
@@ -2257,7 +2257,7 @@
           <p:cNvPr id="10" name="cover-lead">
             <a:extLst xmlns:a="http://schemas.openxmlformats.org/drawingml/2006/main">
               <a:ext uri="{FF2B5EF4-FFF2-40B4-BE49-F238E27FC236}">
-                <a16:creationId xmlns:a16="http://schemas.microsoft.com/office/drawing/2014/main" id="{D34F7343-9270-4ABC-82F3-212FD13C7BAF}"/>
+                <a16:creationId xmlns:a16="http://schemas.microsoft.com/office/drawing/2014/main" id="{3D20DDEF-063F-4CE4-962D-341C25826FD8}"/>
               </a:ext>
             </a:extLst>
           </p:cNvPr>
@@ -2315,7 +2315,7 @@
           <p:cNvPr id="11" name="cover-course">
             <a:extLst xmlns:a="http://schemas.openxmlformats.org/drawingml/2006/main">
               <a:ext uri="{FF2B5EF4-FFF2-40B4-BE49-F238E27FC236}">
-                <a16:creationId xmlns:a16="http://schemas.microsoft.com/office/drawing/2014/main" id="{2752497D-86DF-4BF5-8122-F827CF3134A2}"/>
+                <a16:creationId xmlns:a16="http://schemas.microsoft.com/office/drawing/2014/main" id="{3381CE5A-0FD4-4722-8349-5CD26245C9B5}"/>
               </a:ext>
             </a:extLst>
           </p:cNvPr>
@@ -2373,7 +2373,7 @@
           <p:cNvPr id="12" name="cover-id">
             <a:extLst xmlns:a="http://schemas.openxmlformats.org/drawingml/2006/main">
               <a:ext uri="{FF2B5EF4-FFF2-40B4-BE49-F238E27FC236}">
-                <a16:creationId xmlns:a16="http://schemas.microsoft.com/office/drawing/2014/main" id="{96A79012-7A1A-4875-81B0-57F9524F6397}"/>
+                <a16:creationId xmlns:a16="http://schemas.microsoft.com/office/drawing/2014/main" id="{0ACF363D-7D3A-454A-AFAA-0C9FA59A777A}"/>
               </a:ext>
             </a:extLst>
           </p:cNvPr>
@@ -2429,7 +2429,7 @@
     </p:spTree>
     <p:extLst>
       <p:ext uri="{BB962C8B-B14F-4D97-AF65-F5344CB8AC3E}">
-        <p14:creationId xmlns:p14="http://schemas.microsoft.com/office/powerpoint/2010/main" val="1936057536"/>
+        <p14:creationId xmlns:p14="http://schemas.microsoft.com/office/powerpoint/2010/main" val="1716710900"/>
       </p:ext>
     </p:extLst>
   </p:cSld>
@@ -2460,7 +2460,7 @@
           <p:cNvPr id="1" name="s10-rule">
             <a:extLst xmlns:a="http://schemas.openxmlformats.org/drawingml/2006/main">
               <a:ext uri="{FF2B5EF4-FFF2-40B4-BE49-F238E27FC236}">
-                <a16:creationId xmlns:a16="http://schemas.microsoft.com/office/drawing/2014/main" id="{B29CA3E2-B561-433B-B305-8B799839EC0A}"/>
+                <a16:creationId xmlns:a16="http://schemas.microsoft.com/office/drawing/2014/main" id="{E05F99AE-0229-474B-9B8C-4DA2664F3FE0}"/>
               </a:ext>
             </a:extLst>
           </p:cNvPr>
@@ -2493,7 +2493,7 @@
           <p:cNvPr id="2" name="s10-eyebrow">
             <a:extLst xmlns:a="http://schemas.openxmlformats.org/drawingml/2006/main">
               <a:ext uri="{FF2B5EF4-FFF2-40B4-BE49-F238E27FC236}">
-                <a16:creationId xmlns:a16="http://schemas.microsoft.com/office/drawing/2014/main" id="{F485EB94-8AE6-47D1-80C4-27661E38E448}"/>
+                <a16:creationId xmlns:a16="http://schemas.microsoft.com/office/drawing/2014/main" id="{2767940E-5E88-4179-8840-2820C7AE7306}"/>
               </a:ext>
             </a:extLst>
           </p:cNvPr>
@@ -2551,7 +2551,7 @@
           <p:cNvPr id="3" name="s10-title">
             <a:extLst xmlns:a="http://schemas.openxmlformats.org/drawingml/2006/main">
               <a:ext uri="{FF2B5EF4-FFF2-40B4-BE49-F238E27FC236}">
-                <a16:creationId xmlns:a16="http://schemas.microsoft.com/office/drawing/2014/main" id="{7B6188FE-BA74-4C48-ACCE-C7F38662744A}"/>
+                <a16:creationId xmlns:a16="http://schemas.microsoft.com/office/drawing/2014/main" id="{840A5D76-4624-4518-8B67-FD2AED7711DC}"/>
               </a:ext>
             </a:extLst>
           </p:cNvPr>
@@ -2609,7 +2609,7 @@
           <p:cNvPr id="4" name="s10-footer">
             <a:extLst xmlns:a="http://schemas.openxmlformats.org/drawingml/2006/main">
               <a:ext uri="{FF2B5EF4-FFF2-40B4-BE49-F238E27FC236}">
-                <a16:creationId xmlns:a16="http://schemas.microsoft.com/office/drawing/2014/main" id="{666C736A-C6EA-4E40-94F8-B48FFF75D096}"/>
+                <a16:creationId xmlns:a16="http://schemas.microsoft.com/office/drawing/2014/main" id="{C381B6AD-E7A0-4E19-8A9B-2B0E9FE39034}"/>
               </a:ext>
             </a:extLst>
           </p:cNvPr>
@@ -2640,7 +2640,7 @@
           <p:cNvPr id="5" name="s10-identity">
             <a:extLst xmlns:a="http://schemas.openxmlformats.org/drawingml/2006/main">
               <a:ext uri="{FF2B5EF4-FFF2-40B4-BE49-F238E27FC236}">
-                <a16:creationId xmlns:a16="http://schemas.microsoft.com/office/drawing/2014/main" id="{821BA33F-978E-4F10-A84B-14458045299A}"/>
+                <a16:creationId xmlns:a16="http://schemas.microsoft.com/office/drawing/2014/main" id="{3D335372-240E-4D0C-88AC-4C6B4E6D7747}"/>
               </a:ext>
             </a:extLst>
           </p:cNvPr>
@@ -2698,7 +2698,7 @@
           <p:cNvPr id="6" name="practice-circle-0">
             <a:extLst xmlns:a="http://schemas.openxmlformats.org/drawingml/2006/main">
               <a:ext uri="{FF2B5EF4-FFF2-40B4-BE49-F238E27FC236}">
-                <a16:creationId xmlns:a16="http://schemas.microsoft.com/office/drawing/2014/main" id="{4C5CC7EF-46BC-4BA5-9095-370D415B3B0E}"/>
+                <a16:creationId xmlns:a16="http://schemas.microsoft.com/office/drawing/2014/main" id="{CE5DD0EB-8CB9-47AE-A5E5-A570BF1918E1}"/>
               </a:ext>
             </a:extLst>
           </p:cNvPr>
@@ -2731,7 +2731,7 @@
           <p:cNvPr id="7" name="practice-number-0">
             <a:extLst xmlns:a="http://schemas.openxmlformats.org/drawingml/2006/main">
               <a:ext uri="{FF2B5EF4-FFF2-40B4-BE49-F238E27FC236}">
-                <a16:creationId xmlns:a16="http://schemas.microsoft.com/office/drawing/2014/main" id="{7BDC23C9-02B0-4C86-964D-B5F4F01128E4}"/>
+                <a16:creationId xmlns:a16="http://schemas.microsoft.com/office/drawing/2014/main" id="{C4EFAE2E-7514-40F6-BA07-B0B28E1730A8}"/>
               </a:ext>
             </a:extLst>
           </p:cNvPr>
@@ -2789,7 +2789,7 @@
           <p:cNvPr id="8" name="practice-item-0">
             <a:extLst xmlns:a="http://schemas.openxmlformats.org/drawingml/2006/main">
               <a:ext uri="{FF2B5EF4-FFF2-40B4-BE49-F238E27FC236}">
-                <a16:creationId xmlns:a16="http://schemas.microsoft.com/office/drawing/2014/main" id="{941F133E-43C7-4D0A-837B-88581A819179}"/>
+                <a16:creationId xmlns:a16="http://schemas.microsoft.com/office/drawing/2014/main" id="{48C08D50-E11A-4A71-B614-ECFEC54BE96D}"/>
               </a:ext>
             </a:extLst>
           </p:cNvPr>
@@ -2853,7 +2853,7 @@
           <p:cNvPr id="9" name="practice-connector-0">
             <a:extLst xmlns:a="http://schemas.openxmlformats.org/drawingml/2006/main">
               <a:ext uri="{FF2B5EF4-FFF2-40B4-BE49-F238E27FC236}">
-                <a16:creationId xmlns:a16="http://schemas.microsoft.com/office/drawing/2014/main" id="{1C86A9E5-64BD-4934-A3EC-DDECA47483DE}"/>
+                <a16:creationId xmlns:a16="http://schemas.microsoft.com/office/drawing/2014/main" id="{F98ACBCD-6BD0-44B6-98B2-26B0942FA7B1}"/>
               </a:ext>
             </a:extLst>
           </p:cNvPr>
@@ -2884,7 +2884,7 @@
           <p:cNvPr id="10" name="practice-circle-1">
             <a:extLst xmlns:a="http://schemas.openxmlformats.org/drawingml/2006/main">
               <a:ext uri="{FF2B5EF4-FFF2-40B4-BE49-F238E27FC236}">
-                <a16:creationId xmlns:a16="http://schemas.microsoft.com/office/drawing/2014/main" id="{DB579BD8-73D8-4324-B496-1E96C0C5BE33}"/>
+                <a16:creationId xmlns:a16="http://schemas.microsoft.com/office/drawing/2014/main" id="{B4564F8F-1DDE-4927-905B-B4FC2EF643B7}"/>
               </a:ext>
             </a:extLst>
           </p:cNvPr>
@@ -2917,7 +2917,7 @@
           <p:cNvPr id="11" name="practice-number-1">
             <a:extLst xmlns:a="http://schemas.openxmlformats.org/drawingml/2006/main">
               <a:ext uri="{FF2B5EF4-FFF2-40B4-BE49-F238E27FC236}">
-                <a16:creationId xmlns:a16="http://schemas.microsoft.com/office/drawing/2014/main" id="{FCDA34D1-7638-4ECA-BEF8-C9887FED020A}"/>
+                <a16:creationId xmlns:a16="http://schemas.microsoft.com/office/drawing/2014/main" id="{EC193101-50B5-469C-BC70-EE4CE75085C8}"/>
               </a:ext>
             </a:extLst>
           </p:cNvPr>
@@ -2975,7 +2975,7 @@
           <p:cNvPr id="12" name="practice-item-1">
             <a:extLst xmlns:a="http://schemas.openxmlformats.org/drawingml/2006/main">
               <a:ext uri="{FF2B5EF4-FFF2-40B4-BE49-F238E27FC236}">
-                <a16:creationId xmlns:a16="http://schemas.microsoft.com/office/drawing/2014/main" id="{71958622-6A34-476A-9798-8FCF1800EC72}"/>
+                <a16:creationId xmlns:a16="http://schemas.microsoft.com/office/drawing/2014/main" id="{04E68021-3B0F-4711-A29F-11FE5D256FD9}"/>
               </a:ext>
             </a:extLst>
           </p:cNvPr>
@@ -3039,7 +3039,7 @@
           <p:cNvPr id="13" name="practice-connector-1">
             <a:extLst xmlns:a="http://schemas.openxmlformats.org/drawingml/2006/main">
               <a:ext uri="{FF2B5EF4-FFF2-40B4-BE49-F238E27FC236}">
-                <a16:creationId xmlns:a16="http://schemas.microsoft.com/office/drawing/2014/main" id="{9FCA74E0-9A4B-41BE-9BCE-0C2C9043E9C2}"/>
+                <a16:creationId xmlns:a16="http://schemas.microsoft.com/office/drawing/2014/main" id="{356E2941-157D-4E1C-8895-B80CBEEBCCA8}"/>
               </a:ext>
             </a:extLst>
           </p:cNvPr>
@@ -3070,7 +3070,7 @@
           <p:cNvPr id="14" name="practice-circle-2">
             <a:extLst xmlns:a="http://schemas.openxmlformats.org/drawingml/2006/main">
               <a:ext uri="{FF2B5EF4-FFF2-40B4-BE49-F238E27FC236}">
-                <a16:creationId xmlns:a16="http://schemas.microsoft.com/office/drawing/2014/main" id="{94F4B375-D8A1-486B-9D7E-B6134994E3CF}"/>
+                <a16:creationId xmlns:a16="http://schemas.microsoft.com/office/drawing/2014/main" id="{C5BFE55D-1275-472A-A936-49298F195507}"/>
               </a:ext>
             </a:extLst>
           </p:cNvPr>
@@ -3103,7 +3103,7 @@
           <p:cNvPr id="15" name="practice-number-2">
             <a:extLst xmlns:a="http://schemas.openxmlformats.org/drawingml/2006/main">
               <a:ext uri="{FF2B5EF4-FFF2-40B4-BE49-F238E27FC236}">
-                <a16:creationId xmlns:a16="http://schemas.microsoft.com/office/drawing/2014/main" id="{D0FC7172-3BF4-4C69-A6E9-4642CF75F82C}"/>
+                <a16:creationId xmlns:a16="http://schemas.microsoft.com/office/drawing/2014/main" id="{2439057F-C211-44AC-AE24-8782CC2F68BC}"/>
               </a:ext>
             </a:extLst>
           </p:cNvPr>
@@ -3161,7 +3161,7 @@
           <p:cNvPr id="16" name="practice-item-2">
             <a:extLst xmlns:a="http://schemas.openxmlformats.org/drawingml/2006/main">
               <a:ext uri="{FF2B5EF4-FFF2-40B4-BE49-F238E27FC236}">
-                <a16:creationId xmlns:a16="http://schemas.microsoft.com/office/drawing/2014/main" id="{319A9E23-359F-4748-924D-524548C7A6B3}"/>
+                <a16:creationId xmlns:a16="http://schemas.microsoft.com/office/drawing/2014/main" id="{0756B77B-4C71-4D1B-9517-AFC8FFB0F694}"/>
               </a:ext>
             </a:extLst>
           </p:cNvPr>
@@ -3223,7 +3223,7 @@
     </p:spTree>
     <p:extLst>
       <p:ext uri="{BB962C8B-B14F-4D97-AF65-F5344CB8AC3E}">
-        <p14:creationId xmlns:p14="http://schemas.microsoft.com/office/powerpoint/2010/main" val="1048950899"/>
+        <p14:creationId xmlns:p14="http://schemas.microsoft.com/office/powerpoint/2010/main" val="380551529"/>
       </p:ext>
     </p:extLst>
   </p:cSld>
@@ -3254,7 +3254,7 @@
           <p:cNvPr id="1" name="s11-rule">
             <a:extLst xmlns:a="http://schemas.openxmlformats.org/drawingml/2006/main">
               <a:ext uri="{FF2B5EF4-FFF2-40B4-BE49-F238E27FC236}">
-                <a16:creationId xmlns:a16="http://schemas.microsoft.com/office/drawing/2014/main" id="{0FAA06A5-85EB-479E-8EC8-F0C66B477DA6}"/>
+                <a16:creationId xmlns:a16="http://schemas.microsoft.com/office/drawing/2014/main" id="{DE2EB2DB-2784-45A1-8482-B209DFCCF5AF}"/>
               </a:ext>
             </a:extLst>
           </p:cNvPr>
@@ -3287,7 +3287,7 @@
           <p:cNvPr id="2" name="s11-eyebrow">
             <a:extLst xmlns:a="http://schemas.openxmlformats.org/drawingml/2006/main">
               <a:ext uri="{FF2B5EF4-FFF2-40B4-BE49-F238E27FC236}">
-                <a16:creationId xmlns:a16="http://schemas.microsoft.com/office/drawing/2014/main" id="{D33BD98C-C982-42BD-A03E-3CEAEBE4F921}"/>
+                <a16:creationId xmlns:a16="http://schemas.microsoft.com/office/drawing/2014/main" id="{E424BC99-9034-4E19-A23E-AC05EB638C27}"/>
               </a:ext>
             </a:extLst>
           </p:cNvPr>
@@ -3345,7 +3345,7 @@
           <p:cNvPr id="3" name="s11-title">
             <a:extLst xmlns:a="http://schemas.openxmlformats.org/drawingml/2006/main">
               <a:ext uri="{FF2B5EF4-FFF2-40B4-BE49-F238E27FC236}">
-                <a16:creationId xmlns:a16="http://schemas.microsoft.com/office/drawing/2014/main" id="{C0EDDCF8-670D-4B9F-BFBD-D2DAD7C8E163}"/>
+                <a16:creationId xmlns:a16="http://schemas.microsoft.com/office/drawing/2014/main" id="{BCC774F0-E9BF-4181-8EAC-5ED9FF5ABAC4}"/>
               </a:ext>
             </a:extLst>
           </p:cNvPr>
@@ -3403,7 +3403,7 @@
           <p:cNvPr id="4" name="s11-footer">
             <a:extLst xmlns:a="http://schemas.openxmlformats.org/drawingml/2006/main">
               <a:ext uri="{FF2B5EF4-FFF2-40B4-BE49-F238E27FC236}">
-                <a16:creationId xmlns:a16="http://schemas.microsoft.com/office/drawing/2014/main" id="{18444B4F-D5B2-4CCF-8DD1-2BA5ADDBD098}"/>
+                <a16:creationId xmlns:a16="http://schemas.microsoft.com/office/drawing/2014/main" id="{39A4A92E-B71B-456B-AD32-5E32942CEABE}"/>
               </a:ext>
             </a:extLst>
           </p:cNvPr>
@@ -3434,7 +3434,7 @@
           <p:cNvPr id="5" name="s11-identity">
             <a:extLst xmlns:a="http://schemas.openxmlformats.org/drawingml/2006/main">
               <a:ext uri="{FF2B5EF4-FFF2-40B4-BE49-F238E27FC236}">
-                <a16:creationId xmlns:a16="http://schemas.microsoft.com/office/drawing/2014/main" id="{4F167EBE-4495-4B99-AD5F-5A117324B18C}"/>
+                <a16:creationId xmlns:a16="http://schemas.microsoft.com/office/drawing/2014/main" id="{1D6032A9-2CE5-40F6-97C4-E98CE8EA6C3A}"/>
               </a:ext>
             </a:extLst>
           </p:cNvPr>
@@ -3492,7 +3492,7 @@
           <p:cNvPr id="6" name="recap-circle-0">
             <a:extLst xmlns:a="http://schemas.openxmlformats.org/drawingml/2006/main">
               <a:ext uri="{FF2B5EF4-FFF2-40B4-BE49-F238E27FC236}">
-                <a16:creationId xmlns:a16="http://schemas.microsoft.com/office/drawing/2014/main" id="{4C16A425-F76B-41FC-9C2F-94E5D7E93ACC}"/>
+                <a16:creationId xmlns:a16="http://schemas.microsoft.com/office/drawing/2014/main" id="{A27291F0-C995-42BE-88AD-921CBBFA3C14}"/>
               </a:ext>
             </a:extLst>
           </p:cNvPr>
@@ -3525,7 +3525,7 @@
           <p:cNvPr id="7" name="recap-number-0">
             <a:extLst xmlns:a="http://schemas.openxmlformats.org/drawingml/2006/main">
               <a:ext uri="{FF2B5EF4-FFF2-40B4-BE49-F238E27FC236}">
-                <a16:creationId xmlns:a16="http://schemas.microsoft.com/office/drawing/2014/main" id="{97101776-6703-4255-AC5F-58D0C5762ECB}"/>
+                <a16:creationId xmlns:a16="http://schemas.microsoft.com/office/drawing/2014/main" id="{9672CB9E-F4E7-45A0-A30E-0104E442853C}"/>
               </a:ext>
             </a:extLst>
           </p:cNvPr>
@@ -3583,7 +3583,7 @@
           <p:cNvPr id="8" name="recap-item-0">
             <a:extLst xmlns:a="http://schemas.openxmlformats.org/drawingml/2006/main">
               <a:ext uri="{FF2B5EF4-FFF2-40B4-BE49-F238E27FC236}">
-                <a16:creationId xmlns:a16="http://schemas.microsoft.com/office/drawing/2014/main" id="{1937F611-5396-41F3-BBDC-C5E6501DDF7B}"/>
+                <a16:creationId xmlns:a16="http://schemas.microsoft.com/office/drawing/2014/main" id="{644C4E7B-062D-4150-A6C5-2ABE553784E9}"/>
               </a:ext>
             </a:extLst>
           </p:cNvPr>
@@ -3647,7 +3647,7 @@
           <p:cNvPr id="9" name="recap-connector-0">
             <a:extLst xmlns:a="http://schemas.openxmlformats.org/drawingml/2006/main">
               <a:ext uri="{FF2B5EF4-FFF2-40B4-BE49-F238E27FC236}">
-                <a16:creationId xmlns:a16="http://schemas.microsoft.com/office/drawing/2014/main" id="{5B420D1A-2DCA-423E-9859-43FEA576EE45}"/>
+                <a16:creationId xmlns:a16="http://schemas.microsoft.com/office/drawing/2014/main" id="{74C0C8B1-6D40-4723-8BF9-6999CB674C16}"/>
               </a:ext>
             </a:extLst>
           </p:cNvPr>
@@ -3678,7 +3678,7 @@
           <p:cNvPr id="10" name="recap-circle-1">
             <a:extLst xmlns:a="http://schemas.openxmlformats.org/drawingml/2006/main">
               <a:ext uri="{FF2B5EF4-FFF2-40B4-BE49-F238E27FC236}">
-                <a16:creationId xmlns:a16="http://schemas.microsoft.com/office/drawing/2014/main" id="{9D527008-CEBE-4213-90AC-48BD199759D8}"/>
+                <a16:creationId xmlns:a16="http://schemas.microsoft.com/office/drawing/2014/main" id="{B3345631-E584-41C2-9D10-75307533DB05}"/>
               </a:ext>
             </a:extLst>
           </p:cNvPr>
@@ -3711,7 +3711,7 @@
           <p:cNvPr id="11" name="recap-number-1">
             <a:extLst xmlns:a="http://schemas.openxmlformats.org/drawingml/2006/main">
               <a:ext uri="{FF2B5EF4-FFF2-40B4-BE49-F238E27FC236}">
-                <a16:creationId xmlns:a16="http://schemas.microsoft.com/office/drawing/2014/main" id="{22899F29-4AC3-4B15-8927-851295EB633B}"/>
+                <a16:creationId xmlns:a16="http://schemas.microsoft.com/office/drawing/2014/main" id="{C7CB88E5-E5AB-4A1A-B229-7A6A11E75216}"/>
               </a:ext>
             </a:extLst>
           </p:cNvPr>
@@ -3769,7 +3769,7 @@
           <p:cNvPr id="12" name="recap-item-1">
             <a:extLst xmlns:a="http://schemas.openxmlformats.org/drawingml/2006/main">
               <a:ext uri="{FF2B5EF4-FFF2-40B4-BE49-F238E27FC236}">
-                <a16:creationId xmlns:a16="http://schemas.microsoft.com/office/drawing/2014/main" id="{8F76819F-902B-4A1C-8068-60A51FDDC21F}"/>
+                <a16:creationId xmlns:a16="http://schemas.microsoft.com/office/drawing/2014/main" id="{9C0BF78F-0CA2-4ABA-BD4E-50A767F56525}"/>
               </a:ext>
             </a:extLst>
           </p:cNvPr>
@@ -3833,7 +3833,7 @@
           <p:cNvPr id="13" name="recap-connector-1">
             <a:extLst xmlns:a="http://schemas.openxmlformats.org/drawingml/2006/main">
               <a:ext uri="{FF2B5EF4-FFF2-40B4-BE49-F238E27FC236}">
-                <a16:creationId xmlns:a16="http://schemas.microsoft.com/office/drawing/2014/main" id="{8E699F13-D26F-4A98-AC93-F0862F96741C}"/>
+                <a16:creationId xmlns:a16="http://schemas.microsoft.com/office/drawing/2014/main" id="{E80ABFD3-F1F6-4A50-B660-A0D3F25CFDD7}"/>
               </a:ext>
             </a:extLst>
           </p:cNvPr>
@@ -3864,7 +3864,7 @@
           <p:cNvPr id="14" name="recap-circle-2">
             <a:extLst xmlns:a="http://schemas.openxmlformats.org/drawingml/2006/main">
               <a:ext uri="{FF2B5EF4-FFF2-40B4-BE49-F238E27FC236}">
-                <a16:creationId xmlns:a16="http://schemas.microsoft.com/office/drawing/2014/main" id="{4B6B390E-6A2B-4A3B-8975-F074971AB000}"/>
+                <a16:creationId xmlns:a16="http://schemas.microsoft.com/office/drawing/2014/main" id="{B85A434A-A80A-47EA-904F-CF06E607523E}"/>
               </a:ext>
             </a:extLst>
           </p:cNvPr>
@@ -3897,7 +3897,7 @@
           <p:cNvPr id="15" name="recap-number-2">
             <a:extLst xmlns:a="http://schemas.openxmlformats.org/drawingml/2006/main">
               <a:ext uri="{FF2B5EF4-FFF2-40B4-BE49-F238E27FC236}">
-                <a16:creationId xmlns:a16="http://schemas.microsoft.com/office/drawing/2014/main" id="{0DFAEA22-A8EF-439A-8213-8F0C8DA642F5}"/>
+                <a16:creationId xmlns:a16="http://schemas.microsoft.com/office/drawing/2014/main" id="{53AB4F7E-B293-461B-8548-55DF415CD3FB}"/>
               </a:ext>
             </a:extLst>
           </p:cNvPr>
@@ -3955,7 +3955,7 @@
           <p:cNvPr id="16" name="recap-item-2">
             <a:extLst xmlns:a="http://schemas.openxmlformats.org/drawingml/2006/main">
               <a:ext uri="{FF2B5EF4-FFF2-40B4-BE49-F238E27FC236}">
-                <a16:creationId xmlns:a16="http://schemas.microsoft.com/office/drawing/2014/main" id="{B8A14185-5483-426D-BE1F-D598F39F776D}"/>
+                <a16:creationId xmlns:a16="http://schemas.microsoft.com/office/drawing/2014/main" id="{7C83DBDA-04A3-4C70-9290-F93A7EB4DADD}"/>
               </a:ext>
             </a:extLst>
           </p:cNvPr>
@@ -4017,7 +4017,7 @@
     </p:spTree>
     <p:extLst>
       <p:ext uri="{BB962C8B-B14F-4D97-AF65-F5344CB8AC3E}">
-        <p14:creationId xmlns:p14="http://schemas.microsoft.com/office/powerpoint/2010/main" val="1573367246"/>
+        <p14:creationId xmlns:p14="http://schemas.microsoft.com/office/powerpoint/2010/main" val="692615593"/>
       </p:ext>
     </p:extLst>
   </p:cSld>
@@ -4048,7 +4048,7 @@
           <p:cNvPr id="1" name="s12-rule">
             <a:extLst xmlns:a="http://schemas.openxmlformats.org/drawingml/2006/main">
               <a:ext uri="{FF2B5EF4-FFF2-40B4-BE49-F238E27FC236}">
-                <a16:creationId xmlns:a16="http://schemas.microsoft.com/office/drawing/2014/main" id="{11FC09D4-4929-4EAF-BC98-2C6DF914335D}"/>
+                <a16:creationId xmlns:a16="http://schemas.microsoft.com/office/drawing/2014/main" id="{78956141-AA8A-4B27-BD04-95D277702036}"/>
               </a:ext>
             </a:extLst>
           </p:cNvPr>
@@ -4081,7 +4081,7 @@
           <p:cNvPr id="2" name="s12-eyebrow">
             <a:extLst xmlns:a="http://schemas.openxmlformats.org/drawingml/2006/main">
               <a:ext uri="{FF2B5EF4-FFF2-40B4-BE49-F238E27FC236}">
-                <a16:creationId xmlns:a16="http://schemas.microsoft.com/office/drawing/2014/main" id="{6DC1BBB7-F9C1-4708-9DC2-4C6DA5CE1DDF}"/>
+                <a16:creationId xmlns:a16="http://schemas.microsoft.com/office/drawing/2014/main" id="{629A788B-24A3-400E-8F1F-0718BD451ED3}"/>
               </a:ext>
             </a:extLst>
           </p:cNvPr>
@@ -4139,7 +4139,7 @@
           <p:cNvPr id="3" name="s12-title">
             <a:extLst xmlns:a="http://schemas.openxmlformats.org/drawingml/2006/main">
               <a:ext uri="{FF2B5EF4-FFF2-40B4-BE49-F238E27FC236}">
-                <a16:creationId xmlns:a16="http://schemas.microsoft.com/office/drawing/2014/main" id="{14584DF0-DB1D-4475-BE0C-BE1A53F88139}"/>
+                <a16:creationId xmlns:a16="http://schemas.microsoft.com/office/drawing/2014/main" id="{E9369B62-2E37-4F9A-80A7-4CF25B658FF4}"/>
               </a:ext>
             </a:extLst>
           </p:cNvPr>
@@ -4197,7 +4197,7 @@
           <p:cNvPr id="4" name="s12-footer">
             <a:extLst xmlns:a="http://schemas.openxmlformats.org/drawingml/2006/main">
               <a:ext uri="{FF2B5EF4-FFF2-40B4-BE49-F238E27FC236}">
-                <a16:creationId xmlns:a16="http://schemas.microsoft.com/office/drawing/2014/main" id="{7195317E-6A79-4BDE-A6FE-C187E3122271}"/>
+                <a16:creationId xmlns:a16="http://schemas.microsoft.com/office/drawing/2014/main" id="{0B039C21-3570-4DDA-A45C-22150229E267}"/>
               </a:ext>
             </a:extLst>
           </p:cNvPr>
@@ -4228,7 +4228,7 @@
           <p:cNvPr id="5" name="s12-identity">
             <a:extLst xmlns:a="http://schemas.openxmlformats.org/drawingml/2006/main">
               <a:ext uri="{FF2B5EF4-FFF2-40B4-BE49-F238E27FC236}">
-                <a16:creationId xmlns:a16="http://schemas.microsoft.com/office/drawing/2014/main" id="{D76E6FBE-6B78-49E8-95F8-1DDBB294E67C}"/>
+                <a16:creationId xmlns:a16="http://schemas.microsoft.com/office/drawing/2014/main" id="{D36316A7-8E44-4847-BAA8-79179514D095}"/>
               </a:ext>
             </a:extLst>
           </p:cNvPr>
@@ -4286,7 +4286,7 @@
           <p:cNvPr id="6" name="source-0">
             <a:extLst xmlns:a="http://schemas.openxmlformats.org/drawingml/2006/main">
               <a:ext uri="{FF2B5EF4-FFF2-40B4-BE49-F238E27FC236}">
-                <a16:creationId xmlns:a16="http://schemas.microsoft.com/office/drawing/2014/main" id="{4A6F384A-335D-462F-9DC6-D0D11F31BAF8}"/>
+                <a16:creationId xmlns:a16="http://schemas.microsoft.com/office/drawing/2014/main" id="{32DA9306-4F4C-4D66-B42B-B46AD88BB11E}"/>
               </a:ext>
             </a:extLst>
           </p:cNvPr>
@@ -4350,7 +4350,7 @@
           <p:cNvPr id="7" name="source-1">
             <a:extLst xmlns:a="http://schemas.openxmlformats.org/drawingml/2006/main">
               <a:ext uri="{FF2B5EF4-FFF2-40B4-BE49-F238E27FC236}">
-                <a16:creationId xmlns:a16="http://schemas.microsoft.com/office/drawing/2014/main" id="{2DC39AEA-52CB-4C80-8298-1732C3014DB7}"/>
+                <a16:creationId xmlns:a16="http://schemas.microsoft.com/office/drawing/2014/main" id="{7BBE7178-8542-4E14-8043-803B9CEDACBF}"/>
               </a:ext>
             </a:extLst>
           </p:cNvPr>
@@ -4414,7 +4414,7 @@
           <p:cNvPr id="8" name="s12-takeaway-rule">
             <a:extLst xmlns:a="http://schemas.openxmlformats.org/drawingml/2006/main">
               <a:ext uri="{FF2B5EF4-FFF2-40B4-BE49-F238E27FC236}">
-                <a16:creationId xmlns:a16="http://schemas.microsoft.com/office/drawing/2014/main" id="{421FF0D4-C77A-4888-81DC-994ABFE69BAC}"/>
+                <a16:creationId xmlns:a16="http://schemas.microsoft.com/office/drawing/2014/main" id="{A4969A5B-4F0D-4A60-8549-0BCF577E2BEF}"/>
               </a:ext>
             </a:extLst>
           </p:cNvPr>
@@ -4447,7 +4447,7 @@
           <p:cNvPr id="9" name="s12-takeaway">
             <a:extLst xmlns:a="http://schemas.openxmlformats.org/drawingml/2006/main">
               <a:ext uri="{FF2B5EF4-FFF2-40B4-BE49-F238E27FC236}">
-                <a16:creationId xmlns:a16="http://schemas.microsoft.com/office/drawing/2014/main" id="{54941D1D-5714-4FA9-A40B-4D991C1C5993}"/>
+                <a16:creationId xmlns:a16="http://schemas.microsoft.com/office/drawing/2014/main" id="{33FF7711-958D-4498-9B27-FED957A2A9A6}"/>
               </a:ext>
             </a:extLst>
           </p:cNvPr>
@@ -4472,7 +4472,7 @@
         </p:spPr>
         <p:txBody>
           <a:bodyPr xmlns:a="http://schemas.openxmlformats.org/drawingml/2006/main" lIns="0" tIns="0" rIns="0" bIns="0" anchor="ctr">
-            <a:normAutofit fontScale="100000"/>
+            <a:normAutofit fontScale="95911"/>
           </a:bodyPr>
           <a:lstStyle xmlns:a="http://schemas.openxmlformats.org/drawingml/2006/main"/>
           <a:p xmlns:a="http://schemas.openxmlformats.org/drawingml/2006/main">
@@ -4495,7 +4495,7 @@
                 <a:ea typeface="PingFang SC"/>
                 <a:cs typeface="PingFang SC"/>
               </a:rPr>
-              <a:t>公开幻灯片只使用课程原创文字与原生图形；完整论证、链接和事实边界请见本节讲义。</a:t>
+              <a:t>课程精编页用于讲授主线；播放器中的“原课件”模式保留团队 PowerPoint 精选页、真实图片和可播放视频。</a:t>
             </a:r>
           </a:p>
         </p:txBody>
@@ -4503,7 +4503,7 @@
     </p:spTree>
     <p:extLst>
       <p:ext uri="{BB962C8B-B14F-4D97-AF65-F5344CB8AC3E}">
-        <p14:creationId xmlns:p14="http://schemas.microsoft.com/office/powerpoint/2010/main" val="1631676035"/>
+        <p14:creationId xmlns:p14="http://schemas.microsoft.com/office/powerpoint/2010/main" val="791193256"/>
       </p:ext>
     </p:extLst>
   </p:cSld>
@@ -4534,7 +4534,7 @@
           <p:cNvPr id="1" name="s2-rule">
             <a:extLst xmlns:a="http://schemas.openxmlformats.org/drawingml/2006/main">
               <a:ext uri="{FF2B5EF4-FFF2-40B4-BE49-F238E27FC236}">
-                <a16:creationId xmlns:a16="http://schemas.microsoft.com/office/drawing/2014/main" id="{FDAF5269-30F5-447C-9E39-CEF178124E5F}"/>
+                <a16:creationId xmlns:a16="http://schemas.microsoft.com/office/drawing/2014/main" id="{B2000429-477F-4F65-972C-3BFFC5C07BF4}"/>
               </a:ext>
             </a:extLst>
           </p:cNvPr>
@@ -4567,7 +4567,7 @@
           <p:cNvPr id="2" name="s2-eyebrow">
             <a:extLst xmlns:a="http://schemas.openxmlformats.org/drawingml/2006/main">
               <a:ext uri="{FF2B5EF4-FFF2-40B4-BE49-F238E27FC236}">
-                <a16:creationId xmlns:a16="http://schemas.microsoft.com/office/drawing/2014/main" id="{3B385619-0076-41B4-96DF-8B859788D3C2}"/>
+                <a16:creationId xmlns:a16="http://schemas.microsoft.com/office/drawing/2014/main" id="{F2BC38E0-6A0C-41DA-AC4E-51EE65EED87D}"/>
               </a:ext>
             </a:extLst>
           </p:cNvPr>
@@ -4625,7 +4625,7 @@
           <p:cNvPr id="3" name="s2-title">
             <a:extLst xmlns:a="http://schemas.openxmlformats.org/drawingml/2006/main">
               <a:ext uri="{FF2B5EF4-FFF2-40B4-BE49-F238E27FC236}">
-                <a16:creationId xmlns:a16="http://schemas.microsoft.com/office/drawing/2014/main" id="{0087BA1F-8AE3-4461-B7FD-B4CAB90952B3}"/>
+                <a16:creationId xmlns:a16="http://schemas.microsoft.com/office/drawing/2014/main" id="{83FFAC7A-88D5-4A40-A97C-5F6695A8C3BD}"/>
               </a:ext>
             </a:extLst>
           </p:cNvPr>
@@ -4683,7 +4683,7 @@
           <p:cNvPr id="4" name="s2-footer">
             <a:extLst xmlns:a="http://schemas.openxmlformats.org/drawingml/2006/main">
               <a:ext uri="{FF2B5EF4-FFF2-40B4-BE49-F238E27FC236}">
-                <a16:creationId xmlns:a16="http://schemas.microsoft.com/office/drawing/2014/main" id="{940AB40C-95A8-4738-BD06-97253F7AC2D9}"/>
+                <a16:creationId xmlns:a16="http://schemas.microsoft.com/office/drawing/2014/main" id="{90D85EA1-EABB-401D-A0BD-97F1AE2C68EC}"/>
               </a:ext>
             </a:extLst>
           </p:cNvPr>
@@ -4714,7 +4714,7 @@
           <p:cNvPr id="5" name="s2-identity">
             <a:extLst xmlns:a="http://schemas.openxmlformats.org/drawingml/2006/main">
               <a:ext uri="{FF2B5EF4-FFF2-40B4-BE49-F238E27FC236}">
-                <a16:creationId xmlns:a16="http://schemas.microsoft.com/office/drawing/2014/main" id="{10F5EF15-7A44-40BD-8B17-A5D0AA5E5E52}"/>
+                <a16:creationId xmlns:a16="http://schemas.microsoft.com/office/drawing/2014/main" id="{8D58705E-9C86-4FEC-89DE-BDE13BA616C7}"/>
               </a:ext>
             </a:extLst>
           </p:cNvPr>
@@ -4772,7 +4772,7 @@
           <p:cNvPr id="6" name="objective-1">
             <a:extLst xmlns:a="http://schemas.openxmlformats.org/drawingml/2006/main">
               <a:ext uri="{FF2B5EF4-FFF2-40B4-BE49-F238E27FC236}">
-                <a16:creationId xmlns:a16="http://schemas.microsoft.com/office/drawing/2014/main" id="{275822DD-ACD3-4C6B-A5E2-B19C1EBACBD7}"/>
+                <a16:creationId xmlns:a16="http://schemas.microsoft.com/office/drawing/2014/main" id="{19C9FC5C-9ABF-45CE-986A-E730CCAF1E38}"/>
               </a:ext>
             </a:extLst>
           </p:cNvPr>
@@ -4859,7 +4859,7 @@
           <p:cNvPr id="7" name="objective-2">
             <a:extLst xmlns:a="http://schemas.openxmlformats.org/drawingml/2006/main">
               <a:ext uri="{FF2B5EF4-FFF2-40B4-BE49-F238E27FC236}">
-                <a16:creationId xmlns:a16="http://schemas.microsoft.com/office/drawing/2014/main" id="{72C5565E-B451-483D-9BD6-50BD1A2A74F2}"/>
+                <a16:creationId xmlns:a16="http://schemas.microsoft.com/office/drawing/2014/main" id="{A1C224F2-B4E9-4650-AC36-8487618D6C21}"/>
               </a:ext>
             </a:extLst>
           </p:cNvPr>
@@ -4946,7 +4946,7 @@
           <p:cNvPr id="8" name="objective-3">
             <a:extLst xmlns:a="http://schemas.openxmlformats.org/drawingml/2006/main">
               <a:ext uri="{FF2B5EF4-FFF2-40B4-BE49-F238E27FC236}">
-                <a16:creationId xmlns:a16="http://schemas.microsoft.com/office/drawing/2014/main" id="{ABCC703A-B44B-4FD9-9702-A9A22E79A853}"/>
+                <a16:creationId xmlns:a16="http://schemas.microsoft.com/office/drawing/2014/main" id="{49CFFB52-A9B6-42FF-BD65-D0CFDBE8C798}"/>
               </a:ext>
             </a:extLst>
           </p:cNvPr>
@@ -5033,7 +5033,7 @@
           <p:cNvPr id="9" name="objective-4">
             <a:extLst xmlns:a="http://schemas.openxmlformats.org/drawingml/2006/main">
               <a:ext uri="{FF2B5EF4-FFF2-40B4-BE49-F238E27FC236}">
-                <a16:creationId xmlns:a16="http://schemas.microsoft.com/office/drawing/2014/main" id="{2FF8DBAE-496F-489A-A7C5-DF9B08AC0A9A}"/>
+                <a16:creationId xmlns:a16="http://schemas.microsoft.com/office/drawing/2014/main" id="{F245611F-13AD-4655-AC47-69B9A02F6675}"/>
               </a:ext>
             </a:extLst>
           </p:cNvPr>
@@ -5118,7 +5118,7 @@
     </p:spTree>
     <p:extLst>
       <p:ext uri="{BB962C8B-B14F-4D97-AF65-F5344CB8AC3E}">
-        <p14:creationId xmlns:p14="http://schemas.microsoft.com/office/powerpoint/2010/main" val="1197043710"/>
+        <p14:creationId xmlns:p14="http://schemas.microsoft.com/office/powerpoint/2010/main" val="1483150176"/>
       </p:ext>
     </p:extLst>
   </p:cSld>
@@ -5149,7 +5149,7 @@
           <p:cNvPr id="1" name="s3-rule">
             <a:extLst xmlns:a="http://schemas.openxmlformats.org/drawingml/2006/main">
               <a:ext uri="{FF2B5EF4-FFF2-40B4-BE49-F238E27FC236}">
-                <a16:creationId xmlns:a16="http://schemas.microsoft.com/office/drawing/2014/main" id="{216C824B-8A99-463C-9830-EB054C439F52}"/>
+                <a16:creationId xmlns:a16="http://schemas.microsoft.com/office/drawing/2014/main" id="{994111AF-6308-4A6B-8BFB-0E704B84C180}"/>
               </a:ext>
             </a:extLst>
           </p:cNvPr>
@@ -5182,7 +5182,7 @@
           <p:cNvPr id="2" name="s3-eyebrow">
             <a:extLst xmlns:a="http://schemas.openxmlformats.org/drawingml/2006/main">
               <a:ext uri="{FF2B5EF4-FFF2-40B4-BE49-F238E27FC236}">
-                <a16:creationId xmlns:a16="http://schemas.microsoft.com/office/drawing/2014/main" id="{80B6CF28-FE55-45A9-9C8B-76B31E6CF101}"/>
+                <a16:creationId xmlns:a16="http://schemas.microsoft.com/office/drawing/2014/main" id="{6B37CBBC-1243-4F8C-9340-BD4F15332F3F}"/>
               </a:ext>
             </a:extLst>
           </p:cNvPr>
@@ -5240,7 +5240,7 @@
           <p:cNvPr id="3" name="s3-title">
             <a:extLst xmlns:a="http://schemas.openxmlformats.org/drawingml/2006/main">
               <a:ext uri="{FF2B5EF4-FFF2-40B4-BE49-F238E27FC236}">
-                <a16:creationId xmlns:a16="http://schemas.microsoft.com/office/drawing/2014/main" id="{7A5728A0-1BC5-4699-AD4C-2432B804F4EC}"/>
+                <a16:creationId xmlns:a16="http://schemas.microsoft.com/office/drawing/2014/main" id="{8B940A94-8C1B-4BF6-83D3-4A2224F73444}"/>
               </a:ext>
             </a:extLst>
           </p:cNvPr>
@@ -5298,7 +5298,7 @@
           <p:cNvPr id="4" name="s3-footer">
             <a:extLst xmlns:a="http://schemas.openxmlformats.org/drawingml/2006/main">
               <a:ext uri="{FF2B5EF4-FFF2-40B4-BE49-F238E27FC236}">
-                <a16:creationId xmlns:a16="http://schemas.microsoft.com/office/drawing/2014/main" id="{1F151CBE-7D4A-4C4F-B8A7-75F4DFDACE66}"/>
+                <a16:creationId xmlns:a16="http://schemas.microsoft.com/office/drawing/2014/main" id="{E71CF035-EE62-48FF-A71D-613B536190EB}"/>
               </a:ext>
             </a:extLst>
           </p:cNvPr>
@@ -5329,7 +5329,7 @@
           <p:cNvPr id="5" name="s3-identity">
             <a:extLst xmlns:a="http://schemas.openxmlformats.org/drawingml/2006/main">
               <a:ext uri="{FF2B5EF4-FFF2-40B4-BE49-F238E27FC236}">
-                <a16:creationId xmlns:a16="http://schemas.microsoft.com/office/drawing/2014/main" id="{C30249C9-4D96-4986-87C7-C978F7692B39}"/>
+                <a16:creationId xmlns:a16="http://schemas.microsoft.com/office/drawing/2014/main" id="{719F7C72-179C-4771-BEC5-E8DABEB97A13}"/>
               </a:ext>
             </a:extLst>
           </p:cNvPr>
@@ -5387,7 +5387,7 @@
           <p:cNvPr id="6" name="core-no-0">
             <a:extLst xmlns:a="http://schemas.openxmlformats.org/drawingml/2006/main">
               <a:ext uri="{FF2B5EF4-FFF2-40B4-BE49-F238E27FC236}">
-                <a16:creationId xmlns:a16="http://schemas.microsoft.com/office/drawing/2014/main" id="{D702D238-EF77-42A8-B680-1BF514415752}"/>
+                <a16:creationId xmlns:a16="http://schemas.microsoft.com/office/drawing/2014/main" id="{23ED9652-5C8B-471A-9258-7CFAA803BEF9}"/>
               </a:ext>
             </a:extLst>
           </p:cNvPr>
@@ -5445,7 +5445,7 @@
           <p:cNvPr id="7" name="core-label-0">
             <a:extLst xmlns:a="http://schemas.openxmlformats.org/drawingml/2006/main">
               <a:ext uri="{FF2B5EF4-FFF2-40B4-BE49-F238E27FC236}">
-                <a16:creationId xmlns:a16="http://schemas.microsoft.com/office/drawing/2014/main" id="{B143BD16-9433-4190-A186-C0809513A61B}"/>
+                <a16:creationId xmlns:a16="http://schemas.microsoft.com/office/drawing/2014/main" id="{97F89E33-EB78-43CC-8E94-925153F0418B}"/>
               </a:ext>
             </a:extLst>
           </p:cNvPr>
@@ -5503,7 +5503,7 @@
           <p:cNvPr id="8" name="core-body-0">
             <a:extLst xmlns:a="http://schemas.openxmlformats.org/drawingml/2006/main">
               <a:ext uri="{FF2B5EF4-FFF2-40B4-BE49-F238E27FC236}">
-                <a16:creationId xmlns:a16="http://schemas.microsoft.com/office/drawing/2014/main" id="{2DCEE029-9767-4921-9FF3-9947749E0CCB}"/>
+                <a16:creationId xmlns:a16="http://schemas.microsoft.com/office/drawing/2014/main" id="{5384EABF-003B-4832-AF09-041B3D892DD7}"/>
               </a:ext>
             </a:extLst>
           </p:cNvPr>
@@ -5567,7 +5567,7 @@
           <p:cNvPr id="9" name="core-no-1">
             <a:extLst xmlns:a="http://schemas.openxmlformats.org/drawingml/2006/main">
               <a:ext uri="{FF2B5EF4-FFF2-40B4-BE49-F238E27FC236}">
-                <a16:creationId xmlns:a16="http://schemas.microsoft.com/office/drawing/2014/main" id="{77E38045-888B-4EF3-A298-CA4E3706EB0C}"/>
+                <a16:creationId xmlns:a16="http://schemas.microsoft.com/office/drawing/2014/main" id="{5E1D055C-72CC-4854-8ECA-973F549A1197}"/>
               </a:ext>
             </a:extLst>
           </p:cNvPr>
@@ -5625,7 +5625,7 @@
           <p:cNvPr id="10" name="core-body-1">
             <a:extLst xmlns:a="http://schemas.openxmlformats.org/drawingml/2006/main">
               <a:ext uri="{FF2B5EF4-FFF2-40B4-BE49-F238E27FC236}">
-                <a16:creationId xmlns:a16="http://schemas.microsoft.com/office/drawing/2014/main" id="{0F0A8256-D76B-498F-AE6C-7A1879E3EE63}"/>
+                <a16:creationId xmlns:a16="http://schemas.microsoft.com/office/drawing/2014/main" id="{F3BD6C6A-A38F-4AA9-B09F-30FA2CAED67C}"/>
               </a:ext>
             </a:extLst>
           </p:cNvPr>
@@ -5689,7 +5689,7 @@
           <p:cNvPr id="11" name="s3-takeaway-rule">
             <a:extLst xmlns:a="http://schemas.openxmlformats.org/drawingml/2006/main">
               <a:ext uri="{FF2B5EF4-FFF2-40B4-BE49-F238E27FC236}">
-                <a16:creationId xmlns:a16="http://schemas.microsoft.com/office/drawing/2014/main" id="{C69C5BF8-9520-4FE9-AE7C-587B6D05FE78}"/>
+                <a16:creationId xmlns:a16="http://schemas.microsoft.com/office/drawing/2014/main" id="{476374BD-8AA7-4AE7-B0E8-DA07189EA8AB}"/>
               </a:ext>
             </a:extLst>
           </p:cNvPr>
@@ -5722,7 +5722,7 @@
           <p:cNvPr id="12" name="s3-takeaway">
             <a:extLst xmlns:a="http://schemas.openxmlformats.org/drawingml/2006/main">
               <a:ext uri="{FF2B5EF4-FFF2-40B4-BE49-F238E27FC236}">
-                <a16:creationId xmlns:a16="http://schemas.microsoft.com/office/drawing/2014/main" id="{85D83F1F-A78A-4A70-9C82-8A0F8C1B1F97}"/>
+                <a16:creationId xmlns:a16="http://schemas.microsoft.com/office/drawing/2014/main" id="{E113AEB4-5DBF-472F-9F13-C9DAD56B4EBF}"/>
               </a:ext>
             </a:extLst>
           </p:cNvPr>
@@ -5778,7 +5778,7 @@
     </p:spTree>
     <p:extLst>
       <p:ext uri="{BB962C8B-B14F-4D97-AF65-F5344CB8AC3E}">
-        <p14:creationId xmlns:p14="http://schemas.microsoft.com/office/powerpoint/2010/main" val="277541609"/>
+        <p14:creationId xmlns:p14="http://schemas.microsoft.com/office/powerpoint/2010/main" val="1894223618"/>
       </p:ext>
     </p:extLst>
   </p:cSld>
@@ -5809,7 +5809,7 @@
           <p:cNvPr id="1" name="s4-rule">
             <a:extLst xmlns:a="http://schemas.openxmlformats.org/drawingml/2006/main">
               <a:ext uri="{FF2B5EF4-FFF2-40B4-BE49-F238E27FC236}">
-                <a16:creationId xmlns:a16="http://schemas.microsoft.com/office/drawing/2014/main" id="{1AA728AF-C5B4-4828-970C-31D1FD78581B}"/>
+                <a16:creationId xmlns:a16="http://schemas.microsoft.com/office/drawing/2014/main" id="{AE157501-1A81-4BED-B23C-A2407F04D8AA}"/>
               </a:ext>
             </a:extLst>
           </p:cNvPr>
@@ -5842,7 +5842,7 @@
           <p:cNvPr id="2" name="s4-eyebrow">
             <a:extLst xmlns:a="http://schemas.openxmlformats.org/drawingml/2006/main">
               <a:ext uri="{FF2B5EF4-FFF2-40B4-BE49-F238E27FC236}">
-                <a16:creationId xmlns:a16="http://schemas.microsoft.com/office/drawing/2014/main" id="{18D897F7-ECC5-4FA5-A4B6-78F56B36312F}"/>
+                <a16:creationId xmlns:a16="http://schemas.microsoft.com/office/drawing/2014/main" id="{3517CFB1-8A6A-4A25-A70D-91E62E4BA2DD}"/>
               </a:ext>
             </a:extLst>
           </p:cNvPr>
@@ -5900,7 +5900,7 @@
           <p:cNvPr id="3" name="s4-title">
             <a:extLst xmlns:a="http://schemas.openxmlformats.org/drawingml/2006/main">
               <a:ext uri="{FF2B5EF4-FFF2-40B4-BE49-F238E27FC236}">
-                <a16:creationId xmlns:a16="http://schemas.microsoft.com/office/drawing/2014/main" id="{F914A2DE-BEB6-4440-AA5B-92D919486234}"/>
+                <a16:creationId xmlns:a16="http://schemas.microsoft.com/office/drawing/2014/main" id="{56DDBFD7-9553-4513-B237-C1B19E9E4345}"/>
               </a:ext>
             </a:extLst>
           </p:cNvPr>
@@ -5958,7 +5958,7 @@
           <p:cNvPr id="4" name="s4-footer">
             <a:extLst xmlns:a="http://schemas.openxmlformats.org/drawingml/2006/main">
               <a:ext uri="{FF2B5EF4-FFF2-40B4-BE49-F238E27FC236}">
-                <a16:creationId xmlns:a16="http://schemas.microsoft.com/office/drawing/2014/main" id="{F1685800-A2AF-4624-BC06-899C705AE929}"/>
+                <a16:creationId xmlns:a16="http://schemas.microsoft.com/office/drawing/2014/main" id="{355A71A8-57D4-445A-A6A4-170B28E47374}"/>
               </a:ext>
             </a:extLst>
           </p:cNvPr>
@@ -5989,7 +5989,7 @@
           <p:cNvPr id="5" name="s4-identity">
             <a:extLst xmlns:a="http://schemas.openxmlformats.org/drawingml/2006/main">
               <a:ext uri="{FF2B5EF4-FFF2-40B4-BE49-F238E27FC236}">
-                <a16:creationId xmlns:a16="http://schemas.microsoft.com/office/drawing/2014/main" id="{FC8160BA-4556-4A5D-9121-9FF1A6AB830C}"/>
+                <a16:creationId xmlns:a16="http://schemas.microsoft.com/office/drawing/2014/main" id="{5F6A43FC-5994-41FB-A364-20C93F6EC637}"/>
               </a:ext>
             </a:extLst>
           </p:cNvPr>
@@ -6047,7 +6047,7 @@
           <p:cNvPr id="6" name="core-no-0">
             <a:extLst xmlns:a="http://schemas.openxmlformats.org/drawingml/2006/main">
               <a:ext uri="{FF2B5EF4-FFF2-40B4-BE49-F238E27FC236}">
-                <a16:creationId xmlns:a16="http://schemas.microsoft.com/office/drawing/2014/main" id="{9BEBBAE5-3CC4-431B-A40A-82EE98C64B74}"/>
+                <a16:creationId xmlns:a16="http://schemas.microsoft.com/office/drawing/2014/main" id="{6F3FD59A-E227-4C2B-A3F6-65EB29AF56D7}"/>
               </a:ext>
             </a:extLst>
           </p:cNvPr>
@@ -6105,7 +6105,7 @@
           <p:cNvPr id="7" name="core-label-0">
             <a:extLst xmlns:a="http://schemas.openxmlformats.org/drawingml/2006/main">
               <a:ext uri="{FF2B5EF4-FFF2-40B4-BE49-F238E27FC236}">
-                <a16:creationId xmlns:a16="http://schemas.microsoft.com/office/drawing/2014/main" id="{6E285935-D65D-4E94-B87F-BD52CBE7FF30}"/>
+                <a16:creationId xmlns:a16="http://schemas.microsoft.com/office/drawing/2014/main" id="{FAF8A975-E567-4745-8244-0A28F99354A0}"/>
               </a:ext>
             </a:extLst>
           </p:cNvPr>
@@ -6163,7 +6163,7 @@
           <p:cNvPr id="8" name="core-body-0">
             <a:extLst xmlns:a="http://schemas.openxmlformats.org/drawingml/2006/main">
               <a:ext uri="{FF2B5EF4-FFF2-40B4-BE49-F238E27FC236}">
-                <a16:creationId xmlns:a16="http://schemas.microsoft.com/office/drawing/2014/main" id="{B702004A-CBAB-4D09-B39B-AF825567F59C}"/>
+                <a16:creationId xmlns:a16="http://schemas.microsoft.com/office/drawing/2014/main" id="{BCA7202D-3980-4A00-BEE5-6096C22EE6E2}"/>
               </a:ext>
             </a:extLst>
           </p:cNvPr>
@@ -6227,7 +6227,7 @@
           <p:cNvPr id="9" name="core-no-1">
             <a:extLst xmlns:a="http://schemas.openxmlformats.org/drawingml/2006/main">
               <a:ext uri="{FF2B5EF4-FFF2-40B4-BE49-F238E27FC236}">
-                <a16:creationId xmlns:a16="http://schemas.microsoft.com/office/drawing/2014/main" id="{98EDD144-9DDB-4E7C-82A5-D81B18E9EF41}"/>
+                <a16:creationId xmlns:a16="http://schemas.microsoft.com/office/drawing/2014/main" id="{3320B41E-2D27-45F6-8A57-8C45495DFEEB}"/>
               </a:ext>
             </a:extLst>
           </p:cNvPr>
@@ -6285,7 +6285,7 @@
           <p:cNvPr id="10" name="core-body-1">
             <a:extLst xmlns:a="http://schemas.openxmlformats.org/drawingml/2006/main">
               <a:ext uri="{FF2B5EF4-FFF2-40B4-BE49-F238E27FC236}">
-                <a16:creationId xmlns:a16="http://schemas.microsoft.com/office/drawing/2014/main" id="{961B2986-E187-4250-8D14-D77010D9DB55}"/>
+                <a16:creationId xmlns:a16="http://schemas.microsoft.com/office/drawing/2014/main" id="{12C98C74-D438-4A86-A9D1-6D53499B7B50}"/>
               </a:ext>
             </a:extLst>
           </p:cNvPr>
@@ -6349,7 +6349,7 @@
           <p:cNvPr id="11" name="s4-takeaway-rule">
             <a:extLst xmlns:a="http://schemas.openxmlformats.org/drawingml/2006/main">
               <a:ext uri="{FF2B5EF4-FFF2-40B4-BE49-F238E27FC236}">
-                <a16:creationId xmlns:a16="http://schemas.microsoft.com/office/drawing/2014/main" id="{5B37B5D8-04F1-4797-B125-60E7643A60D9}"/>
+                <a16:creationId xmlns:a16="http://schemas.microsoft.com/office/drawing/2014/main" id="{4F0F63F1-05FB-4504-995B-82605F8F67C5}"/>
               </a:ext>
             </a:extLst>
           </p:cNvPr>
@@ -6382,7 +6382,7 @@
           <p:cNvPr id="12" name="s4-takeaway">
             <a:extLst xmlns:a="http://schemas.openxmlformats.org/drawingml/2006/main">
               <a:ext uri="{FF2B5EF4-FFF2-40B4-BE49-F238E27FC236}">
-                <a16:creationId xmlns:a16="http://schemas.microsoft.com/office/drawing/2014/main" id="{9BAE82A6-EFF4-48C0-900B-A6E7A6F152CC}"/>
+                <a16:creationId xmlns:a16="http://schemas.microsoft.com/office/drawing/2014/main" id="{85AF3C49-3652-40C2-962D-7F15B2F38419}"/>
               </a:ext>
             </a:extLst>
           </p:cNvPr>
@@ -6438,7 +6438,7 @@
     </p:spTree>
     <p:extLst>
       <p:ext uri="{BB962C8B-B14F-4D97-AF65-F5344CB8AC3E}">
-        <p14:creationId xmlns:p14="http://schemas.microsoft.com/office/powerpoint/2010/main" val="644333383"/>
+        <p14:creationId xmlns:p14="http://schemas.microsoft.com/office/powerpoint/2010/main" val="1852927058"/>
       </p:ext>
     </p:extLst>
   </p:cSld>
@@ -6469,7 +6469,7 @@
           <p:cNvPr id="1" name="s5-rule">
             <a:extLst xmlns:a="http://schemas.openxmlformats.org/drawingml/2006/main">
               <a:ext uri="{FF2B5EF4-FFF2-40B4-BE49-F238E27FC236}">
-                <a16:creationId xmlns:a16="http://schemas.microsoft.com/office/drawing/2014/main" id="{E56585E1-97DD-47D7-BCA1-0749F2179C18}"/>
+                <a16:creationId xmlns:a16="http://schemas.microsoft.com/office/drawing/2014/main" id="{236EE527-13CE-4F3A-8FAA-DC2EB07B9B6A}"/>
               </a:ext>
             </a:extLst>
           </p:cNvPr>
@@ -6502,7 +6502,7 @@
           <p:cNvPr id="2" name="s5-eyebrow">
             <a:extLst xmlns:a="http://schemas.openxmlformats.org/drawingml/2006/main">
               <a:ext uri="{FF2B5EF4-FFF2-40B4-BE49-F238E27FC236}">
-                <a16:creationId xmlns:a16="http://schemas.microsoft.com/office/drawing/2014/main" id="{44188879-9364-42C7-A628-36B336C5DE34}"/>
+                <a16:creationId xmlns:a16="http://schemas.microsoft.com/office/drawing/2014/main" id="{FB07DCCD-ACD8-4708-ACF2-463E7C14ADB7}"/>
               </a:ext>
             </a:extLst>
           </p:cNvPr>
@@ -6560,7 +6560,7 @@
           <p:cNvPr id="3" name="s5-title">
             <a:extLst xmlns:a="http://schemas.openxmlformats.org/drawingml/2006/main">
               <a:ext uri="{FF2B5EF4-FFF2-40B4-BE49-F238E27FC236}">
-                <a16:creationId xmlns:a16="http://schemas.microsoft.com/office/drawing/2014/main" id="{C81B8B2C-5B6F-4A2A-9297-7FE9B6621C49}"/>
+                <a16:creationId xmlns:a16="http://schemas.microsoft.com/office/drawing/2014/main" id="{E4C6FDE6-8A31-4640-B6FD-398AA7B67083}"/>
               </a:ext>
             </a:extLst>
           </p:cNvPr>
@@ -6618,7 +6618,7 @@
           <p:cNvPr id="4" name="s5-footer">
             <a:extLst xmlns:a="http://schemas.openxmlformats.org/drawingml/2006/main">
               <a:ext uri="{FF2B5EF4-FFF2-40B4-BE49-F238E27FC236}">
-                <a16:creationId xmlns:a16="http://schemas.microsoft.com/office/drawing/2014/main" id="{CB157B66-E218-4A71-9CFD-C4A9491513D7}"/>
+                <a16:creationId xmlns:a16="http://schemas.microsoft.com/office/drawing/2014/main" id="{A5D22A03-45C2-4BBB-B945-094DE18373A5}"/>
               </a:ext>
             </a:extLst>
           </p:cNvPr>
@@ -6649,7 +6649,7 @@
           <p:cNvPr id="5" name="s5-identity">
             <a:extLst xmlns:a="http://schemas.openxmlformats.org/drawingml/2006/main">
               <a:ext uri="{FF2B5EF4-FFF2-40B4-BE49-F238E27FC236}">
-                <a16:creationId xmlns:a16="http://schemas.microsoft.com/office/drawing/2014/main" id="{D0FB59CF-F671-40BD-B639-CF5165942AC2}"/>
+                <a16:creationId xmlns:a16="http://schemas.microsoft.com/office/drawing/2014/main" id="{73E8DB91-FAC4-4A91-90D8-FA0A118FB6E6}"/>
               </a:ext>
             </a:extLst>
           </p:cNvPr>
@@ -6707,7 +6707,7 @@
           <p:cNvPr id="6" name="core-no-0">
             <a:extLst xmlns:a="http://schemas.openxmlformats.org/drawingml/2006/main">
               <a:ext uri="{FF2B5EF4-FFF2-40B4-BE49-F238E27FC236}">
-                <a16:creationId xmlns:a16="http://schemas.microsoft.com/office/drawing/2014/main" id="{3FB0DE94-E7AE-40A4-A440-102D986C1069}"/>
+                <a16:creationId xmlns:a16="http://schemas.microsoft.com/office/drawing/2014/main" id="{269CA39C-9696-4614-878D-F0A87CFA873F}"/>
               </a:ext>
             </a:extLst>
           </p:cNvPr>
@@ -6765,7 +6765,7 @@
           <p:cNvPr id="7" name="core-label-0">
             <a:extLst xmlns:a="http://schemas.openxmlformats.org/drawingml/2006/main">
               <a:ext uri="{FF2B5EF4-FFF2-40B4-BE49-F238E27FC236}">
-                <a16:creationId xmlns:a16="http://schemas.microsoft.com/office/drawing/2014/main" id="{797E681C-8419-4D73-9935-0A8E54BD06D2}"/>
+                <a16:creationId xmlns:a16="http://schemas.microsoft.com/office/drawing/2014/main" id="{AC8F27AE-7624-443D-A87F-E33B5C77DF02}"/>
               </a:ext>
             </a:extLst>
           </p:cNvPr>
@@ -6823,7 +6823,7 @@
           <p:cNvPr id="8" name="core-body-0">
             <a:extLst xmlns:a="http://schemas.openxmlformats.org/drawingml/2006/main">
               <a:ext uri="{FF2B5EF4-FFF2-40B4-BE49-F238E27FC236}">
-                <a16:creationId xmlns:a16="http://schemas.microsoft.com/office/drawing/2014/main" id="{AE5A690E-014A-4AE6-B908-71D0ABA32CD3}"/>
+                <a16:creationId xmlns:a16="http://schemas.microsoft.com/office/drawing/2014/main" id="{13571F5B-94CD-41F2-9738-B527312243A4}"/>
               </a:ext>
             </a:extLst>
           </p:cNvPr>
@@ -6887,7 +6887,7 @@
           <p:cNvPr id="9" name="core-no-1">
             <a:extLst xmlns:a="http://schemas.openxmlformats.org/drawingml/2006/main">
               <a:ext uri="{FF2B5EF4-FFF2-40B4-BE49-F238E27FC236}">
-                <a16:creationId xmlns:a16="http://schemas.microsoft.com/office/drawing/2014/main" id="{F466FD7E-8C6E-4E1A-A1FB-0FB6C8568107}"/>
+                <a16:creationId xmlns:a16="http://schemas.microsoft.com/office/drawing/2014/main" id="{5B26CDC4-AAF0-463A-B0C6-06ACCB0F1489}"/>
               </a:ext>
             </a:extLst>
           </p:cNvPr>
@@ -6945,7 +6945,7 @@
           <p:cNvPr id="10" name="core-body-1">
             <a:extLst xmlns:a="http://schemas.openxmlformats.org/drawingml/2006/main">
               <a:ext uri="{FF2B5EF4-FFF2-40B4-BE49-F238E27FC236}">
-                <a16:creationId xmlns:a16="http://schemas.microsoft.com/office/drawing/2014/main" id="{62831648-B97D-4DA2-8812-4ED153F8FE86}"/>
+                <a16:creationId xmlns:a16="http://schemas.microsoft.com/office/drawing/2014/main" id="{7D2A49B3-BAA6-4E2A-A5E6-479FD68F4E7F}"/>
               </a:ext>
             </a:extLst>
           </p:cNvPr>
@@ -7009,7 +7009,7 @@
           <p:cNvPr id="11" name="core-no-2">
             <a:extLst xmlns:a="http://schemas.openxmlformats.org/drawingml/2006/main">
               <a:ext uri="{FF2B5EF4-FFF2-40B4-BE49-F238E27FC236}">
-                <a16:creationId xmlns:a16="http://schemas.microsoft.com/office/drawing/2014/main" id="{80BF173D-83E5-4984-8003-85396132D8B8}"/>
+                <a16:creationId xmlns:a16="http://schemas.microsoft.com/office/drawing/2014/main" id="{5D92C6A5-6BB2-4EBE-A07F-AFB916162182}"/>
               </a:ext>
             </a:extLst>
           </p:cNvPr>
@@ -7067,7 +7067,7 @@
           <p:cNvPr id="12" name="core-body-2">
             <a:extLst xmlns:a="http://schemas.openxmlformats.org/drawingml/2006/main">
               <a:ext uri="{FF2B5EF4-FFF2-40B4-BE49-F238E27FC236}">
-                <a16:creationId xmlns:a16="http://schemas.microsoft.com/office/drawing/2014/main" id="{9545345F-1F9C-4019-9CB1-082BE5B1D976}"/>
+                <a16:creationId xmlns:a16="http://schemas.microsoft.com/office/drawing/2014/main" id="{8F5A0DED-3EF1-4A64-8666-893862198174}"/>
               </a:ext>
             </a:extLst>
           </p:cNvPr>
@@ -7131,7 +7131,7 @@
           <p:cNvPr id="13" name="s5-takeaway-rule">
             <a:extLst xmlns:a="http://schemas.openxmlformats.org/drawingml/2006/main">
               <a:ext uri="{FF2B5EF4-FFF2-40B4-BE49-F238E27FC236}">
-                <a16:creationId xmlns:a16="http://schemas.microsoft.com/office/drawing/2014/main" id="{7BE310A3-E935-4A25-B695-6D62B8CC03A1}"/>
+                <a16:creationId xmlns:a16="http://schemas.microsoft.com/office/drawing/2014/main" id="{D4CCD993-EEC2-49C4-BCD2-DBBD79A234A3}"/>
               </a:ext>
             </a:extLst>
           </p:cNvPr>
@@ -7164,7 +7164,7 @@
           <p:cNvPr id="14" name="s5-takeaway">
             <a:extLst xmlns:a="http://schemas.openxmlformats.org/drawingml/2006/main">
               <a:ext uri="{FF2B5EF4-FFF2-40B4-BE49-F238E27FC236}">
-                <a16:creationId xmlns:a16="http://schemas.microsoft.com/office/drawing/2014/main" id="{2EE0F38E-0205-47DA-8AB4-B5EE00728755}"/>
+                <a16:creationId xmlns:a16="http://schemas.microsoft.com/office/drawing/2014/main" id="{7283ADBF-1D1E-402D-A6E1-3F86D04C8C71}"/>
               </a:ext>
             </a:extLst>
           </p:cNvPr>
@@ -7220,7 +7220,7 @@
     </p:spTree>
     <p:extLst>
       <p:ext uri="{BB962C8B-B14F-4D97-AF65-F5344CB8AC3E}">
-        <p14:creationId xmlns:p14="http://schemas.microsoft.com/office/powerpoint/2010/main" val="1666099798"/>
+        <p14:creationId xmlns:p14="http://schemas.microsoft.com/office/powerpoint/2010/main" val="1076684930"/>
       </p:ext>
     </p:extLst>
   </p:cSld>
@@ -7251,7 +7251,7 @@
           <p:cNvPr id="1" name="s6-rule">
             <a:extLst xmlns:a="http://schemas.openxmlformats.org/drawingml/2006/main">
               <a:ext uri="{FF2B5EF4-FFF2-40B4-BE49-F238E27FC236}">
-                <a16:creationId xmlns:a16="http://schemas.microsoft.com/office/drawing/2014/main" id="{C4B8EDD7-7F42-4170-9248-CF64F545109B}"/>
+                <a16:creationId xmlns:a16="http://schemas.microsoft.com/office/drawing/2014/main" id="{65388650-E4BE-42B6-8344-E1FD0918CBED}"/>
               </a:ext>
             </a:extLst>
           </p:cNvPr>
@@ -7284,7 +7284,7 @@
           <p:cNvPr id="2" name="s6-eyebrow">
             <a:extLst xmlns:a="http://schemas.openxmlformats.org/drawingml/2006/main">
               <a:ext uri="{FF2B5EF4-FFF2-40B4-BE49-F238E27FC236}">
-                <a16:creationId xmlns:a16="http://schemas.microsoft.com/office/drawing/2014/main" id="{BCF6993C-BE1D-4997-9BE4-16014129ACBF}"/>
+                <a16:creationId xmlns:a16="http://schemas.microsoft.com/office/drawing/2014/main" id="{E2E05B43-2F25-4AEA-8643-57F55BF47573}"/>
               </a:ext>
             </a:extLst>
           </p:cNvPr>
@@ -7342,7 +7342,7 @@
           <p:cNvPr id="3" name="s6-title">
             <a:extLst xmlns:a="http://schemas.openxmlformats.org/drawingml/2006/main">
               <a:ext uri="{FF2B5EF4-FFF2-40B4-BE49-F238E27FC236}">
-                <a16:creationId xmlns:a16="http://schemas.microsoft.com/office/drawing/2014/main" id="{4105850B-DB5F-4988-97BF-BE0C52A3FB8C}"/>
+                <a16:creationId xmlns:a16="http://schemas.microsoft.com/office/drawing/2014/main" id="{16F3D326-3D6B-4758-90B8-A4080E4F8B10}"/>
               </a:ext>
             </a:extLst>
           </p:cNvPr>
@@ -7400,7 +7400,7 @@
           <p:cNvPr id="4" name="s6-footer">
             <a:extLst xmlns:a="http://schemas.openxmlformats.org/drawingml/2006/main">
               <a:ext uri="{FF2B5EF4-FFF2-40B4-BE49-F238E27FC236}">
-                <a16:creationId xmlns:a16="http://schemas.microsoft.com/office/drawing/2014/main" id="{8B1409ED-5341-439A-88AD-0CCA464697FD}"/>
+                <a16:creationId xmlns:a16="http://schemas.microsoft.com/office/drawing/2014/main" id="{E9D45DC3-3793-43D6-B357-BE8846C3A379}"/>
               </a:ext>
             </a:extLst>
           </p:cNvPr>
@@ -7431,7 +7431,7 @@
           <p:cNvPr id="5" name="s6-identity">
             <a:extLst xmlns:a="http://schemas.openxmlformats.org/drawingml/2006/main">
               <a:ext uri="{FF2B5EF4-FFF2-40B4-BE49-F238E27FC236}">
-                <a16:creationId xmlns:a16="http://schemas.microsoft.com/office/drawing/2014/main" id="{F1778D59-5E7A-4153-9940-8147A32B4137}"/>
+                <a16:creationId xmlns:a16="http://schemas.microsoft.com/office/drawing/2014/main" id="{834304A2-17D2-4523-BF06-F4A669128574}"/>
               </a:ext>
             </a:extLst>
           </p:cNvPr>
@@ -7489,7 +7489,7 @@
           <p:cNvPr id="6" name="core-no-0">
             <a:extLst xmlns:a="http://schemas.openxmlformats.org/drawingml/2006/main">
               <a:ext uri="{FF2B5EF4-FFF2-40B4-BE49-F238E27FC236}">
-                <a16:creationId xmlns:a16="http://schemas.microsoft.com/office/drawing/2014/main" id="{6063486A-F88D-4462-9A0C-6F922BDAF2E0}"/>
+                <a16:creationId xmlns:a16="http://schemas.microsoft.com/office/drawing/2014/main" id="{722CDB3A-ADEA-421C-9A55-1383FDC1EAD1}"/>
               </a:ext>
             </a:extLst>
           </p:cNvPr>
@@ -7547,7 +7547,7 @@
           <p:cNvPr id="7" name="core-label-0">
             <a:extLst xmlns:a="http://schemas.openxmlformats.org/drawingml/2006/main">
               <a:ext uri="{FF2B5EF4-FFF2-40B4-BE49-F238E27FC236}">
-                <a16:creationId xmlns:a16="http://schemas.microsoft.com/office/drawing/2014/main" id="{58830A81-1344-485F-AD0F-E0F4A629E8F4}"/>
+                <a16:creationId xmlns:a16="http://schemas.microsoft.com/office/drawing/2014/main" id="{FFF5C36D-C547-47CE-AF45-403259D2EEA7}"/>
               </a:ext>
             </a:extLst>
           </p:cNvPr>
@@ -7605,7 +7605,7 @@
           <p:cNvPr id="8" name="core-body-0">
             <a:extLst xmlns:a="http://schemas.openxmlformats.org/drawingml/2006/main">
               <a:ext uri="{FF2B5EF4-FFF2-40B4-BE49-F238E27FC236}">
-                <a16:creationId xmlns:a16="http://schemas.microsoft.com/office/drawing/2014/main" id="{932FB828-A827-4E16-9651-3B7382015B01}"/>
+                <a16:creationId xmlns:a16="http://schemas.microsoft.com/office/drawing/2014/main" id="{0CF55F0A-88AD-4075-ADC5-49792659B470}"/>
               </a:ext>
             </a:extLst>
           </p:cNvPr>
@@ -7669,7 +7669,7 @@
           <p:cNvPr id="9" name="core-no-1">
             <a:extLst xmlns:a="http://schemas.openxmlformats.org/drawingml/2006/main">
               <a:ext uri="{FF2B5EF4-FFF2-40B4-BE49-F238E27FC236}">
-                <a16:creationId xmlns:a16="http://schemas.microsoft.com/office/drawing/2014/main" id="{EEBAB64B-BD37-4A43-BF81-3EB9B061BE98}"/>
+                <a16:creationId xmlns:a16="http://schemas.microsoft.com/office/drawing/2014/main" id="{0762B328-24DB-40C7-BED2-541E405CD177}"/>
               </a:ext>
             </a:extLst>
           </p:cNvPr>
@@ -7727,7 +7727,7 @@
           <p:cNvPr id="10" name="core-body-1">
             <a:extLst xmlns:a="http://schemas.openxmlformats.org/drawingml/2006/main">
               <a:ext uri="{FF2B5EF4-FFF2-40B4-BE49-F238E27FC236}">
-                <a16:creationId xmlns:a16="http://schemas.microsoft.com/office/drawing/2014/main" id="{D6B5CA28-85EA-441B-BD12-7B5E5BD91DFA}"/>
+                <a16:creationId xmlns:a16="http://schemas.microsoft.com/office/drawing/2014/main" id="{03D75B01-D62B-4146-9DC6-59749B1F9243}"/>
               </a:ext>
             </a:extLst>
           </p:cNvPr>
@@ -7791,7 +7791,7 @@
           <p:cNvPr id="11" name="core-no-2">
             <a:extLst xmlns:a="http://schemas.openxmlformats.org/drawingml/2006/main">
               <a:ext uri="{FF2B5EF4-FFF2-40B4-BE49-F238E27FC236}">
-                <a16:creationId xmlns:a16="http://schemas.microsoft.com/office/drawing/2014/main" id="{9952CC66-B801-4CA8-B3F2-97F4F3DB0233}"/>
+                <a16:creationId xmlns:a16="http://schemas.microsoft.com/office/drawing/2014/main" id="{A5988449-63E1-407C-B48A-87738FBF3106}"/>
               </a:ext>
             </a:extLst>
           </p:cNvPr>
@@ -7849,7 +7849,7 @@
           <p:cNvPr id="12" name="core-body-2">
             <a:extLst xmlns:a="http://schemas.openxmlformats.org/drawingml/2006/main">
               <a:ext uri="{FF2B5EF4-FFF2-40B4-BE49-F238E27FC236}">
-                <a16:creationId xmlns:a16="http://schemas.microsoft.com/office/drawing/2014/main" id="{7ACCFC07-19E7-4FFC-9203-FF98D64F686A}"/>
+                <a16:creationId xmlns:a16="http://schemas.microsoft.com/office/drawing/2014/main" id="{A302FC03-478D-4054-8E19-40467D86EA6A}"/>
               </a:ext>
             </a:extLst>
           </p:cNvPr>
@@ -7913,7 +7913,7 @@
           <p:cNvPr id="13" name="s6-takeaway-rule">
             <a:extLst xmlns:a="http://schemas.openxmlformats.org/drawingml/2006/main">
               <a:ext uri="{FF2B5EF4-FFF2-40B4-BE49-F238E27FC236}">
-                <a16:creationId xmlns:a16="http://schemas.microsoft.com/office/drawing/2014/main" id="{3AFD9250-F80A-4B8B-A44E-27AEC1D60865}"/>
+                <a16:creationId xmlns:a16="http://schemas.microsoft.com/office/drawing/2014/main" id="{4CC9BD27-7592-4E03-8382-28F8C156F956}"/>
               </a:ext>
             </a:extLst>
           </p:cNvPr>
@@ -7946,7 +7946,7 @@
           <p:cNvPr id="14" name="s6-takeaway">
             <a:extLst xmlns:a="http://schemas.openxmlformats.org/drawingml/2006/main">
               <a:ext uri="{FF2B5EF4-FFF2-40B4-BE49-F238E27FC236}">
-                <a16:creationId xmlns:a16="http://schemas.microsoft.com/office/drawing/2014/main" id="{8D229CCA-E5EE-48DD-9CF3-1465553D693C}"/>
+                <a16:creationId xmlns:a16="http://schemas.microsoft.com/office/drawing/2014/main" id="{F388C87F-9C79-4E42-A568-F2EDC6DAD6D3}"/>
               </a:ext>
             </a:extLst>
           </p:cNvPr>
@@ -8002,7 +8002,7 @@
     </p:spTree>
     <p:extLst>
       <p:ext uri="{BB962C8B-B14F-4D97-AF65-F5344CB8AC3E}">
-        <p14:creationId xmlns:p14="http://schemas.microsoft.com/office/powerpoint/2010/main" val="1869065252"/>
+        <p14:creationId xmlns:p14="http://schemas.microsoft.com/office/powerpoint/2010/main" val="550041441"/>
       </p:ext>
     </p:extLst>
   </p:cSld>
@@ -8033,7 +8033,7 @@
           <p:cNvPr id="1" name="s7-rule">
             <a:extLst xmlns:a="http://schemas.openxmlformats.org/drawingml/2006/main">
               <a:ext uri="{FF2B5EF4-FFF2-40B4-BE49-F238E27FC236}">
-                <a16:creationId xmlns:a16="http://schemas.microsoft.com/office/drawing/2014/main" id="{279F7CAE-5A78-479C-9B74-DACF6DED4158}"/>
+                <a16:creationId xmlns:a16="http://schemas.microsoft.com/office/drawing/2014/main" id="{7849C532-09A6-4A29-9BB0-928F6677749D}"/>
               </a:ext>
             </a:extLst>
           </p:cNvPr>
@@ -8066,7 +8066,7 @@
           <p:cNvPr id="2" name="s7-eyebrow">
             <a:extLst xmlns:a="http://schemas.openxmlformats.org/drawingml/2006/main">
               <a:ext uri="{FF2B5EF4-FFF2-40B4-BE49-F238E27FC236}">
-                <a16:creationId xmlns:a16="http://schemas.microsoft.com/office/drawing/2014/main" id="{A5338F3D-388E-4BF0-A41A-3F0D0B5DD4A4}"/>
+                <a16:creationId xmlns:a16="http://schemas.microsoft.com/office/drawing/2014/main" id="{96544C0E-DA34-41E4-945A-9C5E5E0E5B03}"/>
               </a:ext>
             </a:extLst>
           </p:cNvPr>
@@ -8124,7 +8124,7 @@
           <p:cNvPr id="3" name="s7-title">
             <a:extLst xmlns:a="http://schemas.openxmlformats.org/drawingml/2006/main">
               <a:ext uri="{FF2B5EF4-FFF2-40B4-BE49-F238E27FC236}">
-                <a16:creationId xmlns:a16="http://schemas.microsoft.com/office/drawing/2014/main" id="{68B9923E-0AE9-43E4-83FA-0A7DFE357B60}"/>
+                <a16:creationId xmlns:a16="http://schemas.microsoft.com/office/drawing/2014/main" id="{40CCF39D-1B7D-4FB9-8A94-421830F207F5}"/>
               </a:ext>
             </a:extLst>
           </p:cNvPr>
@@ -8182,7 +8182,7 @@
           <p:cNvPr id="4" name="s7-footer">
             <a:extLst xmlns:a="http://schemas.openxmlformats.org/drawingml/2006/main">
               <a:ext uri="{FF2B5EF4-FFF2-40B4-BE49-F238E27FC236}">
-                <a16:creationId xmlns:a16="http://schemas.microsoft.com/office/drawing/2014/main" id="{45E94199-F1B9-4B18-A870-D8EAB43CFA0F}"/>
+                <a16:creationId xmlns:a16="http://schemas.microsoft.com/office/drawing/2014/main" id="{E9736EDF-7968-4DE0-9903-AD5CA5307452}"/>
               </a:ext>
             </a:extLst>
           </p:cNvPr>
@@ -8213,7 +8213,7 @@
           <p:cNvPr id="5" name="s7-identity">
             <a:extLst xmlns:a="http://schemas.openxmlformats.org/drawingml/2006/main">
               <a:ext uri="{FF2B5EF4-FFF2-40B4-BE49-F238E27FC236}">
-                <a16:creationId xmlns:a16="http://schemas.microsoft.com/office/drawing/2014/main" id="{80D40431-16AA-4CC2-8C0E-DC47AF0E749F}"/>
+                <a16:creationId xmlns:a16="http://schemas.microsoft.com/office/drawing/2014/main" id="{09610E09-8DDB-4BB0-851B-7232AE70B33A}"/>
               </a:ext>
             </a:extLst>
           </p:cNvPr>
@@ -8271,7 +8271,7 @@
           <p:cNvPr id="6" name="core-no-0">
             <a:extLst xmlns:a="http://schemas.openxmlformats.org/drawingml/2006/main">
               <a:ext uri="{FF2B5EF4-FFF2-40B4-BE49-F238E27FC236}">
-                <a16:creationId xmlns:a16="http://schemas.microsoft.com/office/drawing/2014/main" id="{2A846867-207D-46D7-BF7D-E46F820AAE94}"/>
+                <a16:creationId xmlns:a16="http://schemas.microsoft.com/office/drawing/2014/main" id="{A1D13064-8AD6-4245-81DE-5C6A81D3DC33}"/>
               </a:ext>
             </a:extLst>
           </p:cNvPr>
@@ -8329,7 +8329,7 @@
           <p:cNvPr id="7" name="core-label-0">
             <a:extLst xmlns:a="http://schemas.openxmlformats.org/drawingml/2006/main">
               <a:ext uri="{FF2B5EF4-FFF2-40B4-BE49-F238E27FC236}">
-                <a16:creationId xmlns:a16="http://schemas.microsoft.com/office/drawing/2014/main" id="{B5813240-291C-43E0-8E66-F8D59698C83F}"/>
+                <a16:creationId xmlns:a16="http://schemas.microsoft.com/office/drawing/2014/main" id="{5788B96F-62A3-439C-A511-54D69F978CB9}"/>
               </a:ext>
             </a:extLst>
           </p:cNvPr>
@@ -8387,7 +8387,7 @@
           <p:cNvPr id="8" name="core-body-0">
             <a:extLst xmlns:a="http://schemas.openxmlformats.org/drawingml/2006/main">
               <a:ext uri="{FF2B5EF4-FFF2-40B4-BE49-F238E27FC236}">
-                <a16:creationId xmlns:a16="http://schemas.microsoft.com/office/drawing/2014/main" id="{E5DB356F-25F3-4D73-86EE-5507DFA8B5BE}"/>
+                <a16:creationId xmlns:a16="http://schemas.microsoft.com/office/drawing/2014/main" id="{70F74150-BF2A-49A4-AF64-3D63D1BB9F92}"/>
               </a:ext>
             </a:extLst>
           </p:cNvPr>
@@ -8451,7 +8451,7 @@
           <p:cNvPr id="9" name="core-no-1">
             <a:extLst xmlns:a="http://schemas.openxmlformats.org/drawingml/2006/main">
               <a:ext uri="{FF2B5EF4-FFF2-40B4-BE49-F238E27FC236}">
-                <a16:creationId xmlns:a16="http://schemas.microsoft.com/office/drawing/2014/main" id="{255CD40B-E02F-47C5-9495-AADD1C1F313C}"/>
+                <a16:creationId xmlns:a16="http://schemas.microsoft.com/office/drawing/2014/main" id="{03B15868-659F-42A0-9AC2-C7EC959279E6}"/>
               </a:ext>
             </a:extLst>
           </p:cNvPr>
@@ -8509,7 +8509,7 @@
           <p:cNvPr id="10" name="core-body-1">
             <a:extLst xmlns:a="http://schemas.openxmlformats.org/drawingml/2006/main">
               <a:ext uri="{FF2B5EF4-FFF2-40B4-BE49-F238E27FC236}">
-                <a16:creationId xmlns:a16="http://schemas.microsoft.com/office/drawing/2014/main" id="{CCC46543-FBE6-42F4-B946-6DA51076DC7E}"/>
+                <a16:creationId xmlns:a16="http://schemas.microsoft.com/office/drawing/2014/main" id="{471A5740-C2BD-4418-A91E-20BBEBFD9F11}"/>
               </a:ext>
             </a:extLst>
           </p:cNvPr>
@@ -8573,7 +8573,7 @@
           <p:cNvPr id="11" name="s7-takeaway-rule">
             <a:extLst xmlns:a="http://schemas.openxmlformats.org/drawingml/2006/main">
               <a:ext uri="{FF2B5EF4-FFF2-40B4-BE49-F238E27FC236}">
-                <a16:creationId xmlns:a16="http://schemas.microsoft.com/office/drawing/2014/main" id="{78AD6945-DA71-40BC-A35A-0BE4006BD784}"/>
+                <a16:creationId xmlns:a16="http://schemas.microsoft.com/office/drawing/2014/main" id="{000FEF79-A6B1-48DD-B517-66CFFBD41CF6}"/>
               </a:ext>
             </a:extLst>
           </p:cNvPr>
@@ -8606,7 +8606,7 @@
           <p:cNvPr id="12" name="s7-takeaway">
             <a:extLst xmlns:a="http://schemas.openxmlformats.org/drawingml/2006/main">
               <a:ext uri="{FF2B5EF4-FFF2-40B4-BE49-F238E27FC236}">
-                <a16:creationId xmlns:a16="http://schemas.microsoft.com/office/drawing/2014/main" id="{CD3CCAA0-5BAE-49CB-9F9C-FA3784BAA6DA}"/>
+                <a16:creationId xmlns:a16="http://schemas.microsoft.com/office/drawing/2014/main" id="{DC0C0E0B-532F-40EB-8392-C8183D25729A}"/>
               </a:ext>
             </a:extLst>
           </p:cNvPr>
@@ -8662,7 +8662,7 @@
     </p:spTree>
     <p:extLst>
       <p:ext uri="{BB962C8B-B14F-4D97-AF65-F5344CB8AC3E}">
-        <p14:creationId xmlns:p14="http://schemas.microsoft.com/office/powerpoint/2010/main" val="1654715820"/>
+        <p14:creationId xmlns:p14="http://schemas.microsoft.com/office/powerpoint/2010/main" val="1754529391"/>
       </p:ext>
     </p:extLst>
   </p:cSld>
@@ -8693,7 +8693,7 @@
           <p:cNvPr id="1" name="s8-rule">
             <a:extLst xmlns:a="http://schemas.openxmlformats.org/drawingml/2006/main">
               <a:ext uri="{FF2B5EF4-FFF2-40B4-BE49-F238E27FC236}">
-                <a16:creationId xmlns:a16="http://schemas.microsoft.com/office/drawing/2014/main" id="{D4434573-04F6-436C-BD56-8531BCEA32BD}"/>
+                <a16:creationId xmlns:a16="http://schemas.microsoft.com/office/drawing/2014/main" id="{CC099062-565F-4654-9805-FDD7ED2D2D92}"/>
               </a:ext>
             </a:extLst>
           </p:cNvPr>
@@ -8726,7 +8726,7 @@
           <p:cNvPr id="2" name="s8-eyebrow">
             <a:extLst xmlns:a="http://schemas.openxmlformats.org/drawingml/2006/main">
               <a:ext uri="{FF2B5EF4-FFF2-40B4-BE49-F238E27FC236}">
-                <a16:creationId xmlns:a16="http://schemas.microsoft.com/office/drawing/2014/main" id="{486B0196-F3A1-41E5-96DD-DEDBE0841958}"/>
+                <a16:creationId xmlns:a16="http://schemas.microsoft.com/office/drawing/2014/main" id="{50A0E5C5-73D6-4435-867A-74874F25C452}"/>
               </a:ext>
             </a:extLst>
           </p:cNvPr>
@@ -8784,7 +8784,7 @@
           <p:cNvPr id="3" name="s8-title">
             <a:extLst xmlns:a="http://schemas.openxmlformats.org/drawingml/2006/main">
               <a:ext uri="{FF2B5EF4-FFF2-40B4-BE49-F238E27FC236}">
-                <a16:creationId xmlns:a16="http://schemas.microsoft.com/office/drawing/2014/main" id="{D79EB869-8B6A-4F84-9E15-4A12BDAFB4F7}"/>
+                <a16:creationId xmlns:a16="http://schemas.microsoft.com/office/drawing/2014/main" id="{6A530503-BD51-4953-BB5E-B63914FC69FC}"/>
               </a:ext>
             </a:extLst>
           </p:cNvPr>
@@ -8842,7 +8842,7 @@
           <p:cNvPr id="4" name="s8-footer">
             <a:extLst xmlns:a="http://schemas.openxmlformats.org/drawingml/2006/main">
               <a:ext uri="{FF2B5EF4-FFF2-40B4-BE49-F238E27FC236}">
-                <a16:creationId xmlns:a16="http://schemas.microsoft.com/office/drawing/2014/main" id="{94FA2561-2BF7-473E-825E-C13789711BF6}"/>
+                <a16:creationId xmlns:a16="http://schemas.microsoft.com/office/drawing/2014/main" id="{B479E18F-10AB-4C12-B2DF-59EE36236ADD}"/>
               </a:ext>
             </a:extLst>
           </p:cNvPr>
@@ -8873,7 +8873,7 @@
           <p:cNvPr id="5" name="s8-identity">
             <a:extLst xmlns:a="http://schemas.openxmlformats.org/drawingml/2006/main">
               <a:ext uri="{FF2B5EF4-FFF2-40B4-BE49-F238E27FC236}">
-                <a16:creationId xmlns:a16="http://schemas.microsoft.com/office/drawing/2014/main" id="{FA6C9F23-187C-41AA-B3E3-A0760CDDCF35}"/>
+                <a16:creationId xmlns:a16="http://schemas.microsoft.com/office/drawing/2014/main" id="{E589DCEA-5539-4316-A1E1-63FA92556ADA}"/>
               </a:ext>
             </a:extLst>
           </p:cNvPr>
@@ -8931,7 +8931,7 @@
           <p:cNvPr id="6" name="core-no-0">
             <a:extLst xmlns:a="http://schemas.openxmlformats.org/drawingml/2006/main">
               <a:ext uri="{FF2B5EF4-FFF2-40B4-BE49-F238E27FC236}">
-                <a16:creationId xmlns:a16="http://schemas.microsoft.com/office/drawing/2014/main" id="{1418F759-C4E6-4492-BD12-386507A61797}"/>
+                <a16:creationId xmlns:a16="http://schemas.microsoft.com/office/drawing/2014/main" id="{5AC288A6-2090-4823-861F-BC484F2F0E47}"/>
               </a:ext>
             </a:extLst>
           </p:cNvPr>
@@ -8989,7 +8989,7 @@
           <p:cNvPr id="7" name="core-label-0">
             <a:extLst xmlns:a="http://schemas.openxmlformats.org/drawingml/2006/main">
               <a:ext uri="{FF2B5EF4-FFF2-40B4-BE49-F238E27FC236}">
-                <a16:creationId xmlns:a16="http://schemas.microsoft.com/office/drawing/2014/main" id="{2984B8E1-3660-4C75-AA5E-13482811F7D0}"/>
+                <a16:creationId xmlns:a16="http://schemas.microsoft.com/office/drawing/2014/main" id="{D40D2D98-3C22-4065-85F6-D3E0B77A5DA0}"/>
               </a:ext>
             </a:extLst>
           </p:cNvPr>
@@ -9047,7 +9047,7 @@
           <p:cNvPr id="8" name="core-body-0">
             <a:extLst xmlns:a="http://schemas.openxmlformats.org/drawingml/2006/main">
               <a:ext uri="{FF2B5EF4-FFF2-40B4-BE49-F238E27FC236}">
-                <a16:creationId xmlns:a16="http://schemas.microsoft.com/office/drawing/2014/main" id="{628AFE6E-89EC-48D1-A9B3-9211BE1EA256}"/>
+                <a16:creationId xmlns:a16="http://schemas.microsoft.com/office/drawing/2014/main" id="{707146BB-3084-4548-9049-098A3C259DD3}"/>
               </a:ext>
             </a:extLst>
           </p:cNvPr>
@@ -9111,7 +9111,7 @@
           <p:cNvPr id="9" name="core-no-1">
             <a:extLst xmlns:a="http://schemas.openxmlformats.org/drawingml/2006/main">
               <a:ext uri="{FF2B5EF4-FFF2-40B4-BE49-F238E27FC236}">
-                <a16:creationId xmlns:a16="http://schemas.microsoft.com/office/drawing/2014/main" id="{4E4FA179-5269-4E61-B57C-287800237B1A}"/>
+                <a16:creationId xmlns:a16="http://schemas.microsoft.com/office/drawing/2014/main" id="{015AB12A-40E0-466C-B3BF-87628D2D59EE}"/>
               </a:ext>
             </a:extLst>
           </p:cNvPr>
@@ -9169,7 +9169,7 @@
           <p:cNvPr id="10" name="core-body-1">
             <a:extLst xmlns:a="http://schemas.openxmlformats.org/drawingml/2006/main">
               <a:ext uri="{FF2B5EF4-FFF2-40B4-BE49-F238E27FC236}">
-                <a16:creationId xmlns:a16="http://schemas.microsoft.com/office/drawing/2014/main" id="{E58DE542-DE87-4A29-8B3A-A787F0F59A41}"/>
+                <a16:creationId xmlns:a16="http://schemas.microsoft.com/office/drawing/2014/main" id="{21560A05-9080-4608-BA23-C14EBE40E808}"/>
               </a:ext>
             </a:extLst>
           </p:cNvPr>
@@ -9233,7 +9233,7 @@
           <p:cNvPr id="11" name="s8-takeaway-rule">
             <a:extLst xmlns:a="http://schemas.openxmlformats.org/drawingml/2006/main">
               <a:ext uri="{FF2B5EF4-FFF2-40B4-BE49-F238E27FC236}">
-                <a16:creationId xmlns:a16="http://schemas.microsoft.com/office/drawing/2014/main" id="{80916242-9148-43BD-8193-AB2E5C179EBA}"/>
+                <a16:creationId xmlns:a16="http://schemas.microsoft.com/office/drawing/2014/main" id="{86B80CF6-9114-496D-9BA5-672DCE6BBDCB}"/>
               </a:ext>
             </a:extLst>
           </p:cNvPr>
@@ -9266,7 +9266,7 @@
           <p:cNvPr id="12" name="s8-takeaway">
             <a:extLst xmlns:a="http://schemas.openxmlformats.org/drawingml/2006/main">
               <a:ext uri="{FF2B5EF4-FFF2-40B4-BE49-F238E27FC236}">
-                <a16:creationId xmlns:a16="http://schemas.microsoft.com/office/drawing/2014/main" id="{BA8B3D70-B602-4C50-BACB-AF5E606E4C54}"/>
+                <a16:creationId xmlns:a16="http://schemas.microsoft.com/office/drawing/2014/main" id="{C9A28B43-8802-4AD2-A2FD-D1F318FFCBDE}"/>
               </a:ext>
             </a:extLst>
           </p:cNvPr>
@@ -9322,7 +9322,7 @@
     </p:spTree>
     <p:extLst>
       <p:ext uri="{BB962C8B-B14F-4D97-AF65-F5344CB8AC3E}">
-        <p14:creationId xmlns:p14="http://schemas.microsoft.com/office/powerpoint/2010/main" val="1881825285"/>
+        <p14:creationId xmlns:p14="http://schemas.microsoft.com/office/powerpoint/2010/main" val="1240751355"/>
       </p:ext>
     </p:extLst>
   </p:cSld>
@@ -9353,7 +9353,7 @@
           <p:cNvPr id="1" name="s9-rule">
             <a:extLst xmlns:a="http://schemas.openxmlformats.org/drawingml/2006/main">
               <a:ext uri="{FF2B5EF4-FFF2-40B4-BE49-F238E27FC236}">
-                <a16:creationId xmlns:a16="http://schemas.microsoft.com/office/drawing/2014/main" id="{EBC72B43-ACD5-471D-83A7-90244ED79375}"/>
+                <a16:creationId xmlns:a16="http://schemas.microsoft.com/office/drawing/2014/main" id="{B93A6FB1-92AF-4785-8D43-1F4B80934E99}"/>
               </a:ext>
             </a:extLst>
           </p:cNvPr>
@@ -9386,7 +9386,7 @@
           <p:cNvPr id="2" name="s9-eyebrow">
             <a:extLst xmlns:a="http://schemas.openxmlformats.org/drawingml/2006/main">
               <a:ext uri="{FF2B5EF4-FFF2-40B4-BE49-F238E27FC236}">
-                <a16:creationId xmlns:a16="http://schemas.microsoft.com/office/drawing/2014/main" id="{FC9CA1A1-FFAD-484D-A389-77334359FBE8}"/>
+                <a16:creationId xmlns:a16="http://schemas.microsoft.com/office/drawing/2014/main" id="{0196FA1E-7F7B-4193-A6C2-CCC18842ABBD}"/>
               </a:ext>
             </a:extLst>
           </p:cNvPr>
@@ -9444,7 +9444,7 @@
           <p:cNvPr id="3" name="s9-title">
             <a:extLst xmlns:a="http://schemas.openxmlformats.org/drawingml/2006/main">
               <a:ext uri="{FF2B5EF4-FFF2-40B4-BE49-F238E27FC236}">
-                <a16:creationId xmlns:a16="http://schemas.microsoft.com/office/drawing/2014/main" id="{6637DDB3-A08B-4E6E-BCE3-BFC1CC17FAD4}"/>
+                <a16:creationId xmlns:a16="http://schemas.microsoft.com/office/drawing/2014/main" id="{2BAA0A65-A744-4E1E-A022-40EF56841522}"/>
               </a:ext>
             </a:extLst>
           </p:cNvPr>
@@ -9502,7 +9502,7 @@
           <p:cNvPr id="4" name="s9-footer">
             <a:extLst xmlns:a="http://schemas.openxmlformats.org/drawingml/2006/main">
               <a:ext uri="{FF2B5EF4-FFF2-40B4-BE49-F238E27FC236}">
-                <a16:creationId xmlns:a16="http://schemas.microsoft.com/office/drawing/2014/main" id="{91064FBB-1AF6-427A-A7D2-1918A20BA647}"/>
+                <a16:creationId xmlns:a16="http://schemas.microsoft.com/office/drawing/2014/main" id="{57A9D9B5-2EF5-48AF-BC45-A07556BD6CE4}"/>
               </a:ext>
             </a:extLst>
           </p:cNvPr>
@@ -9533,7 +9533,7 @@
           <p:cNvPr id="5" name="s9-identity">
             <a:extLst xmlns:a="http://schemas.openxmlformats.org/drawingml/2006/main">
               <a:ext uri="{FF2B5EF4-FFF2-40B4-BE49-F238E27FC236}">
-                <a16:creationId xmlns:a16="http://schemas.microsoft.com/office/drawing/2014/main" id="{6152270C-C114-4488-8CB7-BCA2FA1DF79F}"/>
+                <a16:creationId xmlns:a16="http://schemas.microsoft.com/office/drawing/2014/main" id="{083469C7-DE13-4E90-8760-9C976BE4F731}"/>
               </a:ext>
             </a:extLst>
           </p:cNvPr>
@@ -9591,7 +9591,7 @@
           <p:cNvPr id="6" name="case-title">
             <a:extLst xmlns:a="http://schemas.openxmlformats.org/drawingml/2006/main">
               <a:ext uri="{FF2B5EF4-FFF2-40B4-BE49-F238E27FC236}">
-                <a16:creationId xmlns:a16="http://schemas.microsoft.com/office/drawing/2014/main" id="{BC375DDC-1FC4-4253-8F32-7921445E5293}"/>
+                <a16:creationId xmlns:a16="http://schemas.microsoft.com/office/drawing/2014/main" id="{37BD8E32-D91B-4013-95D3-29CF6874518C}"/>
               </a:ext>
             </a:extLst>
           </p:cNvPr>
@@ -9655,7 +9655,7 @@
           <p:cNvPr id="7" name="case-row-0">
             <a:extLst xmlns:a="http://schemas.openxmlformats.org/drawingml/2006/main">
               <a:ext uri="{FF2B5EF4-FFF2-40B4-BE49-F238E27FC236}">
-                <a16:creationId xmlns:a16="http://schemas.microsoft.com/office/drawing/2014/main" id="{092FCBF9-ED5E-4390-A6AC-09DC1A415BC5}"/>
+                <a16:creationId xmlns:a16="http://schemas.microsoft.com/office/drawing/2014/main" id="{5E17E852-120C-4EBE-A6CD-6B0BB0FDA8B8}"/>
               </a:ext>
             </a:extLst>
           </p:cNvPr>
@@ -9719,7 +9719,7 @@
           <p:cNvPr id="8" name="case-row-1">
             <a:extLst xmlns:a="http://schemas.openxmlformats.org/drawingml/2006/main">
               <a:ext uri="{FF2B5EF4-FFF2-40B4-BE49-F238E27FC236}">
-                <a16:creationId xmlns:a16="http://schemas.microsoft.com/office/drawing/2014/main" id="{CA70CA80-8EDE-4723-ACC1-29C47D62C0F5}"/>
+                <a16:creationId xmlns:a16="http://schemas.microsoft.com/office/drawing/2014/main" id="{6C275FAB-8896-473D-B31C-4577F3F6DF95}"/>
               </a:ext>
             </a:extLst>
           </p:cNvPr>
@@ -9783,7 +9783,7 @@
           <p:cNvPr id="9" name="case-row-2">
             <a:extLst xmlns:a="http://schemas.openxmlformats.org/drawingml/2006/main">
               <a:ext uri="{FF2B5EF4-FFF2-40B4-BE49-F238E27FC236}">
-                <a16:creationId xmlns:a16="http://schemas.microsoft.com/office/drawing/2014/main" id="{E347CB39-9A79-4CFA-B881-A084316D548B}"/>
+                <a16:creationId xmlns:a16="http://schemas.microsoft.com/office/drawing/2014/main" id="{B51A2B22-057B-4853-9D6D-952D225E2940}"/>
               </a:ext>
             </a:extLst>
           </p:cNvPr>
@@ -9847,7 +9847,7 @@
           <p:cNvPr id="10" name="case-row-3">
             <a:extLst xmlns:a="http://schemas.openxmlformats.org/drawingml/2006/main">
               <a:ext uri="{FF2B5EF4-FFF2-40B4-BE49-F238E27FC236}">
-                <a16:creationId xmlns:a16="http://schemas.microsoft.com/office/drawing/2014/main" id="{9F2EA910-87E1-4369-85B8-0F8732993280}"/>
+                <a16:creationId xmlns:a16="http://schemas.microsoft.com/office/drawing/2014/main" id="{6E4CA600-81E3-4110-937E-F299A6D7991E}"/>
               </a:ext>
             </a:extLst>
           </p:cNvPr>
@@ -9911,7 +9911,7 @@
           <p:cNvPr id="11" name="case-row-4">
             <a:extLst xmlns:a="http://schemas.openxmlformats.org/drawingml/2006/main">
               <a:ext uri="{FF2B5EF4-FFF2-40B4-BE49-F238E27FC236}">
-                <a16:creationId xmlns:a16="http://schemas.microsoft.com/office/drawing/2014/main" id="{092A313E-A7D9-40F4-9891-326BA281B84C}"/>
+                <a16:creationId xmlns:a16="http://schemas.microsoft.com/office/drawing/2014/main" id="{090BD96D-ACC8-4FDE-9CCE-E6CBCC3BB9CC}"/>
               </a:ext>
             </a:extLst>
           </p:cNvPr>
@@ -9975,7 +9975,7 @@
           <p:cNvPr id="12" name="s9-takeaway-rule">
             <a:extLst xmlns:a="http://schemas.openxmlformats.org/drawingml/2006/main">
               <a:ext uri="{FF2B5EF4-FFF2-40B4-BE49-F238E27FC236}">
-                <a16:creationId xmlns:a16="http://schemas.microsoft.com/office/drawing/2014/main" id="{4FE5296A-C544-45BC-ACEE-5F2A68565C60}"/>
+                <a16:creationId xmlns:a16="http://schemas.microsoft.com/office/drawing/2014/main" id="{5CA9B0D7-279C-4AC5-B5D1-0CB26D54F029}"/>
               </a:ext>
             </a:extLst>
           </p:cNvPr>
@@ -10008,7 +10008,7 @@
           <p:cNvPr id="13" name="s9-takeaway">
             <a:extLst xmlns:a="http://schemas.openxmlformats.org/drawingml/2006/main">
               <a:ext uri="{FF2B5EF4-FFF2-40B4-BE49-F238E27FC236}">
-                <a16:creationId xmlns:a16="http://schemas.microsoft.com/office/drawing/2014/main" id="{E8109D47-2FFD-4AC5-992F-14B4D2CCEA07}"/>
+                <a16:creationId xmlns:a16="http://schemas.microsoft.com/office/drawing/2014/main" id="{F0E902DB-5D10-4A30-8AB5-83F6D5EFC00A}"/>
               </a:ext>
             </a:extLst>
           </p:cNvPr>
@@ -10064,7 +10064,7 @@
     </p:spTree>
     <p:extLst>
       <p:ext uri="{BB962C8B-B14F-4D97-AF65-F5344CB8AC3E}">
-        <p14:creationId xmlns:p14="http://schemas.microsoft.com/office/powerpoint/2010/main" val="1754219337"/>
+        <p14:creationId xmlns:p14="http://schemas.microsoft.com/office/powerpoint/2010/main" val="847505309"/>
       </p:ext>
     </p:extLst>
   </p:cSld>

--- a/docs/public/course-assets/course-pptx/ag-002.pptx
+++ b/docs/public/course-assets/course-pptx/ag-002.pptx
@@ -2,24 +2,24 @@
 <file path=ppt/presentation.xml><?xml version="1.0" encoding="utf-8"?>
 <p:presentation xmlns:p="http://schemas.openxmlformats.org/presentationml/2006/main">
   <p:sldMasterIdLst>
-    <p:sldMasterId xmlns:r="http://schemas.openxmlformats.org/officeDocument/2006/relationships" id="2147483648" r:id="R3074be43fe454dd3"/>
+    <p:sldMasterId xmlns:r="http://schemas.openxmlformats.org/officeDocument/2006/relationships" id="2147483648" r:id="R933b5500824647f7"/>
   </p:sldMasterIdLst>
   <p:notesMasterIdLst>
-    <p:notesMasterId xmlns:r="http://schemas.openxmlformats.org/officeDocument/2006/relationships" r:id="R61f40d78b4a84eb8"/>
+    <p:notesMasterId xmlns:r="http://schemas.openxmlformats.org/officeDocument/2006/relationships" r:id="Rd653774a75de40ea"/>
   </p:notesMasterIdLst>
   <p:sldIdLst>
-    <p:sldId xmlns:r="http://schemas.openxmlformats.org/officeDocument/2006/relationships" id="256" r:id="R4dc5f76317f54604"/>
-    <p:sldId xmlns:r="http://schemas.openxmlformats.org/officeDocument/2006/relationships" id="257" r:id="R1bbf093d5da34689"/>
-    <p:sldId xmlns:r="http://schemas.openxmlformats.org/officeDocument/2006/relationships" id="258" r:id="R5008d5f3c4c04049"/>
-    <p:sldId xmlns:r="http://schemas.openxmlformats.org/officeDocument/2006/relationships" id="259" r:id="Re48a970f309b4be0"/>
-    <p:sldId xmlns:r="http://schemas.openxmlformats.org/officeDocument/2006/relationships" id="260" r:id="R7a86bd0d1bf54a61"/>
-    <p:sldId xmlns:r="http://schemas.openxmlformats.org/officeDocument/2006/relationships" id="261" r:id="R649f7c695d164d97"/>
-    <p:sldId xmlns:r="http://schemas.openxmlformats.org/officeDocument/2006/relationships" id="262" r:id="R787b56c3e0424308"/>
-    <p:sldId xmlns:r="http://schemas.openxmlformats.org/officeDocument/2006/relationships" id="263" r:id="R225f3b28b3444dac"/>
-    <p:sldId xmlns:r="http://schemas.openxmlformats.org/officeDocument/2006/relationships" id="264" r:id="Rb1f75c4149e14f09"/>
-    <p:sldId xmlns:r="http://schemas.openxmlformats.org/officeDocument/2006/relationships" id="265" r:id="Rb8300787931b4d57"/>
-    <p:sldId xmlns:r="http://schemas.openxmlformats.org/officeDocument/2006/relationships" id="266" r:id="R51a48e82d1724851"/>
-    <p:sldId xmlns:r="http://schemas.openxmlformats.org/officeDocument/2006/relationships" id="267" r:id="R7f33727777f14b1e"/>
+    <p:sldId xmlns:r="http://schemas.openxmlformats.org/officeDocument/2006/relationships" id="256" r:id="Rb480919400c449b8"/>
+    <p:sldId xmlns:r="http://schemas.openxmlformats.org/officeDocument/2006/relationships" id="257" r:id="R19d74ffd6ca94188"/>
+    <p:sldId xmlns:r="http://schemas.openxmlformats.org/officeDocument/2006/relationships" id="258" r:id="Rb7b36d55c4d44270"/>
+    <p:sldId xmlns:r="http://schemas.openxmlformats.org/officeDocument/2006/relationships" id="259" r:id="R2bfe0998f84a4e2c"/>
+    <p:sldId xmlns:r="http://schemas.openxmlformats.org/officeDocument/2006/relationships" id="260" r:id="R58044d61aaff43cb"/>
+    <p:sldId xmlns:r="http://schemas.openxmlformats.org/officeDocument/2006/relationships" id="261" r:id="R5b6df3a2386743e3"/>
+    <p:sldId xmlns:r="http://schemas.openxmlformats.org/officeDocument/2006/relationships" id="262" r:id="R109b5b49748443ca"/>
+    <p:sldId xmlns:r="http://schemas.openxmlformats.org/officeDocument/2006/relationships" id="263" r:id="R48f1f6f4fdb143f2"/>
+    <p:sldId xmlns:r="http://schemas.openxmlformats.org/officeDocument/2006/relationships" id="264" r:id="R1569048c71f7472d"/>
+    <p:sldId xmlns:r="http://schemas.openxmlformats.org/officeDocument/2006/relationships" id="265" r:id="Rf5f5a737dce24dfe"/>
+    <p:sldId xmlns:r="http://schemas.openxmlformats.org/officeDocument/2006/relationships" id="266" r:id="R0d86d3747da54298"/>
+    <p:sldId xmlns:r="http://schemas.openxmlformats.org/officeDocument/2006/relationships" id="267" r:id="R09f172fd7b754b9e"/>
   </p:sldIdLst>
   <p:sldSz cx="12192000" cy="6858000"/>
   <p:notesSz cx="6858000" cy="9144000"/>
@@ -1338,7 +1338,7 @@
   </p:cSld>
   <p:clrMap bg1="lt1" tx1="dk1" bg2="lt2" tx2="dk2" accent1="accent1" accent2="accent2" accent3="accent3" accent4="accent4" accent5="accent5" accent6="accent6" hlink="hlink" folHlink="folHlink"/>
   <p:sldLayoutIdLst>
-    <p:sldLayoutId xmlns:r="http://schemas.openxmlformats.org/officeDocument/2006/relationships" id="2147483649" r:id="Rcd6b06484f53408f"/>
+    <p:sldLayoutId xmlns:r="http://schemas.openxmlformats.org/officeDocument/2006/relationships" id="2147483649" r:id="Rcb9a3ef1492a44ad"/>
   </p:sldLayoutIdLst>
   <p:txStyles>
     <p:titleStyle>
@@ -1889,7 +1889,7 @@
           <p:cNvPr id="1" name="cover-rule">
             <a:extLst xmlns:a="http://schemas.openxmlformats.org/drawingml/2006/main">
               <a:ext uri="{FF2B5EF4-FFF2-40B4-BE49-F238E27FC236}">
-                <a16:creationId xmlns:a16="http://schemas.microsoft.com/office/drawing/2014/main" id="{41D8AB22-277D-4016-B513-685BFA9742D1}"/>
+                <a16:creationId xmlns:a16="http://schemas.microsoft.com/office/drawing/2014/main" id="{C5D596DC-F134-4FEE-A639-866301B38AD9}"/>
               </a:ext>
             </a:extLst>
           </p:cNvPr>
@@ -1922,7 +1922,7 @@
           <p:cNvPr id="2" name="cover-ring-1">
             <a:extLst xmlns:a="http://schemas.openxmlformats.org/drawingml/2006/main">
               <a:ext uri="{FF2B5EF4-FFF2-40B4-BE49-F238E27FC236}">
-                <a16:creationId xmlns:a16="http://schemas.microsoft.com/office/drawing/2014/main" id="{E62574FC-D294-4540-9459-C93D9640044E}"/>
+                <a16:creationId xmlns:a16="http://schemas.microsoft.com/office/drawing/2014/main" id="{36EFE687-7114-47BC-980E-F0CC2D353DB3}"/>
               </a:ext>
             </a:extLst>
           </p:cNvPr>
@@ -1953,7 +1953,7 @@
           <p:cNvPr id="3" name="cover-ring-2">
             <a:extLst xmlns:a="http://schemas.openxmlformats.org/drawingml/2006/main">
               <a:ext uri="{FF2B5EF4-FFF2-40B4-BE49-F238E27FC236}">
-                <a16:creationId xmlns:a16="http://schemas.microsoft.com/office/drawing/2014/main" id="{0666D9DD-2E0B-490F-9822-9E6842E20BD8}"/>
+                <a16:creationId xmlns:a16="http://schemas.microsoft.com/office/drawing/2014/main" id="{D585E86C-7FBA-4A0D-BD91-43C0C9953B8F}"/>
               </a:ext>
             </a:extLst>
           </p:cNvPr>
@@ -1984,7 +1984,7 @@
           <p:cNvPr id="4" name="cover-core">
             <a:extLst xmlns:a="http://schemas.openxmlformats.org/drawingml/2006/main">
               <a:ext uri="{FF2B5EF4-FFF2-40B4-BE49-F238E27FC236}">
-                <a16:creationId xmlns:a16="http://schemas.microsoft.com/office/drawing/2014/main" id="{EEA654F5-A9E3-40DB-B2CD-903666A64B18}"/>
+                <a16:creationId xmlns:a16="http://schemas.microsoft.com/office/drawing/2014/main" id="{E71CB87E-F917-4404-95F8-AEB2013FDA5E}"/>
               </a:ext>
             </a:extLst>
           </p:cNvPr>
@@ -2017,7 +2017,7 @@
           <p:cNvPr id="5" name="cover-line-1">
             <a:extLst xmlns:a="http://schemas.openxmlformats.org/drawingml/2006/main">
               <a:ext uri="{FF2B5EF4-FFF2-40B4-BE49-F238E27FC236}">
-                <a16:creationId xmlns:a16="http://schemas.microsoft.com/office/drawing/2014/main" id="{E5F81F48-077A-4126-AB06-2D222B5D9967}"/>
+                <a16:creationId xmlns:a16="http://schemas.microsoft.com/office/drawing/2014/main" id="{05691899-7A21-4773-8C94-1EF5B342DBFD}"/>
               </a:ext>
             </a:extLst>
           </p:cNvPr>
@@ -2048,7 +2048,7 @@
           <p:cNvPr id="6" name="cover-line-2">
             <a:extLst xmlns:a="http://schemas.openxmlformats.org/drawingml/2006/main">
               <a:ext uri="{FF2B5EF4-FFF2-40B4-BE49-F238E27FC236}">
-                <a16:creationId xmlns:a16="http://schemas.microsoft.com/office/drawing/2014/main" id="{6387E982-4236-46F7-984B-8AA753C18769}"/>
+                <a16:creationId xmlns:a16="http://schemas.microsoft.com/office/drawing/2014/main" id="{36792D5D-D5E9-457B-BDED-B05D81326B17}"/>
               </a:ext>
             </a:extLst>
           </p:cNvPr>
@@ -2079,7 +2079,7 @@
           <p:cNvPr id="7" name="cover-eyebrow">
             <a:extLst xmlns:a="http://schemas.openxmlformats.org/drawingml/2006/main">
               <a:ext uri="{FF2B5EF4-FFF2-40B4-BE49-F238E27FC236}">
-                <a16:creationId xmlns:a16="http://schemas.microsoft.com/office/drawing/2014/main" id="{636D8A37-144B-4797-B74C-E5791487CCF7}"/>
+                <a16:creationId xmlns:a16="http://schemas.microsoft.com/office/drawing/2014/main" id="{D7B512AF-2382-47CE-B281-7B19BEA059C1}"/>
               </a:ext>
             </a:extLst>
           </p:cNvPr>
@@ -2137,7 +2137,7 @@
           <p:cNvPr id="8" name="cover-title">
             <a:extLst xmlns:a="http://schemas.openxmlformats.org/drawingml/2006/main">
               <a:ext uri="{FF2B5EF4-FFF2-40B4-BE49-F238E27FC236}">
-                <a16:creationId xmlns:a16="http://schemas.microsoft.com/office/drawing/2014/main" id="{7A46444F-A622-4D3C-93D7-773612B1859D}"/>
+                <a16:creationId xmlns:a16="http://schemas.microsoft.com/office/drawing/2014/main" id="{395185B6-B270-44F1-B733-641A3D3EFF80}"/>
               </a:ext>
             </a:extLst>
           </p:cNvPr>
@@ -2195,7 +2195,7 @@
           <p:cNvPr id="9" name="cover-subtitle">
             <a:extLst xmlns:a="http://schemas.openxmlformats.org/drawingml/2006/main">
               <a:ext uri="{FF2B5EF4-FFF2-40B4-BE49-F238E27FC236}">
-                <a16:creationId xmlns:a16="http://schemas.microsoft.com/office/drawing/2014/main" id="{3E3DEA6E-CB18-4BFF-AE67-F7E027B4AC07}"/>
+                <a16:creationId xmlns:a16="http://schemas.microsoft.com/office/drawing/2014/main" id="{E0A60BFF-D72C-4828-9B5C-AA7DC5AE0F8B}"/>
               </a:ext>
             </a:extLst>
           </p:cNvPr>
@@ -2257,7 +2257,7 @@
           <p:cNvPr id="10" name="cover-lead">
             <a:extLst xmlns:a="http://schemas.openxmlformats.org/drawingml/2006/main">
               <a:ext uri="{FF2B5EF4-FFF2-40B4-BE49-F238E27FC236}">
-                <a16:creationId xmlns:a16="http://schemas.microsoft.com/office/drawing/2014/main" id="{3D20DDEF-063F-4CE4-962D-341C25826FD8}"/>
+                <a16:creationId xmlns:a16="http://schemas.microsoft.com/office/drawing/2014/main" id="{391A58E3-8A09-4F9D-8658-FBAB75E0FF74}"/>
               </a:ext>
             </a:extLst>
           </p:cNvPr>
@@ -2315,7 +2315,7 @@
           <p:cNvPr id="11" name="cover-course">
             <a:extLst xmlns:a="http://schemas.openxmlformats.org/drawingml/2006/main">
               <a:ext uri="{FF2B5EF4-FFF2-40B4-BE49-F238E27FC236}">
-                <a16:creationId xmlns:a16="http://schemas.microsoft.com/office/drawing/2014/main" id="{3381CE5A-0FD4-4722-8349-5CD26245C9B5}"/>
+                <a16:creationId xmlns:a16="http://schemas.microsoft.com/office/drawing/2014/main" id="{7BE5F316-5E18-43F1-A7F5-CB70CA69470F}"/>
               </a:ext>
             </a:extLst>
           </p:cNvPr>
@@ -2373,7 +2373,7 @@
           <p:cNvPr id="12" name="cover-id">
             <a:extLst xmlns:a="http://schemas.openxmlformats.org/drawingml/2006/main">
               <a:ext uri="{FF2B5EF4-FFF2-40B4-BE49-F238E27FC236}">
-                <a16:creationId xmlns:a16="http://schemas.microsoft.com/office/drawing/2014/main" id="{0ACF363D-7D3A-454A-AFAA-0C9FA59A777A}"/>
+                <a16:creationId xmlns:a16="http://schemas.microsoft.com/office/drawing/2014/main" id="{9C2F416B-4C23-4F56-BFC1-CE33AE205612}"/>
               </a:ext>
             </a:extLst>
           </p:cNvPr>
@@ -2429,7 +2429,7 @@
     </p:spTree>
     <p:extLst>
       <p:ext uri="{BB962C8B-B14F-4D97-AF65-F5344CB8AC3E}">
-        <p14:creationId xmlns:p14="http://schemas.microsoft.com/office/powerpoint/2010/main" val="1716710900"/>
+        <p14:creationId xmlns:p14="http://schemas.microsoft.com/office/powerpoint/2010/main" val="1848644658"/>
       </p:ext>
     </p:extLst>
   </p:cSld>
@@ -2460,7 +2460,7 @@
           <p:cNvPr id="1" name="s10-rule">
             <a:extLst xmlns:a="http://schemas.openxmlformats.org/drawingml/2006/main">
               <a:ext uri="{FF2B5EF4-FFF2-40B4-BE49-F238E27FC236}">
-                <a16:creationId xmlns:a16="http://schemas.microsoft.com/office/drawing/2014/main" id="{E05F99AE-0229-474B-9B8C-4DA2664F3FE0}"/>
+                <a16:creationId xmlns:a16="http://schemas.microsoft.com/office/drawing/2014/main" id="{AED7C1AA-D0AD-407A-8BCD-518CBF294AAE}"/>
               </a:ext>
             </a:extLst>
           </p:cNvPr>
@@ -2493,7 +2493,7 @@
           <p:cNvPr id="2" name="s10-eyebrow">
             <a:extLst xmlns:a="http://schemas.openxmlformats.org/drawingml/2006/main">
               <a:ext uri="{FF2B5EF4-FFF2-40B4-BE49-F238E27FC236}">
-                <a16:creationId xmlns:a16="http://schemas.microsoft.com/office/drawing/2014/main" id="{2767940E-5E88-4179-8840-2820C7AE7306}"/>
+                <a16:creationId xmlns:a16="http://schemas.microsoft.com/office/drawing/2014/main" id="{B6CDED56-D303-4E28-8FC5-9DA5DA51F681}"/>
               </a:ext>
             </a:extLst>
           </p:cNvPr>
@@ -2551,7 +2551,7 @@
           <p:cNvPr id="3" name="s10-title">
             <a:extLst xmlns:a="http://schemas.openxmlformats.org/drawingml/2006/main">
               <a:ext uri="{FF2B5EF4-FFF2-40B4-BE49-F238E27FC236}">
-                <a16:creationId xmlns:a16="http://schemas.microsoft.com/office/drawing/2014/main" id="{840A5D76-4624-4518-8B67-FD2AED7711DC}"/>
+                <a16:creationId xmlns:a16="http://schemas.microsoft.com/office/drawing/2014/main" id="{5F3BB715-5FB9-4434-848A-072B84EEF2C9}"/>
               </a:ext>
             </a:extLst>
           </p:cNvPr>
@@ -2609,7 +2609,7 @@
           <p:cNvPr id="4" name="s10-footer">
             <a:extLst xmlns:a="http://schemas.openxmlformats.org/drawingml/2006/main">
               <a:ext uri="{FF2B5EF4-FFF2-40B4-BE49-F238E27FC236}">
-                <a16:creationId xmlns:a16="http://schemas.microsoft.com/office/drawing/2014/main" id="{C381B6AD-E7A0-4E19-8A9B-2B0E9FE39034}"/>
+                <a16:creationId xmlns:a16="http://schemas.microsoft.com/office/drawing/2014/main" id="{E642B637-744D-435B-AF9B-F92EED23784B}"/>
               </a:ext>
             </a:extLst>
           </p:cNvPr>
@@ -2640,7 +2640,7 @@
           <p:cNvPr id="5" name="s10-identity">
             <a:extLst xmlns:a="http://schemas.openxmlformats.org/drawingml/2006/main">
               <a:ext uri="{FF2B5EF4-FFF2-40B4-BE49-F238E27FC236}">
-                <a16:creationId xmlns:a16="http://schemas.microsoft.com/office/drawing/2014/main" id="{3D335372-240E-4D0C-88AC-4C6B4E6D7747}"/>
+                <a16:creationId xmlns:a16="http://schemas.microsoft.com/office/drawing/2014/main" id="{329BE487-8775-42F5-9D89-534DB4855250}"/>
               </a:ext>
             </a:extLst>
           </p:cNvPr>
@@ -2698,7 +2698,7 @@
           <p:cNvPr id="6" name="practice-circle-0">
             <a:extLst xmlns:a="http://schemas.openxmlformats.org/drawingml/2006/main">
               <a:ext uri="{FF2B5EF4-FFF2-40B4-BE49-F238E27FC236}">
-                <a16:creationId xmlns:a16="http://schemas.microsoft.com/office/drawing/2014/main" id="{CE5DD0EB-8CB9-47AE-A5E5-A570BF1918E1}"/>
+                <a16:creationId xmlns:a16="http://schemas.microsoft.com/office/drawing/2014/main" id="{37AA6E92-AB58-4A03-B5C7-070D3C56048A}"/>
               </a:ext>
             </a:extLst>
           </p:cNvPr>
@@ -2731,7 +2731,7 @@
           <p:cNvPr id="7" name="practice-number-0">
             <a:extLst xmlns:a="http://schemas.openxmlformats.org/drawingml/2006/main">
               <a:ext uri="{FF2B5EF4-FFF2-40B4-BE49-F238E27FC236}">
-                <a16:creationId xmlns:a16="http://schemas.microsoft.com/office/drawing/2014/main" id="{C4EFAE2E-7514-40F6-BA07-B0B28E1730A8}"/>
+                <a16:creationId xmlns:a16="http://schemas.microsoft.com/office/drawing/2014/main" id="{C720795C-D45A-4D18-8118-D0B383079865}"/>
               </a:ext>
             </a:extLst>
           </p:cNvPr>
@@ -2789,7 +2789,7 @@
           <p:cNvPr id="8" name="practice-item-0">
             <a:extLst xmlns:a="http://schemas.openxmlformats.org/drawingml/2006/main">
               <a:ext uri="{FF2B5EF4-FFF2-40B4-BE49-F238E27FC236}">
-                <a16:creationId xmlns:a16="http://schemas.microsoft.com/office/drawing/2014/main" id="{48C08D50-E11A-4A71-B614-ECFEC54BE96D}"/>
+                <a16:creationId xmlns:a16="http://schemas.microsoft.com/office/drawing/2014/main" id="{2F91C422-A294-4873-89FF-4F9245FA097E}"/>
               </a:ext>
             </a:extLst>
           </p:cNvPr>
@@ -2853,7 +2853,7 @@
           <p:cNvPr id="9" name="practice-connector-0">
             <a:extLst xmlns:a="http://schemas.openxmlformats.org/drawingml/2006/main">
               <a:ext uri="{FF2B5EF4-FFF2-40B4-BE49-F238E27FC236}">
-                <a16:creationId xmlns:a16="http://schemas.microsoft.com/office/drawing/2014/main" id="{F98ACBCD-6BD0-44B6-98B2-26B0942FA7B1}"/>
+                <a16:creationId xmlns:a16="http://schemas.microsoft.com/office/drawing/2014/main" id="{2A3E3C8D-C28F-4103-8282-916AE074B5F3}"/>
               </a:ext>
             </a:extLst>
           </p:cNvPr>
@@ -2884,7 +2884,7 @@
           <p:cNvPr id="10" name="practice-circle-1">
             <a:extLst xmlns:a="http://schemas.openxmlformats.org/drawingml/2006/main">
               <a:ext uri="{FF2B5EF4-FFF2-40B4-BE49-F238E27FC236}">
-                <a16:creationId xmlns:a16="http://schemas.microsoft.com/office/drawing/2014/main" id="{B4564F8F-1DDE-4927-905B-B4FC2EF643B7}"/>
+                <a16:creationId xmlns:a16="http://schemas.microsoft.com/office/drawing/2014/main" id="{D3919038-AD43-410D-B447-800038F6061A}"/>
               </a:ext>
             </a:extLst>
           </p:cNvPr>
@@ -2917,7 +2917,7 @@
           <p:cNvPr id="11" name="practice-number-1">
             <a:extLst xmlns:a="http://schemas.openxmlformats.org/drawingml/2006/main">
               <a:ext uri="{FF2B5EF4-FFF2-40B4-BE49-F238E27FC236}">
-                <a16:creationId xmlns:a16="http://schemas.microsoft.com/office/drawing/2014/main" id="{EC193101-50B5-469C-BC70-EE4CE75085C8}"/>
+                <a16:creationId xmlns:a16="http://schemas.microsoft.com/office/drawing/2014/main" id="{8B25A035-53C2-4689-B829-3C81BCCE9950}"/>
               </a:ext>
             </a:extLst>
           </p:cNvPr>
@@ -2975,7 +2975,7 @@
           <p:cNvPr id="12" name="practice-item-1">
             <a:extLst xmlns:a="http://schemas.openxmlformats.org/drawingml/2006/main">
               <a:ext uri="{FF2B5EF4-FFF2-40B4-BE49-F238E27FC236}">
-                <a16:creationId xmlns:a16="http://schemas.microsoft.com/office/drawing/2014/main" id="{04E68021-3B0F-4711-A29F-11FE5D256FD9}"/>
+                <a16:creationId xmlns:a16="http://schemas.microsoft.com/office/drawing/2014/main" id="{BC1620A4-8A7B-4F21-B168-598D1FAF85D8}"/>
               </a:ext>
             </a:extLst>
           </p:cNvPr>
@@ -3039,7 +3039,7 @@
           <p:cNvPr id="13" name="practice-connector-1">
             <a:extLst xmlns:a="http://schemas.openxmlformats.org/drawingml/2006/main">
               <a:ext uri="{FF2B5EF4-FFF2-40B4-BE49-F238E27FC236}">
-                <a16:creationId xmlns:a16="http://schemas.microsoft.com/office/drawing/2014/main" id="{356E2941-157D-4E1C-8895-B80CBEEBCCA8}"/>
+                <a16:creationId xmlns:a16="http://schemas.microsoft.com/office/drawing/2014/main" id="{CE363308-9DC0-4918-A3CA-55F23FC42A35}"/>
               </a:ext>
             </a:extLst>
           </p:cNvPr>
@@ -3070,7 +3070,7 @@
           <p:cNvPr id="14" name="practice-circle-2">
             <a:extLst xmlns:a="http://schemas.openxmlformats.org/drawingml/2006/main">
               <a:ext uri="{FF2B5EF4-FFF2-40B4-BE49-F238E27FC236}">
-                <a16:creationId xmlns:a16="http://schemas.microsoft.com/office/drawing/2014/main" id="{C5BFE55D-1275-472A-A936-49298F195507}"/>
+                <a16:creationId xmlns:a16="http://schemas.microsoft.com/office/drawing/2014/main" id="{816293E0-F4E4-4EA8-833F-E7D18710948A}"/>
               </a:ext>
             </a:extLst>
           </p:cNvPr>
@@ -3103,7 +3103,7 @@
           <p:cNvPr id="15" name="practice-number-2">
             <a:extLst xmlns:a="http://schemas.openxmlformats.org/drawingml/2006/main">
               <a:ext uri="{FF2B5EF4-FFF2-40B4-BE49-F238E27FC236}">
-                <a16:creationId xmlns:a16="http://schemas.microsoft.com/office/drawing/2014/main" id="{2439057F-C211-44AC-AE24-8782CC2F68BC}"/>
+                <a16:creationId xmlns:a16="http://schemas.microsoft.com/office/drawing/2014/main" id="{333066A9-BD54-40AD-8F5F-43A318F0D054}"/>
               </a:ext>
             </a:extLst>
           </p:cNvPr>
@@ -3161,7 +3161,7 @@
           <p:cNvPr id="16" name="practice-item-2">
             <a:extLst xmlns:a="http://schemas.openxmlformats.org/drawingml/2006/main">
               <a:ext uri="{FF2B5EF4-FFF2-40B4-BE49-F238E27FC236}">
-                <a16:creationId xmlns:a16="http://schemas.microsoft.com/office/drawing/2014/main" id="{0756B77B-4C71-4D1B-9517-AFC8FFB0F694}"/>
+                <a16:creationId xmlns:a16="http://schemas.microsoft.com/office/drawing/2014/main" id="{4FBF16F3-3D10-4243-BFDB-E01048EC626D}"/>
               </a:ext>
             </a:extLst>
           </p:cNvPr>
@@ -3223,7 +3223,7 @@
     </p:spTree>
     <p:extLst>
       <p:ext uri="{BB962C8B-B14F-4D97-AF65-F5344CB8AC3E}">
-        <p14:creationId xmlns:p14="http://schemas.microsoft.com/office/powerpoint/2010/main" val="380551529"/>
+        <p14:creationId xmlns:p14="http://schemas.microsoft.com/office/powerpoint/2010/main" val="188345941"/>
       </p:ext>
     </p:extLst>
   </p:cSld>
@@ -3254,7 +3254,7 @@
           <p:cNvPr id="1" name="s11-rule">
             <a:extLst xmlns:a="http://schemas.openxmlformats.org/drawingml/2006/main">
               <a:ext uri="{FF2B5EF4-FFF2-40B4-BE49-F238E27FC236}">
-                <a16:creationId xmlns:a16="http://schemas.microsoft.com/office/drawing/2014/main" id="{DE2EB2DB-2784-45A1-8482-B209DFCCF5AF}"/>
+                <a16:creationId xmlns:a16="http://schemas.microsoft.com/office/drawing/2014/main" id="{20F3A5B4-7329-483C-9D82-4C81E622182C}"/>
               </a:ext>
             </a:extLst>
           </p:cNvPr>
@@ -3287,7 +3287,7 @@
           <p:cNvPr id="2" name="s11-eyebrow">
             <a:extLst xmlns:a="http://schemas.openxmlformats.org/drawingml/2006/main">
               <a:ext uri="{FF2B5EF4-FFF2-40B4-BE49-F238E27FC236}">
-                <a16:creationId xmlns:a16="http://schemas.microsoft.com/office/drawing/2014/main" id="{E424BC99-9034-4E19-A23E-AC05EB638C27}"/>
+                <a16:creationId xmlns:a16="http://schemas.microsoft.com/office/drawing/2014/main" id="{995E003A-7F6E-4552-B49D-D4260875F3AD}"/>
               </a:ext>
             </a:extLst>
           </p:cNvPr>
@@ -3345,7 +3345,7 @@
           <p:cNvPr id="3" name="s11-title">
             <a:extLst xmlns:a="http://schemas.openxmlformats.org/drawingml/2006/main">
               <a:ext uri="{FF2B5EF4-FFF2-40B4-BE49-F238E27FC236}">
-                <a16:creationId xmlns:a16="http://schemas.microsoft.com/office/drawing/2014/main" id="{BCC774F0-E9BF-4181-8EAC-5ED9FF5ABAC4}"/>
+                <a16:creationId xmlns:a16="http://schemas.microsoft.com/office/drawing/2014/main" id="{FDC53887-9F2D-443F-A740-2BAEA4594507}"/>
               </a:ext>
             </a:extLst>
           </p:cNvPr>
@@ -3403,7 +3403,7 @@
           <p:cNvPr id="4" name="s11-footer">
             <a:extLst xmlns:a="http://schemas.openxmlformats.org/drawingml/2006/main">
               <a:ext uri="{FF2B5EF4-FFF2-40B4-BE49-F238E27FC236}">
-                <a16:creationId xmlns:a16="http://schemas.microsoft.com/office/drawing/2014/main" id="{39A4A92E-B71B-456B-AD32-5E32942CEABE}"/>
+                <a16:creationId xmlns:a16="http://schemas.microsoft.com/office/drawing/2014/main" id="{0D6811AF-AD44-40EE-9361-6600ACE1A299}"/>
               </a:ext>
             </a:extLst>
           </p:cNvPr>
@@ -3434,7 +3434,7 @@
           <p:cNvPr id="5" name="s11-identity">
             <a:extLst xmlns:a="http://schemas.openxmlformats.org/drawingml/2006/main">
               <a:ext uri="{FF2B5EF4-FFF2-40B4-BE49-F238E27FC236}">
-                <a16:creationId xmlns:a16="http://schemas.microsoft.com/office/drawing/2014/main" id="{1D6032A9-2CE5-40F6-97C4-E98CE8EA6C3A}"/>
+                <a16:creationId xmlns:a16="http://schemas.microsoft.com/office/drawing/2014/main" id="{325DDE15-BF9A-4108-83FB-A31C63F0CBB9}"/>
               </a:ext>
             </a:extLst>
           </p:cNvPr>
@@ -3492,7 +3492,7 @@
           <p:cNvPr id="6" name="recap-circle-0">
             <a:extLst xmlns:a="http://schemas.openxmlformats.org/drawingml/2006/main">
               <a:ext uri="{FF2B5EF4-FFF2-40B4-BE49-F238E27FC236}">
-                <a16:creationId xmlns:a16="http://schemas.microsoft.com/office/drawing/2014/main" id="{A27291F0-C995-42BE-88AD-921CBBFA3C14}"/>
+                <a16:creationId xmlns:a16="http://schemas.microsoft.com/office/drawing/2014/main" id="{AE55F135-9D46-4054-BC83-C3E073C58F65}"/>
               </a:ext>
             </a:extLst>
           </p:cNvPr>
@@ -3525,7 +3525,7 @@
           <p:cNvPr id="7" name="recap-number-0">
             <a:extLst xmlns:a="http://schemas.openxmlformats.org/drawingml/2006/main">
               <a:ext uri="{FF2B5EF4-FFF2-40B4-BE49-F238E27FC236}">
-                <a16:creationId xmlns:a16="http://schemas.microsoft.com/office/drawing/2014/main" id="{9672CB9E-F4E7-45A0-A30E-0104E442853C}"/>
+                <a16:creationId xmlns:a16="http://schemas.microsoft.com/office/drawing/2014/main" id="{D467F03C-D01E-4D18-87A5-C5B37B8D1D1D}"/>
               </a:ext>
             </a:extLst>
           </p:cNvPr>
@@ -3583,7 +3583,7 @@
           <p:cNvPr id="8" name="recap-item-0">
             <a:extLst xmlns:a="http://schemas.openxmlformats.org/drawingml/2006/main">
               <a:ext uri="{FF2B5EF4-FFF2-40B4-BE49-F238E27FC236}">
-                <a16:creationId xmlns:a16="http://schemas.microsoft.com/office/drawing/2014/main" id="{644C4E7B-062D-4150-A6C5-2ABE553784E9}"/>
+                <a16:creationId xmlns:a16="http://schemas.microsoft.com/office/drawing/2014/main" id="{7672774B-2950-4F55-90EA-519634018A76}"/>
               </a:ext>
             </a:extLst>
           </p:cNvPr>
@@ -3647,7 +3647,7 @@
           <p:cNvPr id="9" name="recap-connector-0">
             <a:extLst xmlns:a="http://schemas.openxmlformats.org/drawingml/2006/main">
               <a:ext uri="{FF2B5EF4-FFF2-40B4-BE49-F238E27FC236}">
-                <a16:creationId xmlns:a16="http://schemas.microsoft.com/office/drawing/2014/main" id="{74C0C8B1-6D40-4723-8BF9-6999CB674C16}"/>
+                <a16:creationId xmlns:a16="http://schemas.microsoft.com/office/drawing/2014/main" id="{6ED03781-0F8D-4AC1-9364-319D7B36D01B}"/>
               </a:ext>
             </a:extLst>
           </p:cNvPr>
@@ -3678,7 +3678,7 @@
           <p:cNvPr id="10" name="recap-circle-1">
             <a:extLst xmlns:a="http://schemas.openxmlformats.org/drawingml/2006/main">
               <a:ext uri="{FF2B5EF4-FFF2-40B4-BE49-F238E27FC236}">
-                <a16:creationId xmlns:a16="http://schemas.microsoft.com/office/drawing/2014/main" id="{B3345631-E584-41C2-9D10-75307533DB05}"/>
+                <a16:creationId xmlns:a16="http://schemas.microsoft.com/office/drawing/2014/main" id="{9D2980E1-FA88-4FFE-BA61-1422E2E4B22C}"/>
               </a:ext>
             </a:extLst>
           </p:cNvPr>
@@ -3711,7 +3711,7 @@
           <p:cNvPr id="11" name="recap-number-1">
             <a:extLst xmlns:a="http://schemas.openxmlformats.org/drawingml/2006/main">
               <a:ext uri="{FF2B5EF4-FFF2-40B4-BE49-F238E27FC236}">
-                <a16:creationId xmlns:a16="http://schemas.microsoft.com/office/drawing/2014/main" id="{C7CB88E5-E5AB-4A1A-B229-7A6A11E75216}"/>
+                <a16:creationId xmlns:a16="http://schemas.microsoft.com/office/drawing/2014/main" id="{9C3B307D-5DF4-41A5-A072-8E2F9E1C25DE}"/>
               </a:ext>
             </a:extLst>
           </p:cNvPr>
@@ -3769,7 +3769,7 @@
           <p:cNvPr id="12" name="recap-item-1">
             <a:extLst xmlns:a="http://schemas.openxmlformats.org/drawingml/2006/main">
               <a:ext uri="{FF2B5EF4-FFF2-40B4-BE49-F238E27FC236}">
-                <a16:creationId xmlns:a16="http://schemas.microsoft.com/office/drawing/2014/main" id="{9C0BF78F-0CA2-4ABA-BD4E-50A767F56525}"/>
+                <a16:creationId xmlns:a16="http://schemas.microsoft.com/office/drawing/2014/main" id="{3B1DC665-96ED-43D5-8701-99E4BE89051F}"/>
               </a:ext>
             </a:extLst>
           </p:cNvPr>
@@ -3833,7 +3833,7 @@
           <p:cNvPr id="13" name="recap-connector-1">
             <a:extLst xmlns:a="http://schemas.openxmlformats.org/drawingml/2006/main">
               <a:ext uri="{FF2B5EF4-FFF2-40B4-BE49-F238E27FC236}">
-                <a16:creationId xmlns:a16="http://schemas.microsoft.com/office/drawing/2014/main" id="{E80ABFD3-F1F6-4A50-B660-A0D3F25CFDD7}"/>
+                <a16:creationId xmlns:a16="http://schemas.microsoft.com/office/drawing/2014/main" id="{F704367C-5680-4DCB-B223-67BFC346BA0A}"/>
               </a:ext>
             </a:extLst>
           </p:cNvPr>
@@ -3864,7 +3864,7 @@
           <p:cNvPr id="14" name="recap-circle-2">
             <a:extLst xmlns:a="http://schemas.openxmlformats.org/drawingml/2006/main">
               <a:ext uri="{FF2B5EF4-FFF2-40B4-BE49-F238E27FC236}">
-                <a16:creationId xmlns:a16="http://schemas.microsoft.com/office/drawing/2014/main" id="{B85A434A-A80A-47EA-904F-CF06E607523E}"/>
+                <a16:creationId xmlns:a16="http://schemas.microsoft.com/office/drawing/2014/main" id="{DDD11A34-42F3-4C8E-A705-31363EBC9E6F}"/>
               </a:ext>
             </a:extLst>
           </p:cNvPr>
@@ -3897,7 +3897,7 @@
           <p:cNvPr id="15" name="recap-number-2">
             <a:extLst xmlns:a="http://schemas.openxmlformats.org/drawingml/2006/main">
               <a:ext uri="{FF2B5EF4-FFF2-40B4-BE49-F238E27FC236}">
-                <a16:creationId xmlns:a16="http://schemas.microsoft.com/office/drawing/2014/main" id="{53AB4F7E-B293-461B-8548-55DF415CD3FB}"/>
+                <a16:creationId xmlns:a16="http://schemas.microsoft.com/office/drawing/2014/main" id="{B405AC7C-C4C6-4A20-90F6-5F645C873740}"/>
               </a:ext>
             </a:extLst>
           </p:cNvPr>
@@ -3955,7 +3955,7 @@
           <p:cNvPr id="16" name="recap-item-2">
             <a:extLst xmlns:a="http://schemas.openxmlformats.org/drawingml/2006/main">
               <a:ext uri="{FF2B5EF4-FFF2-40B4-BE49-F238E27FC236}">
-                <a16:creationId xmlns:a16="http://schemas.microsoft.com/office/drawing/2014/main" id="{7C83DBDA-04A3-4C70-9290-F93A7EB4DADD}"/>
+                <a16:creationId xmlns:a16="http://schemas.microsoft.com/office/drawing/2014/main" id="{63F30053-3581-4ECF-A4F8-5C9DBEDC6E2D}"/>
               </a:ext>
             </a:extLst>
           </p:cNvPr>
@@ -4017,7 +4017,7 @@
     </p:spTree>
     <p:extLst>
       <p:ext uri="{BB962C8B-B14F-4D97-AF65-F5344CB8AC3E}">
-        <p14:creationId xmlns:p14="http://schemas.microsoft.com/office/powerpoint/2010/main" val="692615593"/>
+        <p14:creationId xmlns:p14="http://schemas.microsoft.com/office/powerpoint/2010/main" val="158637686"/>
       </p:ext>
     </p:extLst>
   </p:cSld>
@@ -4048,7 +4048,7 @@
           <p:cNvPr id="1" name="s12-rule">
             <a:extLst xmlns:a="http://schemas.openxmlformats.org/drawingml/2006/main">
               <a:ext uri="{FF2B5EF4-FFF2-40B4-BE49-F238E27FC236}">
-                <a16:creationId xmlns:a16="http://schemas.microsoft.com/office/drawing/2014/main" id="{78956141-AA8A-4B27-BD04-95D277702036}"/>
+                <a16:creationId xmlns:a16="http://schemas.microsoft.com/office/drawing/2014/main" id="{A1A332FE-F597-46FD-8639-758604727771}"/>
               </a:ext>
             </a:extLst>
           </p:cNvPr>
@@ -4081,7 +4081,7 @@
           <p:cNvPr id="2" name="s12-eyebrow">
             <a:extLst xmlns:a="http://schemas.openxmlformats.org/drawingml/2006/main">
               <a:ext uri="{FF2B5EF4-FFF2-40B4-BE49-F238E27FC236}">
-                <a16:creationId xmlns:a16="http://schemas.microsoft.com/office/drawing/2014/main" id="{629A788B-24A3-400E-8F1F-0718BD451ED3}"/>
+                <a16:creationId xmlns:a16="http://schemas.microsoft.com/office/drawing/2014/main" id="{D7E7FF2E-5052-499B-A7B8-42CFF9D2EEC9}"/>
               </a:ext>
             </a:extLst>
           </p:cNvPr>
@@ -4139,7 +4139,7 @@
           <p:cNvPr id="3" name="s12-title">
             <a:extLst xmlns:a="http://schemas.openxmlformats.org/drawingml/2006/main">
               <a:ext uri="{FF2B5EF4-FFF2-40B4-BE49-F238E27FC236}">
-                <a16:creationId xmlns:a16="http://schemas.microsoft.com/office/drawing/2014/main" id="{E9369B62-2E37-4F9A-80A7-4CF25B658FF4}"/>
+                <a16:creationId xmlns:a16="http://schemas.microsoft.com/office/drawing/2014/main" id="{CA4FCA92-CF23-4BE0-99F4-3ADAACF8CC6F}"/>
               </a:ext>
             </a:extLst>
           </p:cNvPr>
@@ -4197,7 +4197,7 @@
           <p:cNvPr id="4" name="s12-footer">
             <a:extLst xmlns:a="http://schemas.openxmlformats.org/drawingml/2006/main">
               <a:ext uri="{FF2B5EF4-FFF2-40B4-BE49-F238E27FC236}">
-                <a16:creationId xmlns:a16="http://schemas.microsoft.com/office/drawing/2014/main" id="{0B039C21-3570-4DDA-A45C-22150229E267}"/>
+                <a16:creationId xmlns:a16="http://schemas.microsoft.com/office/drawing/2014/main" id="{CD4A50CC-DAAD-4CDF-B153-72C2BDBDD70E}"/>
               </a:ext>
             </a:extLst>
           </p:cNvPr>
@@ -4228,7 +4228,7 @@
           <p:cNvPr id="5" name="s12-identity">
             <a:extLst xmlns:a="http://schemas.openxmlformats.org/drawingml/2006/main">
               <a:ext uri="{FF2B5EF4-FFF2-40B4-BE49-F238E27FC236}">
-                <a16:creationId xmlns:a16="http://schemas.microsoft.com/office/drawing/2014/main" id="{D36316A7-8E44-4847-BAA8-79179514D095}"/>
+                <a16:creationId xmlns:a16="http://schemas.microsoft.com/office/drawing/2014/main" id="{36DFAA0C-88BE-4B42-9BEE-8A9AA8A63D65}"/>
               </a:ext>
             </a:extLst>
           </p:cNvPr>
@@ -4286,7 +4286,7 @@
           <p:cNvPr id="6" name="source-0">
             <a:extLst xmlns:a="http://schemas.openxmlformats.org/drawingml/2006/main">
               <a:ext uri="{FF2B5EF4-FFF2-40B4-BE49-F238E27FC236}">
-                <a16:creationId xmlns:a16="http://schemas.microsoft.com/office/drawing/2014/main" id="{32DA9306-4F4C-4D66-B42B-B46AD88BB11E}"/>
+                <a16:creationId xmlns:a16="http://schemas.microsoft.com/office/drawing/2014/main" id="{29091675-9B00-4187-AF87-01DB249853D8}"/>
               </a:ext>
             </a:extLst>
           </p:cNvPr>
@@ -4350,7 +4350,7 @@
           <p:cNvPr id="7" name="source-1">
             <a:extLst xmlns:a="http://schemas.openxmlformats.org/drawingml/2006/main">
               <a:ext uri="{FF2B5EF4-FFF2-40B4-BE49-F238E27FC236}">
-                <a16:creationId xmlns:a16="http://schemas.microsoft.com/office/drawing/2014/main" id="{7BBE7178-8542-4E14-8043-803B9CEDACBF}"/>
+                <a16:creationId xmlns:a16="http://schemas.microsoft.com/office/drawing/2014/main" id="{BF224C1F-3287-4F29-B031-5CCDD58D3642}"/>
               </a:ext>
             </a:extLst>
           </p:cNvPr>
@@ -4414,7 +4414,7 @@
           <p:cNvPr id="8" name="s12-takeaway-rule">
             <a:extLst xmlns:a="http://schemas.openxmlformats.org/drawingml/2006/main">
               <a:ext uri="{FF2B5EF4-FFF2-40B4-BE49-F238E27FC236}">
-                <a16:creationId xmlns:a16="http://schemas.microsoft.com/office/drawing/2014/main" id="{A4969A5B-4F0D-4A60-8549-0BCF577E2BEF}"/>
+                <a16:creationId xmlns:a16="http://schemas.microsoft.com/office/drawing/2014/main" id="{9FBB1071-19D3-47FA-8FC9-86B12A019F04}"/>
               </a:ext>
             </a:extLst>
           </p:cNvPr>
@@ -4447,7 +4447,7 @@
           <p:cNvPr id="9" name="s12-takeaway">
             <a:extLst xmlns:a="http://schemas.openxmlformats.org/drawingml/2006/main">
               <a:ext uri="{FF2B5EF4-FFF2-40B4-BE49-F238E27FC236}">
-                <a16:creationId xmlns:a16="http://schemas.microsoft.com/office/drawing/2014/main" id="{33FF7711-958D-4498-9B27-FED957A2A9A6}"/>
+                <a16:creationId xmlns:a16="http://schemas.microsoft.com/office/drawing/2014/main" id="{C504EE93-E2A3-4EF4-B806-9474C0A5A14D}"/>
               </a:ext>
             </a:extLst>
           </p:cNvPr>
@@ -4472,7 +4472,7 @@
         </p:spPr>
         <p:txBody>
           <a:bodyPr xmlns:a="http://schemas.openxmlformats.org/drawingml/2006/main" lIns="0" tIns="0" rIns="0" bIns="0" anchor="ctr">
-            <a:normAutofit fontScale="95911"/>
+            <a:normAutofit fontScale="100000"/>
           </a:bodyPr>
           <a:lstStyle xmlns:a="http://schemas.openxmlformats.org/drawingml/2006/main"/>
           <a:p xmlns:a="http://schemas.openxmlformats.org/drawingml/2006/main">
@@ -4495,7 +4495,7 @@
                 <a:ea typeface="PingFang SC"/>
                 <a:cs typeface="PingFang SC"/>
               </a:rPr>
-              <a:t>课程精编页用于讲授主线；播放器中的“原课件”模式保留团队 PowerPoint 精选页、真实图片和可播放视频。</a:t>
+              <a:t>课程正文与幻灯片共享同一知识主线，图片和视频用于帮助理解本节概念与案例。</a:t>
             </a:r>
           </a:p>
         </p:txBody>
@@ -4503,7 +4503,7 @@
     </p:spTree>
     <p:extLst>
       <p:ext uri="{BB962C8B-B14F-4D97-AF65-F5344CB8AC3E}">
-        <p14:creationId xmlns:p14="http://schemas.microsoft.com/office/powerpoint/2010/main" val="791193256"/>
+        <p14:creationId xmlns:p14="http://schemas.microsoft.com/office/powerpoint/2010/main" val="2125161729"/>
       </p:ext>
     </p:extLst>
   </p:cSld>
@@ -4534,7 +4534,7 @@
           <p:cNvPr id="1" name="s2-rule">
             <a:extLst xmlns:a="http://schemas.openxmlformats.org/drawingml/2006/main">
               <a:ext uri="{FF2B5EF4-FFF2-40B4-BE49-F238E27FC236}">
-                <a16:creationId xmlns:a16="http://schemas.microsoft.com/office/drawing/2014/main" id="{B2000429-477F-4F65-972C-3BFFC5C07BF4}"/>
+                <a16:creationId xmlns:a16="http://schemas.microsoft.com/office/drawing/2014/main" id="{FCE36C45-FC61-43B8-A6D4-9EEF5F25672F}"/>
               </a:ext>
             </a:extLst>
           </p:cNvPr>
@@ -4567,7 +4567,7 @@
           <p:cNvPr id="2" name="s2-eyebrow">
             <a:extLst xmlns:a="http://schemas.openxmlformats.org/drawingml/2006/main">
               <a:ext uri="{FF2B5EF4-FFF2-40B4-BE49-F238E27FC236}">
-                <a16:creationId xmlns:a16="http://schemas.microsoft.com/office/drawing/2014/main" id="{F2BC38E0-6A0C-41DA-AC4E-51EE65EED87D}"/>
+                <a16:creationId xmlns:a16="http://schemas.microsoft.com/office/drawing/2014/main" id="{CC0996ED-5F65-4118-8ED2-CAB15ECDE7D5}"/>
               </a:ext>
             </a:extLst>
           </p:cNvPr>
@@ -4625,7 +4625,7 @@
           <p:cNvPr id="3" name="s2-title">
             <a:extLst xmlns:a="http://schemas.openxmlformats.org/drawingml/2006/main">
               <a:ext uri="{FF2B5EF4-FFF2-40B4-BE49-F238E27FC236}">
-                <a16:creationId xmlns:a16="http://schemas.microsoft.com/office/drawing/2014/main" id="{83FFAC7A-88D5-4A40-A97C-5F6695A8C3BD}"/>
+                <a16:creationId xmlns:a16="http://schemas.microsoft.com/office/drawing/2014/main" id="{7DF83595-B5C2-483D-B2B3-80CD3C371535}"/>
               </a:ext>
             </a:extLst>
           </p:cNvPr>
@@ -4683,7 +4683,7 @@
           <p:cNvPr id="4" name="s2-footer">
             <a:extLst xmlns:a="http://schemas.openxmlformats.org/drawingml/2006/main">
               <a:ext uri="{FF2B5EF4-FFF2-40B4-BE49-F238E27FC236}">
-                <a16:creationId xmlns:a16="http://schemas.microsoft.com/office/drawing/2014/main" id="{90D85EA1-EABB-401D-A0BD-97F1AE2C68EC}"/>
+                <a16:creationId xmlns:a16="http://schemas.microsoft.com/office/drawing/2014/main" id="{ABBF4EEC-0453-4EC9-BF2A-55B3C9E1BBB7}"/>
               </a:ext>
             </a:extLst>
           </p:cNvPr>
@@ -4714,7 +4714,7 @@
           <p:cNvPr id="5" name="s2-identity">
             <a:extLst xmlns:a="http://schemas.openxmlformats.org/drawingml/2006/main">
               <a:ext uri="{FF2B5EF4-FFF2-40B4-BE49-F238E27FC236}">
-                <a16:creationId xmlns:a16="http://schemas.microsoft.com/office/drawing/2014/main" id="{8D58705E-9C86-4FEC-89DE-BDE13BA616C7}"/>
+                <a16:creationId xmlns:a16="http://schemas.microsoft.com/office/drawing/2014/main" id="{F6907E22-0A93-473A-B188-82B58D40D828}"/>
               </a:ext>
             </a:extLst>
           </p:cNvPr>
@@ -4772,7 +4772,7 @@
           <p:cNvPr id="6" name="objective-1">
             <a:extLst xmlns:a="http://schemas.openxmlformats.org/drawingml/2006/main">
               <a:ext uri="{FF2B5EF4-FFF2-40B4-BE49-F238E27FC236}">
-                <a16:creationId xmlns:a16="http://schemas.microsoft.com/office/drawing/2014/main" id="{19C9FC5C-9ABF-45CE-986A-E730CCAF1E38}"/>
+                <a16:creationId xmlns:a16="http://schemas.microsoft.com/office/drawing/2014/main" id="{78CD600A-9995-4523-96EC-BBB8C4EA0B18}"/>
               </a:ext>
             </a:extLst>
           </p:cNvPr>
@@ -4859,7 +4859,7 @@
           <p:cNvPr id="7" name="objective-2">
             <a:extLst xmlns:a="http://schemas.openxmlformats.org/drawingml/2006/main">
               <a:ext uri="{FF2B5EF4-FFF2-40B4-BE49-F238E27FC236}">
-                <a16:creationId xmlns:a16="http://schemas.microsoft.com/office/drawing/2014/main" id="{A1C224F2-B4E9-4650-AC36-8487618D6C21}"/>
+                <a16:creationId xmlns:a16="http://schemas.microsoft.com/office/drawing/2014/main" id="{718008D9-B7BA-42C2-A2FD-EABB444C2FF0}"/>
               </a:ext>
             </a:extLst>
           </p:cNvPr>
@@ -4946,7 +4946,7 @@
           <p:cNvPr id="8" name="objective-3">
             <a:extLst xmlns:a="http://schemas.openxmlformats.org/drawingml/2006/main">
               <a:ext uri="{FF2B5EF4-FFF2-40B4-BE49-F238E27FC236}">
-                <a16:creationId xmlns:a16="http://schemas.microsoft.com/office/drawing/2014/main" id="{49CFFB52-A9B6-42FF-BD65-D0CFDBE8C798}"/>
+                <a16:creationId xmlns:a16="http://schemas.microsoft.com/office/drawing/2014/main" id="{5BCA849C-6CCC-4588-B8BC-64AE60B4C8DC}"/>
               </a:ext>
             </a:extLst>
           </p:cNvPr>
@@ -5033,7 +5033,7 @@
           <p:cNvPr id="9" name="objective-4">
             <a:extLst xmlns:a="http://schemas.openxmlformats.org/drawingml/2006/main">
               <a:ext uri="{FF2B5EF4-FFF2-40B4-BE49-F238E27FC236}">
-                <a16:creationId xmlns:a16="http://schemas.microsoft.com/office/drawing/2014/main" id="{F245611F-13AD-4655-AC47-69B9A02F6675}"/>
+                <a16:creationId xmlns:a16="http://schemas.microsoft.com/office/drawing/2014/main" id="{13ECB369-E1D9-4CE4-A375-52742B23DDCF}"/>
               </a:ext>
             </a:extLst>
           </p:cNvPr>
@@ -5118,7 +5118,7 @@
     </p:spTree>
     <p:extLst>
       <p:ext uri="{BB962C8B-B14F-4D97-AF65-F5344CB8AC3E}">
-        <p14:creationId xmlns:p14="http://schemas.microsoft.com/office/powerpoint/2010/main" val="1483150176"/>
+        <p14:creationId xmlns:p14="http://schemas.microsoft.com/office/powerpoint/2010/main" val="274481230"/>
       </p:ext>
     </p:extLst>
   </p:cSld>
@@ -5149,7 +5149,7 @@
           <p:cNvPr id="1" name="s3-rule">
             <a:extLst xmlns:a="http://schemas.openxmlformats.org/drawingml/2006/main">
               <a:ext uri="{FF2B5EF4-FFF2-40B4-BE49-F238E27FC236}">
-                <a16:creationId xmlns:a16="http://schemas.microsoft.com/office/drawing/2014/main" id="{994111AF-6308-4A6B-8BFB-0E704B84C180}"/>
+                <a16:creationId xmlns:a16="http://schemas.microsoft.com/office/drawing/2014/main" id="{A5758F7E-C954-4D7E-8734-BA025083594B}"/>
               </a:ext>
             </a:extLst>
           </p:cNvPr>
@@ -5182,7 +5182,7 @@
           <p:cNvPr id="2" name="s3-eyebrow">
             <a:extLst xmlns:a="http://schemas.openxmlformats.org/drawingml/2006/main">
               <a:ext uri="{FF2B5EF4-FFF2-40B4-BE49-F238E27FC236}">
-                <a16:creationId xmlns:a16="http://schemas.microsoft.com/office/drawing/2014/main" id="{6B37CBBC-1243-4F8C-9340-BD4F15332F3F}"/>
+                <a16:creationId xmlns:a16="http://schemas.microsoft.com/office/drawing/2014/main" id="{660D2466-1F87-40D8-8F25-EBA2AA189FA0}"/>
               </a:ext>
             </a:extLst>
           </p:cNvPr>
@@ -5240,7 +5240,7 @@
           <p:cNvPr id="3" name="s3-title">
             <a:extLst xmlns:a="http://schemas.openxmlformats.org/drawingml/2006/main">
               <a:ext uri="{FF2B5EF4-FFF2-40B4-BE49-F238E27FC236}">
-                <a16:creationId xmlns:a16="http://schemas.microsoft.com/office/drawing/2014/main" id="{8B940A94-8C1B-4BF6-83D3-4A2224F73444}"/>
+                <a16:creationId xmlns:a16="http://schemas.microsoft.com/office/drawing/2014/main" id="{EA91CC42-35C1-44AB-B79F-9E58CDEFE310}"/>
               </a:ext>
             </a:extLst>
           </p:cNvPr>
@@ -5298,7 +5298,7 @@
           <p:cNvPr id="4" name="s3-footer">
             <a:extLst xmlns:a="http://schemas.openxmlformats.org/drawingml/2006/main">
               <a:ext uri="{FF2B5EF4-FFF2-40B4-BE49-F238E27FC236}">
-                <a16:creationId xmlns:a16="http://schemas.microsoft.com/office/drawing/2014/main" id="{E71CF035-EE62-48FF-A71D-613B536190EB}"/>
+                <a16:creationId xmlns:a16="http://schemas.microsoft.com/office/drawing/2014/main" id="{F43197F1-80AC-42DF-AD84-B6832070337D}"/>
               </a:ext>
             </a:extLst>
           </p:cNvPr>
@@ -5329,7 +5329,7 @@
           <p:cNvPr id="5" name="s3-identity">
             <a:extLst xmlns:a="http://schemas.openxmlformats.org/drawingml/2006/main">
               <a:ext uri="{FF2B5EF4-FFF2-40B4-BE49-F238E27FC236}">
-                <a16:creationId xmlns:a16="http://schemas.microsoft.com/office/drawing/2014/main" id="{719F7C72-179C-4771-BEC5-E8DABEB97A13}"/>
+                <a16:creationId xmlns:a16="http://schemas.microsoft.com/office/drawing/2014/main" id="{D35DD71F-FDE8-4BB3-A7D4-5ED23E1CFB29}"/>
               </a:ext>
             </a:extLst>
           </p:cNvPr>
@@ -5387,7 +5387,7 @@
           <p:cNvPr id="6" name="core-no-0">
             <a:extLst xmlns:a="http://schemas.openxmlformats.org/drawingml/2006/main">
               <a:ext uri="{FF2B5EF4-FFF2-40B4-BE49-F238E27FC236}">
-                <a16:creationId xmlns:a16="http://schemas.microsoft.com/office/drawing/2014/main" id="{23ED9652-5C8B-471A-9258-7CFAA803BEF9}"/>
+                <a16:creationId xmlns:a16="http://schemas.microsoft.com/office/drawing/2014/main" id="{5518B6EF-B570-4DCC-A1CB-EDA5EBC2524F}"/>
               </a:ext>
             </a:extLst>
           </p:cNvPr>
@@ -5445,7 +5445,7 @@
           <p:cNvPr id="7" name="core-label-0">
             <a:extLst xmlns:a="http://schemas.openxmlformats.org/drawingml/2006/main">
               <a:ext uri="{FF2B5EF4-FFF2-40B4-BE49-F238E27FC236}">
-                <a16:creationId xmlns:a16="http://schemas.microsoft.com/office/drawing/2014/main" id="{97F89E33-EB78-43CC-8E94-925153F0418B}"/>
+                <a16:creationId xmlns:a16="http://schemas.microsoft.com/office/drawing/2014/main" id="{A09312EC-2A6C-477F-AC3F-E77C048A031C}"/>
               </a:ext>
             </a:extLst>
           </p:cNvPr>
@@ -5503,7 +5503,7 @@
           <p:cNvPr id="8" name="core-body-0">
             <a:extLst xmlns:a="http://schemas.openxmlformats.org/drawingml/2006/main">
               <a:ext uri="{FF2B5EF4-FFF2-40B4-BE49-F238E27FC236}">
-                <a16:creationId xmlns:a16="http://schemas.microsoft.com/office/drawing/2014/main" id="{5384EABF-003B-4832-AF09-041B3D892DD7}"/>
+                <a16:creationId xmlns:a16="http://schemas.microsoft.com/office/drawing/2014/main" id="{3E456CEF-0BE4-478D-9D3C-DC1D4D5E1FB9}"/>
               </a:ext>
             </a:extLst>
           </p:cNvPr>
@@ -5567,7 +5567,7 @@
           <p:cNvPr id="9" name="core-no-1">
             <a:extLst xmlns:a="http://schemas.openxmlformats.org/drawingml/2006/main">
               <a:ext uri="{FF2B5EF4-FFF2-40B4-BE49-F238E27FC236}">
-                <a16:creationId xmlns:a16="http://schemas.microsoft.com/office/drawing/2014/main" id="{5E1D055C-72CC-4854-8ECA-973F549A1197}"/>
+                <a16:creationId xmlns:a16="http://schemas.microsoft.com/office/drawing/2014/main" id="{B7A6516C-F57A-44E4-A1BC-A147EA27F6F8}"/>
               </a:ext>
             </a:extLst>
           </p:cNvPr>
@@ -5625,7 +5625,7 @@
           <p:cNvPr id="10" name="core-body-1">
             <a:extLst xmlns:a="http://schemas.openxmlformats.org/drawingml/2006/main">
               <a:ext uri="{FF2B5EF4-FFF2-40B4-BE49-F238E27FC236}">
-                <a16:creationId xmlns:a16="http://schemas.microsoft.com/office/drawing/2014/main" id="{F3BD6C6A-A38F-4AA9-B09F-30FA2CAED67C}"/>
+                <a16:creationId xmlns:a16="http://schemas.microsoft.com/office/drawing/2014/main" id="{74E42376-6BFF-4C5D-B160-DE83CB1D1497}"/>
               </a:ext>
             </a:extLst>
           </p:cNvPr>
@@ -5689,7 +5689,7 @@
           <p:cNvPr id="11" name="s3-takeaway-rule">
             <a:extLst xmlns:a="http://schemas.openxmlformats.org/drawingml/2006/main">
               <a:ext uri="{FF2B5EF4-FFF2-40B4-BE49-F238E27FC236}">
-                <a16:creationId xmlns:a16="http://schemas.microsoft.com/office/drawing/2014/main" id="{476374BD-8AA7-4AE7-B0E8-DA07189EA8AB}"/>
+                <a16:creationId xmlns:a16="http://schemas.microsoft.com/office/drawing/2014/main" id="{1AC54D99-31A9-470F-B564-6C1DE5F2A9DB}"/>
               </a:ext>
             </a:extLst>
           </p:cNvPr>
@@ -5722,7 +5722,7 @@
           <p:cNvPr id="12" name="s3-takeaway">
             <a:extLst xmlns:a="http://schemas.openxmlformats.org/drawingml/2006/main">
               <a:ext uri="{FF2B5EF4-FFF2-40B4-BE49-F238E27FC236}">
-                <a16:creationId xmlns:a16="http://schemas.microsoft.com/office/drawing/2014/main" id="{E113AEB4-5DBF-472F-9F13-C9DAD56B4EBF}"/>
+                <a16:creationId xmlns:a16="http://schemas.microsoft.com/office/drawing/2014/main" id="{6FF0B6E1-EA35-4009-9AB6-C0037422CB6C}"/>
               </a:ext>
             </a:extLst>
           </p:cNvPr>
@@ -5778,7 +5778,7 @@
     </p:spTree>
     <p:extLst>
       <p:ext uri="{BB962C8B-B14F-4D97-AF65-F5344CB8AC3E}">
-        <p14:creationId xmlns:p14="http://schemas.microsoft.com/office/powerpoint/2010/main" val="1894223618"/>
+        <p14:creationId xmlns:p14="http://schemas.microsoft.com/office/powerpoint/2010/main" val="1196744760"/>
       </p:ext>
     </p:extLst>
   </p:cSld>
@@ -5809,7 +5809,7 @@
           <p:cNvPr id="1" name="s4-rule">
             <a:extLst xmlns:a="http://schemas.openxmlformats.org/drawingml/2006/main">
               <a:ext uri="{FF2B5EF4-FFF2-40B4-BE49-F238E27FC236}">
-                <a16:creationId xmlns:a16="http://schemas.microsoft.com/office/drawing/2014/main" id="{AE157501-1A81-4BED-B23C-A2407F04D8AA}"/>
+                <a16:creationId xmlns:a16="http://schemas.microsoft.com/office/drawing/2014/main" id="{9F372F81-3CD1-49C0-8B6D-6B2242172DB4}"/>
               </a:ext>
             </a:extLst>
           </p:cNvPr>
@@ -5842,7 +5842,7 @@
           <p:cNvPr id="2" name="s4-eyebrow">
             <a:extLst xmlns:a="http://schemas.openxmlformats.org/drawingml/2006/main">
               <a:ext uri="{FF2B5EF4-FFF2-40B4-BE49-F238E27FC236}">
-                <a16:creationId xmlns:a16="http://schemas.microsoft.com/office/drawing/2014/main" id="{3517CFB1-8A6A-4A25-A70D-91E62E4BA2DD}"/>
+                <a16:creationId xmlns:a16="http://schemas.microsoft.com/office/drawing/2014/main" id="{A6D41DB0-4C92-4A40-84A5-1B6915DD602B}"/>
               </a:ext>
             </a:extLst>
           </p:cNvPr>
@@ -5900,7 +5900,7 @@
           <p:cNvPr id="3" name="s4-title">
             <a:extLst xmlns:a="http://schemas.openxmlformats.org/drawingml/2006/main">
               <a:ext uri="{FF2B5EF4-FFF2-40B4-BE49-F238E27FC236}">
-                <a16:creationId xmlns:a16="http://schemas.microsoft.com/office/drawing/2014/main" id="{56DDBFD7-9553-4513-B237-C1B19E9E4345}"/>
+                <a16:creationId xmlns:a16="http://schemas.microsoft.com/office/drawing/2014/main" id="{A9A8CE8D-7779-4C08-A4BF-443A970FA9E5}"/>
               </a:ext>
             </a:extLst>
           </p:cNvPr>
@@ -5958,7 +5958,7 @@
           <p:cNvPr id="4" name="s4-footer">
             <a:extLst xmlns:a="http://schemas.openxmlformats.org/drawingml/2006/main">
               <a:ext uri="{FF2B5EF4-FFF2-40B4-BE49-F238E27FC236}">
-                <a16:creationId xmlns:a16="http://schemas.microsoft.com/office/drawing/2014/main" id="{355A71A8-57D4-445A-A6A4-170B28E47374}"/>
+                <a16:creationId xmlns:a16="http://schemas.microsoft.com/office/drawing/2014/main" id="{B19EAB07-E487-4710-B3AC-179BB1F9D171}"/>
               </a:ext>
             </a:extLst>
           </p:cNvPr>
@@ -5989,7 +5989,7 @@
           <p:cNvPr id="5" name="s4-identity">
             <a:extLst xmlns:a="http://schemas.openxmlformats.org/drawingml/2006/main">
               <a:ext uri="{FF2B5EF4-FFF2-40B4-BE49-F238E27FC236}">
-                <a16:creationId xmlns:a16="http://schemas.microsoft.com/office/drawing/2014/main" id="{5F6A43FC-5994-41FB-A364-20C93F6EC637}"/>
+                <a16:creationId xmlns:a16="http://schemas.microsoft.com/office/drawing/2014/main" id="{2998C2AA-6F55-4BDB-A933-57DF92295CDF}"/>
               </a:ext>
             </a:extLst>
           </p:cNvPr>
@@ -6047,7 +6047,7 @@
           <p:cNvPr id="6" name="core-no-0">
             <a:extLst xmlns:a="http://schemas.openxmlformats.org/drawingml/2006/main">
               <a:ext uri="{FF2B5EF4-FFF2-40B4-BE49-F238E27FC236}">
-                <a16:creationId xmlns:a16="http://schemas.microsoft.com/office/drawing/2014/main" id="{6F3FD59A-E227-4C2B-A3F6-65EB29AF56D7}"/>
+                <a16:creationId xmlns:a16="http://schemas.microsoft.com/office/drawing/2014/main" id="{09E41E66-5A1A-4876-9982-60CBB77FA076}"/>
               </a:ext>
             </a:extLst>
           </p:cNvPr>
@@ -6105,7 +6105,7 @@
           <p:cNvPr id="7" name="core-label-0">
             <a:extLst xmlns:a="http://schemas.openxmlformats.org/drawingml/2006/main">
               <a:ext uri="{FF2B5EF4-FFF2-40B4-BE49-F238E27FC236}">
-                <a16:creationId xmlns:a16="http://schemas.microsoft.com/office/drawing/2014/main" id="{FAF8A975-E567-4745-8244-0A28F99354A0}"/>
+                <a16:creationId xmlns:a16="http://schemas.microsoft.com/office/drawing/2014/main" id="{74878BB0-07DA-4EFC-B7A7-EB903D704A59}"/>
               </a:ext>
             </a:extLst>
           </p:cNvPr>
@@ -6163,7 +6163,7 @@
           <p:cNvPr id="8" name="core-body-0">
             <a:extLst xmlns:a="http://schemas.openxmlformats.org/drawingml/2006/main">
               <a:ext uri="{FF2B5EF4-FFF2-40B4-BE49-F238E27FC236}">
-                <a16:creationId xmlns:a16="http://schemas.microsoft.com/office/drawing/2014/main" id="{BCA7202D-3980-4A00-BEE5-6096C22EE6E2}"/>
+                <a16:creationId xmlns:a16="http://schemas.microsoft.com/office/drawing/2014/main" id="{23B1FEE4-7EAE-43C3-9757-562B4CDD31FA}"/>
               </a:ext>
             </a:extLst>
           </p:cNvPr>
@@ -6227,7 +6227,7 @@
           <p:cNvPr id="9" name="core-no-1">
             <a:extLst xmlns:a="http://schemas.openxmlformats.org/drawingml/2006/main">
               <a:ext uri="{FF2B5EF4-FFF2-40B4-BE49-F238E27FC236}">
-                <a16:creationId xmlns:a16="http://schemas.microsoft.com/office/drawing/2014/main" id="{3320B41E-2D27-45F6-8A57-8C45495DFEEB}"/>
+                <a16:creationId xmlns:a16="http://schemas.microsoft.com/office/drawing/2014/main" id="{7808B174-5AC5-423B-AB61-4EE3BDE84771}"/>
               </a:ext>
             </a:extLst>
           </p:cNvPr>
@@ -6285,7 +6285,7 @@
           <p:cNvPr id="10" name="core-body-1">
             <a:extLst xmlns:a="http://schemas.openxmlformats.org/drawingml/2006/main">
               <a:ext uri="{FF2B5EF4-FFF2-40B4-BE49-F238E27FC236}">
-                <a16:creationId xmlns:a16="http://schemas.microsoft.com/office/drawing/2014/main" id="{12C98C74-D438-4A86-A9D1-6D53499B7B50}"/>
+                <a16:creationId xmlns:a16="http://schemas.microsoft.com/office/drawing/2014/main" id="{91BBFD97-4EBE-4A69-90B2-E689181AAB87}"/>
               </a:ext>
             </a:extLst>
           </p:cNvPr>
@@ -6349,7 +6349,7 @@
           <p:cNvPr id="11" name="s4-takeaway-rule">
             <a:extLst xmlns:a="http://schemas.openxmlformats.org/drawingml/2006/main">
               <a:ext uri="{FF2B5EF4-FFF2-40B4-BE49-F238E27FC236}">
-                <a16:creationId xmlns:a16="http://schemas.microsoft.com/office/drawing/2014/main" id="{4F0F63F1-05FB-4504-995B-82605F8F67C5}"/>
+                <a16:creationId xmlns:a16="http://schemas.microsoft.com/office/drawing/2014/main" id="{6113BF01-1E46-45C5-A869-762F940E2063}"/>
               </a:ext>
             </a:extLst>
           </p:cNvPr>
@@ -6382,7 +6382,7 @@
           <p:cNvPr id="12" name="s4-takeaway">
             <a:extLst xmlns:a="http://schemas.openxmlformats.org/drawingml/2006/main">
               <a:ext uri="{FF2B5EF4-FFF2-40B4-BE49-F238E27FC236}">
-                <a16:creationId xmlns:a16="http://schemas.microsoft.com/office/drawing/2014/main" id="{85AF3C49-3652-40C2-962D-7F15B2F38419}"/>
+                <a16:creationId xmlns:a16="http://schemas.microsoft.com/office/drawing/2014/main" id="{5B6CF906-2F5B-414E-8268-CD54259E0B69}"/>
               </a:ext>
             </a:extLst>
           </p:cNvPr>
@@ -6438,7 +6438,7 @@
     </p:spTree>
     <p:extLst>
       <p:ext uri="{BB962C8B-B14F-4D97-AF65-F5344CB8AC3E}">
-        <p14:creationId xmlns:p14="http://schemas.microsoft.com/office/powerpoint/2010/main" val="1852927058"/>
+        <p14:creationId xmlns:p14="http://schemas.microsoft.com/office/powerpoint/2010/main" val="945961466"/>
       </p:ext>
     </p:extLst>
   </p:cSld>
@@ -6469,7 +6469,7 @@
           <p:cNvPr id="1" name="s5-rule">
             <a:extLst xmlns:a="http://schemas.openxmlformats.org/drawingml/2006/main">
               <a:ext uri="{FF2B5EF4-FFF2-40B4-BE49-F238E27FC236}">
-                <a16:creationId xmlns:a16="http://schemas.microsoft.com/office/drawing/2014/main" id="{236EE527-13CE-4F3A-8FAA-DC2EB07B9B6A}"/>
+                <a16:creationId xmlns:a16="http://schemas.microsoft.com/office/drawing/2014/main" id="{F8CF7A27-B37F-4FD6-A3F2-64D1546B374F}"/>
               </a:ext>
             </a:extLst>
           </p:cNvPr>
@@ -6502,7 +6502,7 @@
           <p:cNvPr id="2" name="s5-eyebrow">
             <a:extLst xmlns:a="http://schemas.openxmlformats.org/drawingml/2006/main">
               <a:ext uri="{FF2B5EF4-FFF2-40B4-BE49-F238E27FC236}">
-                <a16:creationId xmlns:a16="http://schemas.microsoft.com/office/drawing/2014/main" id="{FB07DCCD-ACD8-4708-ACF2-463E7C14ADB7}"/>
+                <a16:creationId xmlns:a16="http://schemas.microsoft.com/office/drawing/2014/main" id="{9644C776-E023-4CF6-A7D2-AB5C408C3365}"/>
               </a:ext>
             </a:extLst>
           </p:cNvPr>
@@ -6560,7 +6560,7 @@
           <p:cNvPr id="3" name="s5-title">
             <a:extLst xmlns:a="http://schemas.openxmlformats.org/drawingml/2006/main">
               <a:ext uri="{FF2B5EF4-FFF2-40B4-BE49-F238E27FC236}">
-                <a16:creationId xmlns:a16="http://schemas.microsoft.com/office/drawing/2014/main" id="{E4C6FDE6-8A31-4640-B6FD-398AA7B67083}"/>
+                <a16:creationId xmlns:a16="http://schemas.microsoft.com/office/drawing/2014/main" id="{C14A997A-2B70-43B9-B864-A6FEC967CAD0}"/>
               </a:ext>
             </a:extLst>
           </p:cNvPr>
@@ -6618,7 +6618,7 @@
           <p:cNvPr id="4" name="s5-footer">
             <a:extLst xmlns:a="http://schemas.openxmlformats.org/drawingml/2006/main">
               <a:ext uri="{FF2B5EF4-FFF2-40B4-BE49-F238E27FC236}">
-                <a16:creationId xmlns:a16="http://schemas.microsoft.com/office/drawing/2014/main" id="{A5D22A03-45C2-4BBB-B945-094DE18373A5}"/>
+                <a16:creationId xmlns:a16="http://schemas.microsoft.com/office/drawing/2014/main" id="{CCC85059-0C77-4D62-B5F8-B9275D060223}"/>
               </a:ext>
             </a:extLst>
           </p:cNvPr>
@@ -6649,7 +6649,7 @@
           <p:cNvPr id="5" name="s5-identity">
             <a:extLst xmlns:a="http://schemas.openxmlformats.org/drawingml/2006/main">
               <a:ext uri="{FF2B5EF4-FFF2-40B4-BE49-F238E27FC236}">
-                <a16:creationId xmlns:a16="http://schemas.microsoft.com/office/drawing/2014/main" id="{73E8DB91-FAC4-4A91-90D8-FA0A118FB6E6}"/>
+                <a16:creationId xmlns:a16="http://schemas.microsoft.com/office/drawing/2014/main" id="{6EA5908A-9D19-494F-8636-1B092A710F3D}"/>
               </a:ext>
             </a:extLst>
           </p:cNvPr>
@@ -6707,7 +6707,7 @@
           <p:cNvPr id="6" name="core-no-0">
             <a:extLst xmlns:a="http://schemas.openxmlformats.org/drawingml/2006/main">
               <a:ext uri="{FF2B5EF4-FFF2-40B4-BE49-F238E27FC236}">
-                <a16:creationId xmlns:a16="http://schemas.microsoft.com/office/drawing/2014/main" id="{269CA39C-9696-4614-878D-F0A87CFA873F}"/>
+                <a16:creationId xmlns:a16="http://schemas.microsoft.com/office/drawing/2014/main" id="{3ABC000C-C0B4-4185-90CF-EC2E0AE63FD5}"/>
               </a:ext>
             </a:extLst>
           </p:cNvPr>
@@ -6765,7 +6765,7 @@
           <p:cNvPr id="7" name="core-label-0">
             <a:extLst xmlns:a="http://schemas.openxmlformats.org/drawingml/2006/main">
               <a:ext uri="{FF2B5EF4-FFF2-40B4-BE49-F238E27FC236}">
-                <a16:creationId xmlns:a16="http://schemas.microsoft.com/office/drawing/2014/main" id="{AC8F27AE-7624-443D-A87F-E33B5C77DF02}"/>
+                <a16:creationId xmlns:a16="http://schemas.microsoft.com/office/drawing/2014/main" id="{4F8F41D6-63D6-4F99-82CD-6455C40049B5}"/>
               </a:ext>
             </a:extLst>
           </p:cNvPr>
@@ -6823,7 +6823,7 @@
           <p:cNvPr id="8" name="core-body-0">
             <a:extLst xmlns:a="http://schemas.openxmlformats.org/drawingml/2006/main">
               <a:ext uri="{FF2B5EF4-FFF2-40B4-BE49-F238E27FC236}">
-                <a16:creationId xmlns:a16="http://schemas.microsoft.com/office/drawing/2014/main" id="{13571F5B-94CD-41F2-9738-B527312243A4}"/>
+                <a16:creationId xmlns:a16="http://schemas.microsoft.com/office/drawing/2014/main" id="{7A43E9D6-5D11-4996-A0BB-B4996F0BB9CB}"/>
               </a:ext>
             </a:extLst>
           </p:cNvPr>
@@ -6887,7 +6887,7 @@
           <p:cNvPr id="9" name="core-no-1">
             <a:extLst xmlns:a="http://schemas.openxmlformats.org/drawingml/2006/main">
               <a:ext uri="{FF2B5EF4-FFF2-40B4-BE49-F238E27FC236}">
-                <a16:creationId xmlns:a16="http://schemas.microsoft.com/office/drawing/2014/main" id="{5B26CDC4-AAF0-463A-B0C6-06ACCB0F1489}"/>
+                <a16:creationId xmlns:a16="http://schemas.microsoft.com/office/drawing/2014/main" id="{553E3BA2-6BA3-449C-B1C6-2947BD7BBA7A}"/>
               </a:ext>
             </a:extLst>
           </p:cNvPr>
@@ -6945,7 +6945,7 @@
           <p:cNvPr id="10" name="core-body-1">
             <a:extLst xmlns:a="http://schemas.openxmlformats.org/drawingml/2006/main">
               <a:ext uri="{FF2B5EF4-FFF2-40B4-BE49-F238E27FC236}">
-                <a16:creationId xmlns:a16="http://schemas.microsoft.com/office/drawing/2014/main" id="{7D2A49B3-BAA6-4E2A-A5E6-479FD68F4E7F}"/>
+                <a16:creationId xmlns:a16="http://schemas.microsoft.com/office/drawing/2014/main" id="{E6699D95-26D1-4C19-8AFF-832EE62EEBFA}"/>
               </a:ext>
             </a:extLst>
           </p:cNvPr>
@@ -7009,7 +7009,7 @@
           <p:cNvPr id="11" name="core-no-2">
             <a:extLst xmlns:a="http://schemas.openxmlformats.org/drawingml/2006/main">
               <a:ext uri="{FF2B5EF4-FFF2-40B4-BE49-F238E27FC236}">
-                <a16:creationId xmlns:a16="http://schemas.microsoft.com/office/drawing/2014/main" id="{5D92C6A5-6BB2-4EBE-A07F-AFB916162182}"/>
+                <a16:creationId xmlns:a16="http://schemas.microsoft.com/office/drawing/2014/main" id="{76B95A55-3252-428D-A0CF-D74A799A693C}"/>
               </a:ext>
             </a:extLst>
           </p:cNvPr>
@@ -7067,7 +7067,7 @@
           <p:cNvPr id="12" name="core-body-2">
             <a:extLst xmlns:a="http://schemas.openxmlformats.org/drawingml/2006/main">
               <a:ext uri="{FF2B5EF4-FFF2-40B4-BE49-F238E27FC236}">
-                <a16:creationId xmlns:a16="http://schemas.microsoft.com/office/drawing/2014/main" id="{8F5A0DED-3EF1-4A64-8666-893862198174}"/>
+                <a16:creationId xmlns:a16="http://schemas.microsoft.com/office/drawing/2014/main" id="{44681623-74A4-4612-8C20-68CB3B17BB1D}"/>
               </a:ext>
             </a:extLst>
           </p:cNvPr>
@@ -7131,7 +7131,7 @@
           <p:cNvPr id="13" name="s5-takeaway-rule">
             <a:extLst xmlns:a="http://schemas.openxmlformats.org/drawingml/2006/main">
               <a:ext uri="{FF2B5EF4-FFF2-40B4-BE49-F238E27FC236}">
-                <a16:creationId xmlns:a16="http://schemas.microsoft.com/office/drawing/2014/main" id="{D4CCD993-EEC2-49C4-BCD2-DBBD79A234A3}"/>
+                <a16:creationId xmlns:a16="http://schemas.microsoft.com/office/drawing/2014/main" id="{6CDE1B1B-A092-439A-8FF9-0E1DE58ECFB3}"/>
               </a:ext>
             </a:extLst>
           </p:cNvPr>
@@ -7164,7 +7164,7 @@
           <p:cNvPr id="14" name="s5-takeaway">
             <a:extLst xmlns:a="http://schemas.openxmlformats.org/drawingml/2006/main">
               <a:ext uri="{FF2B5EF4-FFF2-40B4-BE49-F238E27FC236}">
-                <a16:creationId xmlns:a16="http://schemas.microsoft.com/office/drawing/2014/main" id="{7283ADBF-1D1E-402D-A6E1-3F86D04C8C71}"/>
+                <a16:creationId xmlns:a16="http://schemas.microsoft.com/office/drawing/2014/main" id="{4403C38C-B2CE-405F-A695-600F09CEFF0F}"/>
               </a:ext>
             </a:extLst>
           </p:cNvPr>
@@ -7220,7 +7220,7 @@
     </p:spTree>
     <p:extLst>
       <p:ext uri="{BB962C8B-B14F-4D97-AF65-F5344CB8AC3E}">
-        <p14:creationId xmlns:p14="http://schemas.microsoft.com/office/powerpoint/2010/main" val="1076684930"/>
+        <p14:creationId xmlns:p14="http://schemas.microsoft.com/office/powerpoint/2010/main" val="989756043"/>
       </p:ext>
     </p:extLst>
   </p:cSld>
@@ -7251,7 +7251,7 @@
           <p:cNvPr id="1" name="s6-rule">
             <a:extLst xmlns:a="http://schemas.openxmlformats.org/drawingml/2006/main">
               <a:ext uri="{FF2B5EF4-FFF2-40B4-BE49-F238E27FC236}">
-                <a16:creationId xmlns:a16="http://schemas.microsoft.com/office/drawing/2014/main" id="{65388650-E4BE-42B6-8344-E1FD0918CBED}"/>
+                <a16:creationId xmlns:a16="http://schemas.microsoft.com/office/drawing/2014/main" id="{A6E0D0CB-D3F6-4FB8-9588-FE5939B802AD}"/>
               </a:ext>
             </a:extLst>
           </p:cNvPr>
@@ -7284,7 +7284,7 @@
           <p:cNvPr id="2" name="s6-eyebrow">
             <a:extLst xmlns:a="http://schemas.openxmlformats.org/drawingml/2006/main">
               <a:ext uri="{FF2B5EF4-FFF2-40B4-BE49-F238E27FC236}">
-                <a16:creationId xmlns:a16="http://schemas.microsoft.com/office/drawing/2014/main" id="{E2E05B43-2F25-4AEA-8643-57F55BF47573}"/>
+                <a16:creationId xmlns:a16="http://schemas.microsoft.com/office/drawing/2014/main" id="{B6F92ABA-048F-4007-A2E4-F674A0597327}"/>
               </a:ext>
             </a:extLst>
           </p:cNvPr>
@@ -7342,7 +7342,7 @@
           <p:cNvPr id="3" name="s6-title">
             <a:extLst xmlns:a="http://schemas.openxmlformats.org/drawingml/2006/main">
               <a:ext uri="{FF2B5EF4-FFF2-40B4-BE49-F238E27FC236}">
-                <a16:creationId xmlns:a16="http://schemas.microsoft.com/office/drawing/2014/main" id="{16F3D326-3D6B-4758-90B8-A4080E4F8B10}"/>
+                <a16:creationId xmlns:a16="http://schemas.microsoft.com/office/drawing/2014/main" id="{1E68EE35-E870-40BF-851F-6A8BAFCCC061}"/>
               </a:ext>
             </a:extLst>
           </p:cNvPr>
@@ -7400,7 +7400,7 @@
           <p:cNvPr id="4" name="s6-footer">
             <a:extLst xmlns:a="http://schemas.openxmlformats.org/drawingml/2006/main">
               <a:ext uri="{FF2B5EF4-FFF2-40B4-BE49-F238E27FC236}">
-                <a16:creationId xmlns:a16="http://schemas.microsoft.com/office/drawing/2014/main" id="{E9D45DC3-3793-43D6-B357-BE8846C3A379}"/>
+                <a16:creationId xmlns:a16="http://schemas.microsoft.com/office/drawing/2014/main" id="{FB35A3A4-18A9-4CE3-A24B-8342B10A03E2}"/>
               </a:ext>
             </a:extLst>
           </p:cNvPr>
@@ -7431,7 +7431,7 @@
           <p:cNvPr id="5" name="s6-identity">
             <a:extLst xmlns:a="http://schemas.openxmlformats.org/drawingml/2006/main">
               <a:ext uri="{FF2B5EF4-FFF2-40B4-BE49-F238E27FC236}">
-                <a16:creationId xmlns:a16="http://schemas.microsoft.com/office/drawing/2014/main" id="{834304A2-17D2-4523-BF06-F4A669128574}"/>
+                <a16:creationId xmlns:a16="http://schemas.microsoft.com/office/drawing/2014/main" id="{CC51A361-DB64-456E-8FED-953187842C1D}"/>
               </a:ext>
             </a:extLst>
           </p:cNvPr>
@@ -7489,7 +7489,7 @@
           <p:cNvPr id="6" name="core-no-0">
             <a:extLst xmlns:a="http://schemas.openxmlformats.org/drawingml/2006/main">
               <a:ext uri="{FF2B5EF4-FFF2-40B4-BE49-F238E27FC236}">
-                <a16:creationId xmlns:a16="http://schemas.microsoft.com/office/drawing/2014/main" id="{722CDB3A-ADEA-421C-9A55-1383FDC1EAD1}"/>
+                <a16:creationId xmlns:a16="http://schemas.microsoft.com/office/drawing/2014/main" id="{97DD9ECE-08E6-4018-991D-F0561FD80F38}"/>
               </a:ext>
             </a:extLst>
           </p:cNvPr>
@@ -7547,7 +7547,7 @@
           <p:cNvPr id="7" name="core-label-0">
             <a:extLst xmlns:a="http://schemas.openxmlformats.org/drawingml/2006/main">
               <a:ext uri="{FF2B5EF4-FFF2-40B4-BE49-F238E27FC236}">
-                <a16:creationId xmlns:a16="http://schemas.microsoft.com/office/drawing/2014/main" id="{FFF5C36D-C547-47CE-AF45-403259D2EEA7}"/>
+                <a16:creationId xmlns:a16="http://schemas.microsoft.com/office/drawing/2014/main" id="{0CD36978-94D2-4E17-A09E-1BE920C0FE91}"/>
               </a:ext>
             </a:extLst>
           </p:cNvPr>
@@ -7605,7 +7605,7 @@
           <p:cNvPr id="8" name="core-body-0">
             <a:extLst xmlns:a="http://schemas.openxmlformats.org/drawingml/2006/main">
               <a:ext uri="{FF2B5EF4-FFF2-40B4-BE49-F238E27FC236}">
-                <a16:creationId xmlns:a16="http://schemas.microsoft.com/office/drawing/2014/main" id="{0CF55F0A-88AD-4075-ADC5-49792659B470}"/>
+                <a16:creationId xmlns:a16="http://schemas.microsoft.com/office/drawing/2014/main" id="{AB0237EE-F1BB-4FB6-A180-48914ED2FAB2}"/>
               </a:ext>
             </a:extLst>
           </p:cNvPr>
@@ -7669,7 +7669,7 @@
           <p:cNvPr id="9" name="core-no-1">
             <a:extLst xmlns:a="http://schemas.openxmlformats.org/drawingml/2006/main">
               <a:ext uri="{FF2B5EF4-FFF2-40B4-BE49-F238E27FC236}">
-                <a16:creationId xmlns:a16="http://schemas.microsoft.com/office/drawing/2014/main" id="{0762B328-24DB-40C7-BED2-541E405CD177}"/>
+                <a16:creationId xmlns:a16="http://schemas.microsoft.com/office/drawing/2014/main" id="{3603E60C-1446-4CC9-A41F-2884D15D995F}"/>
               </a:ext>
             </a:extLst>
           </p:cNvPr>
@@ -7727,7 +7727,7 @@
           <p:cNvPr id="10" name="core-body-1">
             <a:extLst xmlns:a="http://schemas.openxmlformats.org/drawingml/2006/main">
               <a:ext uri="{FF2B5EF4-FFF2-40B4-BE49-F238E27FC236}">
-                <a16:creationId xmlns:a16="http://schemas.microsoft.com/office/drawing/2014/main" id="{03D75B01-D62B-4146-9DC6-59749B1F9243}"/>
+                <a16:creationId xmlns:a16="http://schemas.microsoft.com/office/drawing/2014/main" id="{619D767D-692B-4607-87AB-89015830E8C9}"/>
               </a:ext>
             </a:extLst>
           </p:cNvPr>
@@ -7791,7 +7791,7 @@
           <p:cNvPr id="11" name="core-no-2">
             <a:extLst xmlns:a="http://schemas.openxmlformats.org/drawingml/2006/main">
               <a:ext uri="{FF2B5EF4-FFF2-40B4-BE49-F238E27FC236}">
-                <a16:creationId xmlns:a16="http://schemas.microsoft.com/office/drawing/2014/main" id="{A5988449-63E1-407C-B48A-87738FBF3106}"/>
+                <a16:creationId xmlns:a16="http://schemas.microsoft.com/office/drawing/2014/main" id="{800B6A04-B05B-4EB2-ADD0-E8903EBD4B02}"/>
               </a:ext>
             </a:extLst>
           </p:cNvPr>
@@ -7849,7 +7849,7 @@
           <p:cNvPr id="12" name="core-body-2">
             <a:extLst xmlns:a="http://schemas.openxmlformats.org/drawingml/2006/main">
               <a:ext uri="{FF2B5EF4-FFF2-40B4-BE49-F238E27FC236}">
-                <a16:creationId xmlns:a16="http://schemas.microsoft.com/office/drawing/2014/main" id="{A302FC03-478D-4054-8E19-40467D86EA6A}"/>
+                <a16:creationId xmlns:a16="http://schemas.microsoft.com/office/drawing/2014/main" id="{B6FC5525-718D-4429-897E-9B40BEC052C8}"/>
               </a:ext>
             </a:extLst>
           </p:cNvPr>
@@ -7913,7 +7913,7 @@
           <p:cNvPr id="13" name="s6-takeaway-rule">
             <a:extLst xmlns:a="http://schemas.openxmlformats.org/drawingml/2006/main">
               <a:ext uri="{FF2B5EF4-FFF2-40B4-BE49-F238E27FC236}">
-                <a16:creationId xmlns:a16="http://schemas.microsoft.com/office/drawing/2014/main" id="{4CC9BD27-7592-4E03-8382-28F8C156F956}"/>
+                <a16:creationId xmlns:a16="http://schemas.microsoft.com/office/drawing/2014/main" id="{57C59314-811F-428D-A8B3-3EECDF6EC6DD}"/>
               </a:ext>
             </a:extLst>
           </p:cNvPr>
@@ -7946,7 +7946,7 @@
           <p:cNvPr id="14" name="s6-takeaway">
             <a:extLst xmlns:a="http://schemas.openxmlformats.org/drawingml/2006/main">
               <a:ext uri="{FF2B5EF4-FFF2-40B4-BE49-F238E27FC236}">
-                <a16:creationId xmlns:a16="http://schemas.microsoft.com/office/drawing/2014/main" id="{F388C87F-9C79-4E42-A568-F2EDC6DAD6D3}"/>
+                <a16:creationId xmlns:a16="http://schemas.microsoft.com/office/drawing/2014/main" id="{F9CB175B-D44D-4CE8-BD3F-624D97F750F0}"/>
               </a:ext>
             </a:extLst>
           </p:cNvPr>
@@ -8002,7 +8002,7 @@
     </p:spTree>
     <p:extLst>
       <p:ext uri="{BB962C8B-B14F-4D97-AF65-F5344CB8AC3E}">
-        <p14:creationId xmlns:p14="http://schemas.microsoft.com/office/powerpoint/2010/main" val="550041441"/>
+        <p14:creationId xmlns:p14="http://schemas.microsoft.com/office/powerpoint/2010/main" val="196410897"/>
       </p:ext>
     </p:extLst>
   </p:cSld>
@@ -8033,7 +8033,7 @@
           <p:cNvPr id="1" name="s7-rule">
             <a:extLst xmlns:a="http://schemas.openxmlformats.org/drawingml/2006/main">
               <a:ext uri="{FF2B5EF4-FFF2-40B4-BE49-F238E27FC236}">
-                <a16:creationId xmlns:a16="http://schemas.microsoft.com/office/drawing/2014/main" id="{7849C532-09A6-4A29-9BB0-928F6677749D}"/>
+                <a16:creationId xmlns:a16="http://schemas.microsoft.com/office/drawing/2014/main" id="{AD04CA57-BE2F-4CD9-A270-ED920AC2DA6D}"/>
               </a:ext>
             </a:extLst>
           </p:cNvPr>
@@ -8066,7 +8066,7 @@
           <p:cNvPr id="2" name="s7-eyebrow">
             <a:extLst xmlns:a="http://schemas.openxmlformats.org/drawingml/2006/main">
               <a:ext uri="{FF2B5EF4-FFF2-40B4-BE49-F238E27FC236}">
-                <a16:creationId xmlns:a16="http://schemas.microsoft.com/office/drawing/2014/main" id="{96544C0E-DA34-41E4-945A-9C5E5E0E5B03}"/>
+                <a16:creationId xmlns:a16="http://schemas.microsoft.com/office/drawing/2014/main" id="{8CCA2643-17EF-4F55-AF66-BE85CB09C65F}"/>
               </a:ext>
             </a:extLst>
           </p:cNvPr>
@@ -8124,7 +8124,7 @@
           <p:cNvPr id="3" name="s7-title">
             <a:extLst xmlns:a="http://schemas.openxmlformats.org/drawingml/2006/main">
               <a:ext uri="{FF2B5EF4-FFF2-40B4-BE49-F238E27FC236}">
-                <a16:creationId xmlns:a16="http://schemas.microsoft.com/office/drawing/2014/main" id="{40CCF39D-1B7D-4FB9-8A94-421830F207F5}"/>
+                <a16:creationId xmlns:a16="http://schemas.microsoft.com/office/drawing/2014/main" id="{101D8ECD-8713-4A3C-8B43-20C2265851F9}"/>
               </a:ext>
             </a:extLst>
           </p:cNvPr>
@@ -8182,7 +8182,7 @@
           <p:cNvPr id="4" name="s7-footer">
             <a:extLst xmlns:a="http://schemas.openxmlformats.org/drawingml/2006/main">
               <a:ext uri="{FF2B5EF4-FFF2-40B4-BE49-F238E27FC236}">
-                <a16:creationId xmlns:a16="http://schemas.microsoft.com/office/drawing/2014/main" id="{E9736EDF-7968-4DE0-9903-AD5CA5307452}"/>
+                <a16:creationId xmlns:a16="http://schemas.microsoft.com/office/drawing/2014/main" id="{7E82A123-C6B2-4042-81A0-47D8C49B20EE}"/>
               </a:ext>
             </a:extLst>
           </p:cNvPr>
@@ -8213,7 +8213,7 @@
           <p:cNvPr id="5" name="s7-identity">
             <a:extLst xmlns:a="http://schemas.openxmlformats.org/drawingml/2006/main">
               <a:ext uri="{FF2B5EF4-FFF2-40B4-BE49-F238E27FC236}">
-                <a16:creationId xmlns:a16="http://schemas.microsoft.com/office/drawing/2014/main" id="{09610E09-8DDB-4BB0-851B-7232AE70B33A}"/>
+                <a16:creationId xmlns:a16="http://schemas.microsoft.com/office/drawing/2014/main" id="{C31FCFDF-BCA7-4DE0-9A27-D77C471D40EA}"/>
               </a:ext>
             </a:extLst>
           </p:cNvPr>
@@ -8271,7 +8271,7 @@
           <p:cNvPr id="6" name="core-no-0">
             <a:extLst xmlns:a="http://schemas.openxmlformats.org/drawingml/2006/main">
               <a:ext uri="{FF2B5EF4-FFF2-40B4-BE49-F238E27FC236}">
-                <a16:creationId xmlns:a16="http://schemas.microsoft.com/office/drawing/2014/main" id="{A1D13064-8AD6-4245-81DE-5C6A81D3DC33}"/>
+                <a16:creationId xmlns:a16="http://schemas.microsoft.com/office/drawing/2014/main" id="{C69899EA-FAF0-433F-921E-D0BCB1F85F4F}"/>
               </a:ext>
             </a:extLst>
           </p:cNvPr>
@@ -8329,7 +8329,7 @@
           <p:cNvPr id="7" name="core-label-0">
             <a:extLst xmlns:a="http://schemas.openxmlformats.org/drawingml/2006/main">
               <a:ext uri="{FF2B5EF4-FFF2-40B4-BE49-F238E27FC236}">
-                <a16:creationId xmlns:a16="http://schemas.microsoft.com/office/drawing/2014/main" id="{5788B96F-62A3-439C-A511-54D69F978CB9}"/>
+                <a16:creationId xmlns:a16="http://schemas.microsoft.com/office/drawing/2014/main" id="{EDF3EAC1-744F-4234-8E80-C84BC2A97644}"/>
               </a:ext>
             </a:extLst>
           </p:cNvPr>
@@ -8387,7 +8387,7 @@
           <p:cNvPr id="8" name="core-body-0">
             <a:extLst xmlns:a="http://schemas.openxmlformats.org/drawingml/2006/main">
               <a:ext uri="{FF2B5EF4-FFF2-40B4-BE49-F238E27FC236}">
-                <a16:creationId xmlns:a16="http://schemas.microsoft.com/office/drawing/2014/main" id="{70F74150-BF2A-49A4-AF64-3D63D1BB9F92}"/>
+                <a16:creationId xmlns:a16="http://schemas.microsoft.com/office/drawing/2014/main" id="{8CA1D03B-D0C1-4867-B3B2-0B41CA401931}"/>
               </a:ext>
             </a:extLst>
           </p:cNvPr>
@@ -8451,7 +8451,7 @@
           <p:cNvPr id="9" name="core-no-1">
             <a:extLst xmlns:a="http://schemas.openxmlformats.org/drawingml/2006/main">
               <a:ext uri="{FF2B5EF4-FFF2-40B4-BE49-F238E27FC236}">
-                <a16:creationId xmlns:a16="http://schemas.microsoft.com/office/drawing/2014/main" id="{03B15868-659F-42A0-9AC2-C7EC959279E6}"/>
+                <a16:creationId xmlns:a16="http://schemas.microsoft.com/office/drawing/2014/main" id="{55E17762-6F0E-4B0A-8DDF-13F491505707}"/>
               </a:ext>
             </a:extLst>
           </p:cNvPr>
@@ -8509,7 +8509,7 @@
           <p:cNvPr id="10" name="core-body-1">
             <a:extLst xmlns:a="http://schemas.openxmlformats.org/drawingml/2006/main">
               <a:ext uri="{FF2B5EF4-FFF2-40B4-BE49-F238E27FC236}">
-                <a16:creationId xmlns:a16="http://schemas.microsoft.com/office/drawing/2014/main" id="{471A5740-C2BD-4418-A91E-20BBEBFD9F11}"/>
+                <a16:creationId xmlns:a16="http://schemas.microsoft.com/office/drawing/2014/main" id="{C67F7505-45A3-4B2A-A272-B0AC57B41FCA}"/>
               </a:ext>
             </a:extLst>
           </p:cNvPr>
@@ -8573,7 +8573,7 @@
           <p:cNvPr id="11" name="s7-takeaway-rule">
             <a:extLst xmlns:a="http://schemas.openxmlformats.org/drawingml/2006/main">
               <a:ext uri="{FF2B5EF4-FFF2-40B4-BE49-F238E27FC236}">
-                <a16:creationId xmlns:a16="http://schemas.microsoft.com/office/drawing/2014/main" id="{000FEF79-A6B1-48DD-B517-66CFFBD41CF6}"/>
+                <a16:creationId xmlns:a16="http://schemas.microsoft.com/office/drawing/2014/main" id="{EA5D07EB-68B4-4D55-9D10-2E4FEC0ECDA8}"/>
               </a:ext>
             </a:extLst>
           </p:cNvPr>
@@ -8606,7 +8606,7 @@
           <p:cNvPr id="12" name="s7-takeaway">
             <a:extLst xmlns:a="http://schemas.openxmlformats.org/drawingml/2006/main">
               <a:ext uri="{FF2B5EF4-FFF2-40B4-BE49-F238E27FC236}">
-                <a16:creationId xmlns:a16="http://schemas.microsoft.com/office/drawing/2014/main" id="{DC0C0E0B-532F-40EB-8392-C8183D25729A}"/>
+                <a16:creationId xmlns:a16="http://schemas.microsoft.com/office/drawing/2014/main" id="{15C82FE3-14D9-4946-B234-CDEC6201B06B}"/>
               </a:ext>
             </a:extLst>
           </p:cNvPr>
@@ -8662,7 +8662,7 @@
     </p:spTree>
     <p:extLst>
       <p:ext uri="{BB962C8B-B14F-4D97-AF65-F5344CB8AC3E}">
-        <p14:creationId xmlns:p14="http://schemas.microsoft.com/office/powerpoint/2010/main" val="1754529391"/>
+        <p14:creationId xmlns:p14="http://schemas.microsoft.com/office/powerpoint/2010/main" val="1516500243"/>
       </p:ext>
     </p:extLst>
   </p:cSld>
@@ -8693,7 +8693,7 @@
           <p:cNvPr id="1" name="s8-rule">
             <a:extLst xmlns:a="http://schemas.openxmlformats.org/drawingml/2006/main">
               <a:ext uri="{FF2B5EF4-FFF2-40B4-BE49-F238E27FC236}">
-                <a16:creationId xmlns:a16="http://schemas.microsoft.com/office/drawing/2014/main" id="{CC099062-565F-4654-9805-FDD7ED2D2D92}"/>
+                <a16:creationId xmlns:a16="http://schemas.microsoft.com/office/drawing/2014/main" id="{76AA9C96-A5BC-4733-98E5-DC178202DBCC}"/>
               </a:ext>
             </a:extLst>
           </p:cNvPr>
@@ -8726,7 +8726,7 @@
           <p:cNvPr id="2" name="s8-eyebrow">
             <a:extLst xmlns:a="http://schemas.openxmlformats.org/drawingml/2006/main">
               <a:ext uri="{FF2B5EF4-FFF2-40B4-BE49-F238E27FC236}">
-                <a16:creationId xmlns:a16="http://schemas.microsoft.com/office/drawing/2014/main" id="{50A0E5C5-73D6-4435-867A-74874F25C452}"/>
+                <a16:creationId xmlns:a16="http://schemas.microsoft.com/office/drawing/2014/main" id="{620403B2-7421-414B-A96C-E4A852BEC6FB}"/>
               </a:ext>
             </a:extLst>
           </p:cNvPr>
@@ -8784,7 +8784,7 @@
           <p:cNvPr id="3" name="s8-title">
             <a:extLst xmlns:a="http://schemas.openxmlformats.org/drawingml/2006/main">
               <a:ext uri="{FF2B5EF4-FFF2-40B4-BE49-F238E27FC236}">
-                <a16:creationId xmlns:a16="http://schemas.microsoft.com/office/drawing/2014/main" id="{6A530503-BD51-4953-BB5E-B63914FC69FC}"/>
+                <a16:creationId xmlns:a16="http://schemas.microsoft.com/office/drawing/2014/main" id="{B4AD25A6-2086-4BA0-81D0-A06E01B47194}"/>
               </a:ext>
             </a:extLst>
           </p:cNvPr>
@@ -8842,7 +8842,7 @@
           <p:cNvPr id="4" name="s8-footer">
             <a:extLst xmlns:a="http://schemas.openxmlformats.org/drawingml/2006/main">
               <a:ext uri="{FF2B5EF4-FFF2-40B4-BE49-F238E27FC236}">
-                <a16:creationId xmlns:a16="http://schemas.microsoft.com/office/drawing/2014/main" id="{B479E18F-10AB-4C12-B2DF-59EE36236ADD}"/>
+                <a16:creationId xmlns:a16="http://schemas.microsoft.com/office/drawing/2014/main" id="{AD73BB22-60DA-4693-9AD5-7EFE512B71DD}"/>
               </a:ext>
             </a:extLst>
           </p:cNvPr>
@@ -8873,7 +8873,7 @@
           <p:cNvPr id="5" name="s8-identity">
             <a:extLst xmlns:a="http://schemas.openxmlformats.org/drawingml/2006/main">
               <a:ext uri="{FF2B5EF4-FFF2-40B4-BE49-F238E27FC236}">
-                <a16:creationId xmlns:a16="http://schemas.microsoft.com/office/drawing/2014/main" id="{E589DCEA-5539-4316-A1E1-63FA92556ADA}"/>
+                <a16:creationId xmlns:a16="http://schemas.microsoft.com/office/drawing/2014/main" id="{33335C1C-B8E6-403F-8755-307366EADF0B}"/>
               </a:ext>
             </a:extLst>
           </p:cNvPr>
@@ -8931,7 +8931,7 @@
           <p:cNvPr id="6" name="core-no-0">
             <a:extLst xmlns:a="http://schemas.openxmlformats.org/drawingml/2006/main">
               <a:ext uri="{FF2B5EF4-FFF2-40B4-BE49-F238E27FC236}">
-                <a16:creationId xmlns:a16="http://schemas.microsoft.com/office/drawing/2014/main" id="{5AC288A6-2090-4823-861F-BC484F2F0E47}"/>
+                <a16:creationId xmlns:a16="http://schemas.microsoft.com/office/drawing/2014/main" id="{ED2EB074-91C9-4F62-B6B7-FBE3B983241A}"/>
               </a:ext>
             </a:extLst>
           </p:cNvPr>
@@ -8989,7 +8989,7 @@
           <p:cNvPr id="7" name="core-label-0">
             <a:extLst xmlns:a="http://schemas.openxmlformats.org/drawingml/2006/main">
               <a:ext uri="{FF2B5EF4-FFF2-40B4-BE49-F238E27FC236}">
-                <a16:creationId xmlns:a16="http://schemas.microsoft.com/office/drawing/2014/main" id="{D40D2D98-3C22-4065-85F6-D3E0B77A5DA0}"/>
+                <a16:creationId xmlns:a16="http://schemas.microsoft.com/office/drawing/2014/main" id="{3E4DB6A9-3FEE-43D5-95FE-61BC3B1C9F45}"/>
               </a:ext>
             </a:extLst>
           </p:cNvPr>
@@ -9047,7 +9047,7 @@
           <p:cNvPr id="8" name="core-body-0">
             <a:extLst xmlns:a="http://schemas.openxmlformats.org/drawingml/2006/main">
               <a:ext uri="{FF2B5EF4-FFF2-40B4-BE49-F238E27FC236}">
-                <a16:creationId xmlns:a16="http://schemas.microsoft.com/office/drawing/2014/main" id="{707146BB-3084-4548-9049-098A3C259DD3}"/>
+                <a16:creationId xmlns:a16="http://schemas.microsoft.com/office/drawing/2014/main" id="{3A7AE58C-BB48-457E-8F0A-2DC0A18CE272}"/>
               </a:ext>
             </a:extLst>
           </p:cNvPr>
@@ -9111,7 +9111,7 @@
           <p:cNvPr id="9" name="core-no-1">
             <a:extLst xmlns:a="http://schemas.openxmlformats.org/drawingml/2006/main">
               <a:ext uri="{FF2B5EF4-FFF2-40B4-BE49-F238E27FC236}">
-                <a16:creationId xmlns:a16="http://schemas.microsoft.com/office/drawing/2014/main" id="{015AB12A-40E0-466C-B3BF-87628D2D59EE}"/>
+                <a16:creationId xmlns:a16="http://schemas.microsoft.com/office/drawing/2014/main" id="{31E0A6C1-6466-48B2-977B-F7CAA41CBD95}"/>
               </a:ext>
             </a:extLst>
           </p:cNvPr>
@@ -9169,7 +9169,7 @@
           <p:cNvPr id="10" name="core-body-1">
             <a:extLst xmlns:a="http://schemas.openxmlformats.org/drawingml/2006/main">
               <a:ext uri="{FF2B5EF4-FFF2-40B4-BE49-F238E27FC236}">
-                <a16:creationId xmlns:a16="http://schemas.microsoft.com/office/drawing/2014/main" id="{21560A05-9080-4608-BA23-C14EBE40E808}"/>
+                <a16:creationId xmlns:a16="http://schemas.microsoft.com/office/drawing/2014/main" id="{98EA3AD8-D81F-486F-A348-FE2FD4EB6FE9}"/>
               </a:ext>
             </a:extLst>
           </p:cNvPr>
@@ -9233,7 +9233,7 @@
           <p:cNvPr id="11" name="s8-takeaway-rule">
             <a:extLst xmlns:a="http://schemas.openxmlformats.org/drawingml/2006/main">
               <a:ext uri="{FF2B5EF4-FFF2-40B4-BE49-F238E27FC236}">
-                <a16:creationId xmlns:a16="http://schemas.microsoft.com/office/drawing/2014/main" id="{86B80CF6-9114-496D-9BA5-672DCE6BBDCB}"/>
+                <a16:creationId xmlns:a16="http://schemas.microsoft.com/office/drawing/2014/main" id="{EEF07193-BA1D-4247-A66B-EF91EB654D18}"/>
               </a:ext>
             </a:extLst>
           </p:cNvPr>
@@ -9266,7 +9266,7 @@
           <p:cNvPr id="12" name="s8-takeaway">
             <a:extLst xmlns:a="http://schemas.openxmlformats.org/drawingml/2006/main">
               <a:ext uri="{FF2B5EF4-FFF2-40B4-BE49-F238E27FC236}">
-                <a16:creationId xmlns:a16="http://schemas.microsoft.com/office/drawing/2014/main" id="{C9A28B43-8802-4AD2-A2FD-D1F318FFCBDE}"/>
+                <a16:creationId xmlns:a16="http://schemas.microsoft.com/office/drawing/2014/main" id="{4ED9C8C7-E929-41F0-A880-35391A85B423}"/>
               </a:ext>
             </a:extLst>
           </p:cNvPr>
@@ -9322,7 +9322,7 @@
     </p:spTree>
     <p:extLst>
       <p:ext uri="{BB962C8B-B14F-4D97-AF65-F5344CB8AC3E}">
-        <p14:creationId xmlns:p14="http://schemas.microsoft.com/office/powerpoint/2010/main" val="1240751355"/>
+        <p14:creationId xmlns:p14="http://schemas.microsoft.com/office/powerpoint/2010/main" val="2105058123"/>
       </p:ext>
     </p:extLst>
   </p:cSld>
@@ -9353,7 +9353,7 @@
           <p:cNvPr id="1" name="s9-rule">
             <a:extLst xmlns:a="http://schemas.openxmlformats.org/drawingml/2006/main">
               <a:ext uri="{FF2B5EF4-FFF2-40B4-BE49-F238E27FC236}">
-                <a16:creationId xmlns:a16="http://schemas.microsoft.com/office/drawing/2014/main" id="{B93A6FB1-92AF-4785-8D43-1F4B80934E99}"/>
+                <a16:creationId xmlns:a16="http://schemas.microsoft.com/office/drawing/2014/main" id="{9589EC2F-4EC3-470B-9ACC-D0BB210CBF09}"/>
               </a:ext>
             </a:extLst>
           </p:cNvPr>
@@ -9386,7 +9386,7 @@
           <p:cNvPr id="2" name="s9-eyebrow">
             <a:extLst xmlns:a="http://schemas.openxmlformats.org/drawingml/2006/main">
               <a:ext uri="{FF2B5EF4-FFF2-40B4-BE49-F238E27FC236}">
-                <a16:creationId xmlns:a16="http://schemas.microsoft.com/office/drawing/2014/main" id="{0196FA1E-7F7B-4193-A6C2-CCC18842ABBD}"/>
+                <a16:creationId xmlns:a16="http://schemas.microsoft.com/office/drawing/2014/main" id="{A6DF15AE-B377-4FA6-A860-0D1EB7DA3F18}"/>
               </a:ext>
             </a:extLst>
           </p:cNvPr>
@@ -9444,7 +9444,7 @@
           <p:cNvPr id="3" name="s9-title">
             <a:extLst xmlns:a="http://schemas.openxmlformats.org/drawingml/2006/main">
               <a:ext uri="{FF2B5EF4-FFF2-40B4-BE49-F238E27FC236}">
-                <a16:creationId xmlns:a16="http://schemas.microsoft.com/office/drawing/2014/main" id="{2BAA0A65-A744-4E1E-A022-40EF56841522}"/>
+                <a16:creationId xmlns:a16="http://schemas.microsoft.com/office/drawing/2014/main" id="{0741CDD0-40A9-41D8-8A68-3543895095AD}"/>
               </a:ext>
             </a:extLst>
           </p:cNvPr>
@@ -9502,7 +9502,7 @@
           <p:cNvPr id="4" name="s9-footer">
             <a:extLst xmlns:a="http://schemas.openxmlformats.org/drawingml/2006/main">
               <a:ext uri="{FF2B5EF4-FFF2-40B4-BE49-F238E27FC236}">
-                <a16:creationId xmlns:a16="http://schemas.microsoft.com/office/drawing/2014/main" id="{57A9D9B5-2EF5-48AF-BC45-A07556BD6CE4}"/>
+                <a16:creationId xmlns:a16="http://schemas.microsoft.com/office/drawing/2014/main" id="{7E6C03E2-43B5-4927-AC42-A180A7C34200}"/>
               </a:ext>
             </a:extLst>
           </p:cNvPr>
@@ -9533,7 +9533,7 @@
           <p:cNvPr id="5" name="s9-identity">
             <a:extLst xmlns:a="http://schemas.openxmlformats.org/drawingml/2006/main">
               <a:ext uri="{FF2B5EF4-FFF2-40B4-BE49-F238E27FC236}">
-                <a16:creationId xmlns:a16="http://schemas.microsoft.com/office/drawing/2014/main" id="{083469C7-DE13-4E90-8760-9C976BE4F731}"/>
+                <a16:creationId xmlns:a16="http://schemas.microsoft.com/office/drawing/2014/main" id="{3C8A1A16-26B1-4D47-9A6A-EE916FE55B44}"/>
               </a:ext>
             </a:extLst>
           </p:cNvPr>
@@ -9591,7 +9591,7 @@
           <p:cNvPr id="6" name="case-title">
             <a:extLst xmlns:a="http://schemas.openxmlformats.org/drawingml/2006/main">
               <a:ext uri="{FF2B5EF4-FFF2-40B4-BE49-F238E27FC236}">
-                <a16:creationId xmlns:a16="http://schemas.microsoft.com/office/drawing/2014/main" id="{37BD8E32-D91B-4013-95D3-29CF6874518C}"/>
+                <a16:creationId xmlns:a16="http://schemas.microsoft.com/office/drawing/2014/main" id="{DAE3F824-AF4D-4EE6-B95E-C32BE3A3D688}"/>
               </a:ext>
             </a:extLst>
           </p:cNvPr>
@@ -9655,7 +9655,7 @@
           <p:cNvPr id="7" name="case-row-0">
             <a:extLst xmlns:a="http://schemas.openxmlformats.org/drawingml/2006/main">
               <a:ext uri="{FF2B5EF4-FFF2-40B4-BE49-F238E27FC236}">
-                <a16:creationId xmlns:a16="http://schemas.microsoft.com/office/drawing/2014/main" id="{5E17E852-120C-4EBE-A6CD-6B0BB0FDA8B8}"/>
+                <a16:creationId xmlns:a16="http://schemas.microsoft.com/office/drawing/2014/main" id="{822F4FA4-9148-4064-A3B6-7799544B0871}"/>
               </a:ext>
             </a:extLst>
           </p:cNvPr>
@@ -9719,7 +9719,7 @@
           <p:cNvPr id="8" name="case-row-1">
             <a:extLst xmlns:a="http://schemas.openxmlformats.org/drawingml/2006/main">
               <a:ext uri="{FF2B5EF4-FFF2-40B4-BE49-F238E27FC236}">
-                <a16:creationId xmlns:a16="http://schemas.microsoft.com/office/drawing/2014/main" id="{6C275FAB-8896-473D-B31C-4577F3F6DF95}"/>
+                <a16:creationId xmlns:a16="http://schemas.microsoft.com/office/drawing/2014/main" id="{0F021EDC-546C-43CF-B391-2FB572F0D6DA}"/>
               </a:ext>
             </a:extLst>
           </p:cNvPr>
@@ -9783,7 +9783,7 @@
           <p:cNvPr id="9" name="case-row-2">
             <a:extLst xmlns:a="http://schemas.openxmlformats.org/drawingml/2006/main">
               <a:ext uri="{FF2B5EF4-FFF2-40B4-BE49-F238E27FC236}">
-                <a16:creationId xmlns:a16="http://schemas.microsoft.com/office/drawing/2014/main" id="{B51A2B22-057B-4853-9D6D-952D225E2940}"/>
+                <a16:creationId xmlns:a16="http://schemas.microsoft.com/office/drawing/2014/main" id="{A8539503-9D55-44F0-90F5-52A7254E012E}"/>
               </a:ext>
             </a:extLst>
           </p:cNvPr>
@@ -9847,7 +9847,7 @@
           <p:cNvPr id="10" name="case-row-3">
             <a:extLst xmlns:a="http://schemas.openxmlformats.org/drawingml/2006/main">
               <a:ext uri="{FF2B5EF4-FFF2-40B4-BE49-F238E27FC236}">
-                <a16:creationId xmlns:a16="http://schemas.microsoft.com/office/drawing/2014/main" id="{6E4CA600-81E3-4110-937E-F299A6D7991E}"/>
+                <a16:creationId xmlns:a16="http://schemas.microsoft.com/office/drawing/2014/main" id="{15FF16E4-D892-4CE4-A25F-4E61C042855B}"/>
               </a:ext>
             </a:extLst>
           </p:cNvPr>
@@ -9911,7 +9911,7 @@
           <p:cNvPr id="11" name="case-row-4">
             <a:extLst xmlns:a="http://schemas.openxmlformats.org/drawingml/2006/main">
               <a:ext uri="{FF2B5EF4-FFF2-40B4-BE49-F238E27FC236}">
-                <a16:creationId xmlns:a16="http://schemas.microsoft.com/office/drawing/2014/main" id="{090BD96D-ACC8-4FDE-9CCE-E6CBCC3BB9CC}"/>
+                <a16:creationId xmlns:a16="http://schemas.microsoft.com/office/drawing/2014/main" id="{2C9EEE77-1470-4786-ADE9-7FBB38828AE8}"/>
               </a:ext>
             </a:extLst>
           </p:cNvPr>
@@ -9975,7 +9975,7 @@
           <p:cNvPr id="12" name="s9-takeaway-rule">
             <a:extLst xmlns:a="http://schemas.openxmlformats.org/drawingml/2006/main">
               <a:ext uri="{FF2B5EF4-FFF2-40B4-BE49-F238E27FC236}">
-                <a16:creationId xmlns:a16="http://schemas.microsoft.com/office/drawing/2014/main" id="{5CA9B0D7-279C-4AC5-B5D1-0CB26D54F029}"/>
+                <a16:creationId xmlns:a16="http://schemas.microsoft.com/office/drawing/2014/main" id="{42A97631-2C0E-4028-964F-D24CE6ACF3B6}"/>
               </a:ext>
             </a:extLst>
           </p:cNvPr>
@@ -10008,7 +10008,7 @@
           <p:cNvPr id="13" name="s9-takeaway">
             <a:extLst xmlns:a="http://schemas.openxmlformats.org/drawingml/2006/main">
               <a:ext uri="{FF2B5EF4-FFF2-40B4-BE49-F238E27FC236}">
-                <a16:creationId xmlns:a16="http://schemas.microsoft.com/office/drawing/2014/main" id="{F0E902DB-5D10-4A30-8AB5-83F6D5EFC00A}"/>
+                <a16:creationId xmlns:a16="http://schemas.microsoft.com/office/drawing/2014/main" id="{B3A068A2-C711-447A-95BE-9F02CCB5F2BF}"/>
               </a:ext>
             </a:extLst>
           </p:cNvPr>
@@ -10064,7 +10064,7 @@
     </p:spTree>
     <p:extLst>
       <p:ext uri="{BB962C8B-B14F-4D97-AF65-F5344CB8AC3E}">
-        <p14:creationId xmlns:p14="http://schemas.microsoft.com/office/powerpoint/2010/main" val="847505309"/>
+        <p14:creationId xmlns:p14="http://schemas.microsoft.com/office/powerpoint/2010/main" val="1562546547"/>
       </p:ext>
     </p:extLst>
   </p:cSld>
